--- a/Aegis-Gate-Presentation.pptx
+++ b/Aegis-Gate-Presentation.pptx
@@ -2586,6 +2586,23 @@
             </a:r>
             <a:endParaRPr lang="en-US" sz="1600" dirty="0"/>
           </a:p>
+          <a:p>
+            <a:pPr indent="0" marL="0">
+              <a:buNone/>
+            </a:pPr>
+            <a:r>
+              <a:rPr lang="en-US" sz="1600" dirty="0">
+                <a:solidFill>
+                  <a:srgbClr val="9CA3AF"/>
+                </a:solidFill>
+                <a:latin typeface="Calibri" pitchFamily="34" charset="0"/>
+                <a:ea typeface="Calibri" pitchFamily="34" charset="-122"/>
+                <a:cs typeface="Calibri" pitchFamily="34" charset="-120"/>
+              </a:rPr>
+              <a:t>v0.1.x adds HA cluster mode, zero-trust upstream mTLS, smart caching, new detectors, and an AI copilot.</a:t>
+            </a:r>
+            <a:endParaRPr lang="en-US" sz="1600" dirty="0"/>
+          </a:p>
         </p:txBody>
       </p:sp>
       <p:sp>
@@ -2852,7 +2869,7 @@
                 <a:ea typeface="Arial Black" pitchFamily="34" charset="-122"/>
                 <a:cs typeface="Arial Black" pitchFamily="34" charset="-120"/>
               </a:rPr>
-              <a:t>17+</a:t>
+              <a:t>18+</a:t>
             </a:r>
             <a:endParaRPr lang="en-US" sz="3600" dirty="0"/>
           </a:p>
@@ -3104,7 +3121,7 @@
                 <a:ea typeface="Arial Black" pitchFamily="34" charset="-122"/>
                 <a:cs typeface="Arial Black" pitchFamily="34" charset="-120"/>
               </a:rPr>
-              <a:t>Aegis WAF Console  ·  17+ pages  ·  audit-mutated everything</a:t>
+              <a:t>Aegis WAF Console  ·  18+ pages  ·  audit-mutated everything</a:t>
             </a:r>
             <a:endParaRPr lang="en-US" sz="2600" dirty="0"/>
           </a:p>
@@ -3215,6 +3232,45 @@
       </p:sp>
       <p:sp>
         <p:nvSpPr>
+          <p:cNvPr id="213" name="Text 5"/>
+          <p:cNvSpPr/>
+          <p:nvPr/>
+        </p:nvSpPr>
+        <p:spPr>
+          <a:xfrm>
+            <a:off x="640080" y="5257800"/>
+            <a:ext cx="7315200" cy="274320"/>
+          </a:xfrm>
+          <a:prstGeom prst="rect">
+            <a:avLst/>
+          </a:prstGeom>
+          <a:noFill/>
+          <a:ln/>
+        </p:spPr>
+        <p:txBody>
+          <a:bodyPr wrap="square" lIns="0" tIns="0" rIns="0" bIns="0" rtlCol="0" anchor="ctr"/>
+          <a:lstStyle/>
+          <a:p>
+            <a:pPr indent="0" marL="0">
+              <a:buNone/>
+            </a:pPr>
+            <a:r>
+              <a:rPr lang="en-US" sz="1000" b="1" spc="300" kern="0" dirty="0">
+                <a:solidFill>
+                  <a:srgbClr val="FFD541"/>
+                </a:solidFill>
+                <a:latin typeface="Courier New" pitchFamily="34" charset="0"/>
+                <a:ea typeface="Courier New" pitchFamily="34" charset="-122"/>
+                <a:cs typeface="Courier New" pitchFamily="34" charset="-120"/>
+              </a:rPr>
+              <a:t>AI COPILOT  ·  beta  ·  advisory, opt-in</a:t>
+            </a:r>
+            <a:endParaRPr lang="en-US" sz="1000" dirty="0"/>
+          </a:p>
+        </p:txBody>
+      </p:sp>
+      <p:sp>
+        <p:nvSpPr>
           <p:cNvPr id="8" name="Text 6"/>
           <p:cNvSpPr/>
           <p:nvPr/>
@@ -3318,6 +3374,45 @@
       </p:sp>
       <p:sp>
         <p:nvSpPr>
+          <p:cNvPr id="214" name="Text 8"/>
+          <p:cNvSpPr/>
+          <p:nvPr/>
+        </p:nvSpPr>
+        <p:spPr>
+          <a:xfrm>
+            <a:off x="640080" y="5596128"/>
+            <a:ext cx="7498079" cy="384048"/>
+          </a:xfrm>
+          <a:prstGeom prst="rect">
+            <a:avLst/>
+          </a:prstGeom>
+          <a:noFill/>
+          <a:ln/>
+        </p:spPr>
+        <p:txBody>
+          <a:bodyPr wrap="square" lIns="0" tIns="0" rIns="0" bIns="0" rtlCol="0" anchor="ctr"/>
+          <a:lstStyle/>
+          <a:p>
+            <a:pPr indent="0" marL="0">
+              <a:buNone/>
+            </a:pPr>
+            <a:r>
+              <a:rPr lang="en-US" sz="1200" dirty="0">
+                <a:solidFill>
+                  <a:srgbClr val="E5E7EB"/>
+                </a:solidFill>
+                <a:latin typeface="Calibri" pitchFamily="34" charset="0"/>
+                <a:ea typeface="Calibri" pitchFamily="34" charset="-122"/>
+                <a:cs typeface="Calibri" pitchFamily="34" charset="-120"/>
+              </a:rPr>
+              <a:t>LLM situational briefs + smart-catch triage over the WAF's own telemetry — advisory only; cluster-aware (LLM_ENABLED + provider keys).</a:t>
+            </a:r>
+            <a:endParaRPr lang="en-US" sz="1200" dirty="0"/>
+          </a:p>
+        </p:txBody>
+      </p:sp>
+      <p:sp>
+        <p:nvSpPr>
           <p:cNvPr id="11" name="Shape 9"/>
           <p:cNvSpPr/>
           <p:nvPr/>
@@ -3535,6 +3630,31 @@
       </p:sp>
       <p:sp>
         <p:nvSpPr>
+          <p:cNvPr id="211" name="Shape 15"/>
+          <p:cNvSpPr/>
+          <p:nvPr/>
+        </p:nvSpPr>
+        <p:spPr>
+          <a:xfrm>
+            <a:off x="640080" y="4709160"/>
+            <a:ext cx="128016" cy="128016"/>
+          </a:xfrm>
+          <a:prstGeom prst="ellipse">
+            <a:avLst/>
+          </a:prstGeom>
+          <a:solidFill>
+            <a:srgbClr val="FFD541"/>
+          </a:solidFill>
+          <a:ln w="12700">
+            <a:solidFill>
+              <a:srgbClr val="FFD541"/>
+            </a:solidFill>
+            <a:prstDash val="solid"/>
+          </a:ln>
+        </p:spPr>
+      </p:sp>
+      <p:sp>
+        <p:nvSpPr>
           <p:cNvPr id="18" name="Text 16"/>
           <p:cNvSpPr/>
           <p:nvPr/>
@@ -3567,6 +3687,45 @@
                 <a:cs typeface="Calibri" pitchFamily="34" charset="-120"/>
               </a:rPr>
               <a:t>Top Attackers</a:t>
+            </a:r>
+            <a:endParaRPr lang="en-US" sz="1200" dirty="0"/>
+          </a:p>
+        </p:txBody>
+      </p:sp>
+      <p:sp>
+        <p:nvSpPr>
+          <p:cNvPr id="212" name="Text 16"/>
+          <p:cNvSpPr/>
+          <p:nvPr/>
+        </p:nvSpPr>
+        <p:spPr>
+          <a:xfrm>
+            <a:off x="841248" y="4617720"/>
+            <a:ext cx="1508760" cy="384048"/>
+          </a:xfrm>
+          <a:prstGeom prst="rect">
+            <a:avLst/>
+          </a:prstGeom>
+          <a:noFill/>
+          <a:ln/>
+        </p:spPr>
+        <p:txBody>
+          <a:bodyPr wrap="square" lIns="0" tIns="0" rIns="0" bIns="0" rtlCol="0" anchor="ctr"/>
+          <a:lstStyle/>
+          <a:p>
+            <a:pPr indent="0" marL="0">
+              <a:buNone/>
+            </a:pPr>
+            <a:r>
+              <a:rPr lang="en-US" sz="1200" dirty="0">
+                <a:solidFill>
+                  <a:srgbClr val="E5E7EB"/>
+                </a:solidFill>
+                <a:latin typeface="Calibri" pitchFamily="34" charset="0"/>
+                <a:ea typeface="Calibri" pitchFamily="34" charset="-122"/>
+                <a:cs typeface="Calibri" pitchFamily="34" charset="-120"/>
+              </a:rPr>
+              <a:t>AI Copilot</a:t>
             </a:r>
             <a:endParaRPr lang="en-US" sz="1200" dirty="0"/>
           </a:p>
@@ -3894,6 +4053,31 @@
       </p:sp>
       <p:sp>
         <p:nvSpPr>
+          <p:cNvPr id="209" name="Shape 26"/>
+          <p:cNvSpPr/>
+          <p:nvPr/>
+        </p:nvSpPr>
+        <p:spPr>
+          <a:xfrm>
+            <a:off x="2423160" y="4709160"/>
+            <a:ext cx="128016" cy="128016"/>
+          </a:xfrm>
+          <a:prstGeom prst="ellipse">
+            <a:avLst/>
+          </a:prstGeom>
+          <a:solidFill>
+            <a:srgbClr val="60A5FA"/>
+          </a:solidFill>
+          <a:ln w="12700">
+            <a:solidFill>
+              <a:srgbClr val="60A5FA"/>
+            </a:solidFill>
+            <a:prstDash val="solid"/>
+          </a:ln>
+        </p:spPr>
+      </p:sp>
+      <p:sp>
+        <p:nvSpPr>
           <p:cNvPr id="29" name="Text 27"/>
           <p:cNvSpPr/>
           <p:nvPr/>
@@ -3926,6 +4110,45 @@
                 <a:cs typeface="Calibri" pitchFamily="34" charset="-120"/>
               </a:rPr>
               <a:t>Rules</a:t>
+            </a:r>
+            <a:endParaRPr lang="en-US" sz="1200" dirty="0"/>
+          </a:p>
+        </p:txBody>
+      </p:sp>
+      <p:sp>
+        <p:nvSpPr>
+          <p:cNvPr id="210" name="Text 27"/>
+          <p:cNvSpPr/>
+          <p:nvPr/>
+        </p:nvSpPr>
+        <p:spPr>
+          <a:xfrm>
+            <a:off x="2624328" y="4617720"/>
+            <a:ext cx="1508760" cy="384048"/>
+          </a:xfrm>
+          <a:prstGeom prst="rect">
+            <a:avLst/>
+          </a:prstGeom>
+          <a:noFill/>
+          <a:ln/>
+        </p:spPr>
+        <p:txBody>
+          <a:bodyPr wrap="square" lIns="0" tIns="0" rIns="0" bIns="0" rtlCol="0" anchor="ctr"/>
+          <a:lstStyle/>
+          <a:p>
+            <a:pPr indent="0" marL="0">
+              <a:buNone/>
+            </a:pPr>
+            <a:r>
+              <a:rPr lang="en-US" sz="1200" dirty="0">
+                <a:solidFill>
+                  <a:srgbClr val="E5E7EB"/>
+                </a:solidFill>
+                <a:latin typeface="Calibri" pitchFamily="34" charset="0"/>
+                <a:ea typeface="Calibri" pitchFamily="34" charset="-122"/>
+                <a:cs typeface="Calibri" pitchFamily="34" charset="-120"/>
+              </a:rPr>
+              <a:t>Zero Trust</a:t>
             </a:r>
             <a:endParaRPr lang="en-US" sz="1200" dirty="0"/>
           </a:p>
@@ -6755,7 +6978,7 @@
                 <a:ea typeface="Calibri" pitchFamily="34" charset="-122"/>
                 <a:cs typeface="Calibri" pitchFamily="34" charset="-120"/>
               </a:rPr>
-              <a:t>Layer 1 + 3 ship today. Layer 2 (HA cluster) ships behind the ha-clustering track.</a:t>
+              <a:t>All three layers ship today — Layer 2 HA cluster is now live: N peers behind one VIP with shared config versioning + Redis leader lease.</a:t>
             </a:r>
             <a:endParaRPr lang="en-US" sz="1300" dirty="0"/>
           </a:p>
@@ -7281,7 +7504,7 @@
                 <a:ea typeface="Calibri" pitchFamily="34" charset="-122"/>
                 <a:cs typeface="Calibri" pitchFamily="34" charset="-120"/>
               </a:rPr>
-              <a:t>N peers behind a single VIP</a:t>
+              <a:t>N peers behind a single VIP · LIVE</a:t>
             </a:r>
             <a:endParaRPr lang="en-US" sz="1700" dirty="0"/>
           </a:p>
@@ -7320,7 +7543,41 @@
                 <a:ea typeface="Calibri" pitchFamily="34" charset="-122"/>
                 <a:cs typeface="Calibri" pitchFamily="34" charset="-120"/>
               </a:rPr>
-              <a:t>node.id + an LB in front of N peers. Redis-shared rate-limit counters + leader lease so only one node executes singleton work (TI feed refresh, ACME renewal, alert dedupe).</a:t>
+              <a:t>Live 2-node fleet (waf-a + waf-b) behind one VIP · per-node heartbeat + drain (readiness → 503).</a:t>
+            </a:r>
+            <a:endParaRPr lang="en-US" sz="1050" dirty="0"/>
+          </a:p>
+          <a:p>
+            <a:pPr indent="0" marL="0">
+              <a:buNone/>
+            </a:pPr>
+            <a:r>
+              <a:rPr lang="en-US" sz="1050" dirty="0">
+                <a:solidFill>
+                  <a:srgbClr val="9CA3AF"/>
+                </a:solidFill>
+                <a:latin typeface="Calibri" pitchFamily="34" charset="0"/>
+                <a:ea typeface="Calibri" pitchFamily="34" charset="-122"/>
+                <a:cs typeface="Calibri" pitchFamily="34" charset="-120"/>
+              </a:rPr>
+              <a:t>Shared config versioning — every peer converges to one version (v117, reported in-sync per node).</a:t>
+            </a:r>
+            <a:endParaRPr lang="en-US" sz="1050" dirty="0"/>
+          </a:p>
+          <a:p>
+            <a:pPr indent="0" marL="0">
+              <a:buNone/>
+            </a:pPr>
+            <a:r>
+              <a:rPr lang="en-US" sz="1050" dirty="0">
+                <a:solidFill>
+                  <a:srgbClr val="9CA3AF"/>
+                </a:solidFill>
+                <a:latin typeface="Calibri" pitchFamily="34" charset="0"/>
+                <a:ea typeface="Calibri" pitchFamily="34" charset="-122"/>
+                <a:cs typeface="Calibri" pitchFamily="34" charset="-120"/>
+              </a:rPr>
+              <a:t>Redis leader lease runs singleton work (TI refresh · ACME · alerts) on a single node.</a:t>
             </a:r>
             <a:endParaRPr lang="en-US" sz="1050" dirty="0"/>
           </a:p>
@@ -15164,7 +15421,7 @@
                 <a:ea typeface="Courier New" pitchFamily="34" charset="-122"/>
                 <a:cs typeface="Courier New" pitchFamily="34" charset="-120"/>
               </a:rPr>
-              <a:t>ai · 60</a:t>
+              <a:t>ai · 50</a:t>
             </a:r>
             <a:endParaRPr lang="en-US" sz="950" dirty="0"/>
           </a:p>
@@ -15370,7 +15627,7 @@
                 <a:ea typeface="Courier New" pitchFamily="34" charset="-122"/>
                 <a:cs typeface="Courier New" pitchFamily="34" charset="-120"/>
               </a:rPr>
-              <a:t>block ≥ 70</a:t>
+              <a:t>block ≥ 60</a:t>
             </a:r>
             <a:endParaRPr lang="en-US" sz="950" dirty="0"/>
           </a:p>
@@ -15473,7 +15730,7 @@
                 <a:ea typeface="Courier New" pitchFamily="34" charset="-122"/>
                 <a:cs typeface="Courier New" pitchFamily="34" charset="-120"/>
               </a:rPr>
-              <a:t>block ≥ 80</a:t>
+              <a:t>block ≥ 70</a:t>
             </a:r>
             <a:endParaRPr lang="en-US" sz="950" dirty="0"/>
           </a:p>
@@ -15576,7 +15833,7 @@
                 <a:ea typeface="Courier New" pitchFamily="34" charset="-122"/>
                 <a:cs typeface="Courier New" pitchFamily="34" charset="-120"/>
               </a:rPr>
-              <a:t>block ≥ 90</a:t>
+              <a:t>block ≥ 80</a:t>
             </a:r>
             <a:endParaRPr lang="en-US" sz="950" dirty="0"/>
           </a:p>
@@ -22430,7 +22687,7 @@
                 <a:ea typeface="Arial Black" pitchFamily="34" charset="-122"/>
                 <a:cs typeface="Arial Black" pitchFamily="34" charset="-120"/>
               </a:rPr>
-              <a:t>17+</a:t>
+              <a:t>18+</a:t>
             </a:r>
             <a:endParaRPr lang="en-US" sz="3600" dirty="0"/>
           </a:p>
@@ -26573,7 +26830,7 @@
                 <a:ea typeface="Calibri" pitchFamily="34" charset="-122"/>
                 <a:cs typeface="Calibri" pitchFamily="34" charset="-120"/>
               </a:rPr>
-              <a:t>Host + path trie  ·  5 LB strategies  ·  audit-mutated</a:t>
+              <a:t>Host + path trie  ·  5 LB strategies  ·  smart cache</a:t>
             </a:r>
             <a:endParaRPr lang="en-US" sz="1400" dirty="0"/>
           </a:p>
@@ -26612,7 +26869,41 @@
                 <a:ea typeface="Calibri" pitchFamily="34" charset="-122"/>
                 <a:cs typeface="Calibri" pitchFamily="34" charset="-120"/>
               </a:rPr>
-              <a:t>round_robin · weighted_round_robin · least_conn · consistent_hash · p2c. Per-member host_header override + SNI pinning for multi-vhost. Hostname-addressed members resolved + multi-A expanded at boot, TTL-aware DNS refresh in background.</a:t>
+              <a:t>round_robin · weighted · least_conn · consistent_hash · p2c · per-member SNI pinning.</a:t>
+            </a:r>
+            <a:endParaRPr lang="en-US" sz="1100" dirty="0"/>
+          </a:p>
+          <a:p>
+            <a:pPr indent="0" marL="0">
+              <a:buNone/>
+            </a:pPr>
+            <a:r>
+              <a:rPr lang="en-US" sz="1100" dirty="0">
+                <a:solidFill>
+                  <a:srgbClr val="9CA3AF"/>
+                </a:solidFill>
+                <a:latin typeface="Calibri" pitchFamily="34" charset="0"/>
+                <a:ea typeface="Calibri" pitchFamily="34" charset="-122"/>
+                <a:cs typeface="Calibri" pitchFamily="34" charset="-120"/>
+              </a:rPr>
+              <a:t>NEW — Smart cache: L1 in-process per-node response cache; repeat GET/HEAD from memory;</a:t>
+            </a:r>
+            <a:endParaRPr lang="en-US" sz="1100" dirty="0"/>
+          </a:p>
+          <a:p>
+            <a:pPr indent="0" marL="0">
+              <a:buNone/>
+            </a:pPr>
+            <a:r>
+              <a:rPr lang="en-US" sz="1100" dirty="0">
+                <a:solidFill>
+                  <a:srgbClr val="9CA3AF"/>
+                </a:solidFill>
+                <a:latin typeface="Calibri" pitchFamily="34" charset="0"/>
+                <a:ea typeface="Calibri" pitchFamily="34" charset="-122"/>
+                <a:cs typeface="Calibri" pitchFamily="34" charset="-120"/>
+              </a:rPr>
+              <a:t>never caches CRITICAL tier; per-pool path-prefix rules; Redis L2 tier planned.</a:t>
             </a:r>
             <a:endParaRPr lang="en-US" sz="1100" dirty="0"/>
           </a:p>
@@ -26740,7 +27031,7 @@
                 <a:ea typeface="Calibri" pitchFamily="34" charset="-122"/>
                 <a:cs typeface="Calibri" pitchFamily="34" charset="-120"/>
               </a:rPr>
-              <a:t>rustls 0.23  ·  ACME  ·  OCSP staple  ·  SAN allow-list</a:t>
+              <a:t>rustls 0.23  ·  ACME  ·  upstream mTLS  ·  Zero Trust (beta)</a:t>
             </a:r>
             <a:endParaRPr lang="en-US" sz="1400" dirty="0"/>
           </a:p>
@@ -26779,7 +27070,58 @@
                 <a:ea typeface="Calibri" pitchFamily="34" charset="-122"/>
                 <a:cs typeface="Calibri" pitchFamily="34" charset="-120"/>
               </a:rPr>
-              <a:t>Hot-reloadable cert store. Optional client-cert mTLS with SAN allow-list + audit-chained CA bundle hot-swap. ACME issuance + renewal via the cert resolver, no external sidecar.</a:t>
+              <a:t>Hot-reloadable cert store · client-cert mTLS w/ SAN allow-list · ACME issue + renew.</a:t>
+            </a:r>
+            <a:endParaRPr lang="en-US" sz="1100" dirty="0"/>
+          </a:p>
+          <a:p>
+            <a:pPr indent="0" marL="0">
+              <a:buNone/>
+            </a:pPr>
+            <a:r>
+              <a:rPr lang="en-US" sz="1100" dirty="0">
+                <a:solidFill>
+                  <a:srgbClr val="9CA3AF"/>
+                </a:solidFill>
+                <a:latin typeface="Calibri" pitchFamily="34" charset="0"/>
+                <a:ea typeface="Calibri" pitchFamily="34" charset="-122"/>
+                <a:cs typeface="Calibri" pitchFamily="34" charset="-120"/>
+              </a:rPr>
+              <a:t>NEW — Zero Trust: mutual TLS from the WAF to each backend pool. The WAF presents a</a:t>
+            </a:r>
+            <a:endParaRPr lang="en-US" sz="1100" dirty="0"/>
+          </a:p>
+          <a:p>
+            <a:pPr indent="0" marL="0">
+              <a:buNone/>
+            </a:pPr>
+            <a:r>
+              <a:rPr lang="en-US" sz="1100" dirty="0">
+                <a:solidFill>
+                  <a:srgbClr val="9CA3AF"/>
+                </a:solidFill>
+                <a:latin typeface="Calibri" pitchFamily="34" charset="0"/>
+                <a:ea typeface="Calibri" pitchFamily="34" charset="-122"/>
+                <a:cs typeface="Calibri" pitchFamily="34" charset="-120"/>
+              </a:rPr>
+              <a:t>downloadable, rotatable client identity; pin/upload a per-pool backend cert, toggle</a:t>
+            </a:r>
+            <a:endParaRPr lang="en-US" sz="1100" dirty="0"/>
+          </a:p>
+          <a:p>
+            <a:pPr indent="0" marL="0">
+              <a:buNone/>
+            </a:pPr>
+            <a:r>
+              <a:rPr lang="en-US" sz="1100" dirty="0">
+                <a:solidFill>
+                  <a:srgbClr val="9CA3AF"/>
+                </a:solidFill>
+                <a:latin typeface="Calibri" pitchFamily="34" charset="0"/>
+                <a:ea typeface="Calibri" pitchFamily="34" charset="-122"/>
+                <a:cs typeface="Calibri" pitchFamily="34" charset="-120"/>
+              </a:rPr>
+              <a:t>mTLS per pool, and track handshake failures by reason.</a:t>
             </a:r>
             <a:endParaRPr lang="en-US" sz="1100" dirty="0"/>
           </a:p>
@@ -27983,7 +28325,7 @@
                 <a:ea typeface="Courier New" pitchFamily="34" charset="-122"/>
                 <a:cs typeface="Courier New" pitchFamily="34" charset="-120"/>
               </a:rPr>
-              <a:t>OWASP DETECTORS  ·  per-class hot toggle</a:t>
+              <a:t>DETECTORS  ·  18 classes  ·  per-class hot toggle</a:t>
             </a:r>
             <a:endParaRPr lang="en-US" sz="1000" dirty="0"/>
           </a:p>
@@ -27997,7 +28339,7 @@
         </p:nvSpPr>
         <p:spPr>
           <a:xfrm>
-            <a:off x="548640" y="3387852"/>
+            <a:off x="548640" y="3355848"/>
             <a:ext cx="109728" cy="109728"/>
           </a:xfrm>
           <a:prstGeom prst="ellipse">
@@ -28016,91 +28358,13 @@
       </p:sp>
       <p:sp>
         <p:nvSpPr>
-          <p:cNvPr id="33" name="Text 31"/>
-          <p:cNvSpPr/>
-          <p:nvPr/>
-        </p:nvSpPr>
-        <p:spPr>
-          <a:xfrm>
-            <a:off x="731520" y="3337560"/>
-            <a:ext cx="1737360" cy="214884"/>
-          </a:xfrm>
-          <a:prstGeom prst="rect">
-            <a:avLst/>
-          </a:prstGeom>
-          <a:noFill/>
-          <a:ln/>
-        </p:spPr>
-        <p:txBody>
-          <a:bodyPr wrap="square" lIns="0" tIns="0" rIns="0" bIns="0" rtlCol="0" anchor="ctr"/>
-          <a:lstStyle/>
-          <a:p>
-            <a:pPr indent="0" marL="0">
-              <a:buNone/>
-            </a:pPr>
-            <a:r>
-              <a:rPr lang="en-US" sz="1000" b="1" dirty="0">
-                <a:solidFill>
-                  <a:srgbClr val="E5E7EB"/>
-                </a:solidFill>
-                <a:latin typeface="Courier New" pitchFamily="34" charset="0"/>
-                <a:ea typeface="Courier New" pitchFamily="34" charset="-122"/>
-                <a:cs typeface="Courier New" pitchFamily="34" charset="-120"/>
-              </a:rPr>
-              <a:t>sqli</a:t>
-            </a:r>
-            <a:endParaRPr lang="en-US" sz="1000" dirty="0"/>
-          </a:p>
-        </p:txBody>
-      </p:sp>
-      <p:sp>
-        <p:nvSpPr>
-          <p:cNvPr id="34" name="Text 32"/>
-          <p:cNvSpPr/>
-          <p:nvPr/>
-        </p:nvSpPr>
-        <p:spPr>
-          <a:xfrm>
-            <a:off x="2514600" y="3337560"/>
-            <a:ext cx="4526280" cy="214884"/>
-          </a:xfrm>
-          <a:prstGeom prst="rect">
-            <a:avLst/>
-          </a:prstGeom>
-          <a:noFill/>
-          <a:ln/>
-        </p:spPr>
-        <p:txBody>
-          <a:bodyPr wrap="square" lIns="0" tIns="0" rIns="0" bIns="0" rtlCol="0" anchor="ctr"/>
-          <a:lstStyle/>
-          <a:p>
-            <a:pPr indent="0" marL="0">
-              <a:buNone/>
-            </a:pPr>
-            <a:r>
-              <a:rPr lang="en-US" sz="950" dirty="0">
-                <a:solidFill>
-                  <a:srgbClr val="9CA3AF"/>
-                </a:solidFill>
-                <a:latin typeface="Calibri" pitchFamily="34" charset="0"/>
-                <a:ea typeface="Calibri" pitchFamily="34" charset="-122"/>
-                <a:cs typeface="Calibri" pitchFamily="34" charset="-120"/>
-              </a:rPr>
-              <a:t>ASCII + Unicode boundary, UNION, time-based</a:t>
-            </a:r>
-            <a:endParaRPr lang="en-US" sz="950" dirty="0"/>
-          </a:p>
-        </p:txBody>
-      </p:sp>
-      <p:sp>
-        <p:nvSpPr>
-          <p:cNvPr id="35" name="Shape 33"/>
-          <p:cNvSpPr/>
-          <p:nvPr/>
-        </p:nvSpPr>
-        <p:spPr>
-          <a:xfrm>
-            <a:off x="548640" y="3602736"/>
+          <p:cNvPr id="206" name="Shape 30"/>
+          <p:cNvSpPr/>
+          <p:nvPr/>
+        </p:nvSpPr>
+        <p:spPr>
+          <a:xfrm>
+            <a:off x="548640" y="6278270"/>
             <a:ext cx="109728" cy="109728"/>
           </a:xfrm>
           <a:prstGeom prst="ellipse">
@@ -28119,91 +28383,13 @@
       </p:sp>
       <p:sp>
         <p:nvSpPr>
-          <p:cNvPr id="36" name="Text 34"/>
-          <p:cNvSpPr/>
-          <p:nvPr/>
-        </p:nvSpPr>
-        <p:spPr>
-          <a:xfrm>
-            <a:off x="731520" y="3552444"/>
-            <a:ext cx="1737360" cy="214884"/>
-          </a:xfrm>
-          <a:prstGeom prst="rect">
-            <a:avLst/>
-          </a:prstGeom>
-          <a:noFill/>
-          <a:ln/>
-        </p:spPr>
-        <p:txBody>
-          <a:bodyPr wrap="square" lIns="0" tIns="0" rIns="0" bIns="0" rtlCol="0" anchor="ctr"/>
-          <a:lstStyle/>
-          <a:p>
-            <a:pPr indent="0" marL="0">
-              <a:buNone/>
-            </a:pPr>
-            <a:r>
-              <a:rPr lang="en-US" sz="1000" b="1" dirty="0">
-                <a:solidFill>
-                  <a:srgbClr val="E5E7EB"/>
-                </a:solidFill>
-                <a:latin typeface="Courier New" pitchFamily="34" charset="0"/>
-                <a:ea typeface="Courier New" pitchFamily="34" charset="-122"/>
-                <a:cs typeface="Courier New" pitchFamily="34" charset="-120"/>
-              </a:rPr>
-              <a:t>xss</a:t>
-            </a:r>
-            <a:endParaRPr lang="en-US" sz="1000" dirty="0"/>
-          </a:p>
-        </p:txBody>
-      </p:sp>
-      <p:sp>
-        <p:nvSpPr>
-          <p:cNvPr id="37" name="Text 35"/>
-          <p:cNvSpPr/>
-          <p:nvPr/>
-        </p:nvSpPr>
-        <p:spPr>
-          <a:xfrm>
-            <a:off x="2514600" y="3552444"/>
-            <a:ext cx="4526280" cy="214884"/>
-          </a:xfrm>
-          <a:prstGeom prst="rect">
-            <a:avLst/>
-          </a:prstGeom>
-          <a:noFill/>
-          <a:ln/>
-        </p:spPr>
-        <p:txBody>
-          <a:bodyPr wrap="square" lIns="0" tIns="0" rIns="0" bIns="0" rtlCol="0" anchor="ctr"/>
-          <a:lstStyle/>
-          <a:p>
-            <a:pPr indent="0" marL="0">
-              <a:buNone/>
-            </a:pPr>
-            <a:r>
-              <a:rPr lang="en-US" sz="950" dirty="0">
-                <a:solidFill>
-                  <a:srgbClr val="9CA3AF"/>
-                </a:solidFill>
-                <a:latin typeface="Calibri" pitchFamily="34" charset="0"/>
-                <a:ea typeface="Calibri" pitchFamily="34" charset="-122"/>
-                <a:cs typeface="Calibri" pitchFamily="34" charset="-120"/>
-              </a:rPr>
-              <a:t>Tag, attr, JS-URI, SVG payload, mixed-context</a:t>
-            </a:r>
-            <a:endParaRPr lang="en-US" sz="950" dirty="0"/>
-          </a:p>
-        </p:txBody>
-      </p:sp>
-      <p:sp>
-        <p:nvSpPr>
-          <p:cNvPr id="38" name="Shape 36"/>
-          <p:cNvSpPr/>
-          <p:nvPr/>
-        </p:nvSpPr>
-        <p:spPr>
-          <a:xfrm>
-            <a:off x="548640" y="3817620"/>
+          <p:cNvPr id="203" name="Shape 30"/>
+          <p:cNvSpPr/>
+          <p:nvPr/>
+        </p:nvSpPr>
+        <p:spPr>
+          <a:xfrm>
+            <a:off x="548640" y="6106363"/>
             <a:ext cx="109728" cy="109728"/>
           </a:xfrm>
           <a:prstGeom prst="ellipse">
@@ -28222,13 +28408,38 @@
       </p:sp>
       <p:sp>
         <p:nvSpPr>
-          <p:cNvPr id="39" name="Text 37"/>
-          <p:cNvSpPr/>
-          <p:nvPr/>
-        </p:nvSpPr>
-        <p:spPr>
-          <a:xfrm>
-            <a:off x="731520" y="3767328"/>
+          <p:cNvPr id="200" name="Shape 30"/>
+          <p:cNvSpPr/>
+          <p:nvPr/>
+        </p:nvSpPr>
+        <p:spPr>
+          <a:xfrm>
+            <a:off x="548640" y="5934455"/>
+            <a:ext cx="109728" cy="109728"/>
+          </a:xfrm>
+          <a:prstGeom prst="ellipse">
+            <a:avLst/>
+          </a:prstGeom>
+          <a:solidFill>
+            <a:srgbClr val="F87171"/>
+          </a:solidFill>
+          <a:ln w="12700">
+            <a:solidFill>
+              <a:srgbClr val="F87171"/>
+            </a:solidFill>
+            <a:prstDash val="solid"/>
+          </a:ln>
+        </p:spPr>
+      </p:sp>
+      <p:sp>
+        <p:nvSpPr>
+          <p:cNvPr id="33" name="Text 31"/>
+          <p:cNvSpPr/>
+          <p:nvPr/>
+        </p:nvSpPr>
+        <p:spPr>
+          <a:xfrm>
+            <a:off x="731520" y="3310128"/>
             <a:ext cx="1737360" cy="214884"/>
           </a:xfrm>
           <a:prstGeom prst="rect">
@@ -28253,7 +28464,7 @@
                 <a:ea typeface="Courier New" pitchFamily="34" charset="-122"/>
                 <a:cs typeface="Courier New" pitchFamily="34" charset="-120"/>
               </a:rPr>
-              <a:t>path_traversal</a:t>
+              <a:t>sqli</a:t>
             </a:r>
             <a:endParaRPr lang="en-US" sz="1000" dirty="0"/>
           </a:p>
@@ -28261,13 +28472,130 @@
       </p:sp>
       <p:sp>
         <p:nvSpPr>
-          <p:cNvPr id="40" name="Text 38"/>
-          <p:cNvSpPr/>
-          <p:nvPr/>
-        </p:nvSpPr>
-        <p:spPr>
-          <a:xfrm>
-            <a:off x="2514600" y="3767328"/>
+          <p:cNvPr id="207" name="Text 31"/>
+          <p:cNvSpPr/>
+          <p:nvPr/>
+        </p:nvSpPr>
+        <p:spPr>
+          <a:xfrm>
+            <a:off x="731520" y="6232550"/>
+            <a:ext cx="1737360" cy="214884"/>
+          </a:xfrm>
+          <a:prstGeom prst="rect">
+            <a:avLst/>
+          </a:prstGeom>
+          <a:noFill/>
+          <a:ln/>
+        </p:spPr>
+        <p:txBody>
+          <a:bodyPr wrap="square" lIns="0" tIns="0" rIns="0" bIns="0" rtlCol="0" anchor="ctr"/>
+          <a:lstStyle/>
+          <a:p>
+            <a:pPr indent="0" marL="0">
+              <a:buNone/>
+            </a:pPr>
+            <a:r>
+              <a:rPr lang="en-US" sz="1000" b="1" dirty="0">
+                <a:solidFill>
+                  <a:srgbClr val="E5E7EB"/>
+                </a:solidFill>
+                <a:latin typeface="Courier New" pitchFamily="34" charset="0"/>
+                <a:ea typeface="Courier New" pitchFamily="34" charset="-122"/>
+                <a:cs typeface="Courier New" pitchFamily="34" charset="-120"/>
+              </a:rPr>
+              <a:t>ai</a:t>
+            </a:r>
+            <a:endParaRPr lang="en-US" sz="1000" dirty="0"/>
+          </a:p>
+        </p:txBody>
+      </p:sp>
+      <p:sp>
+        <p:nvSpPr>
+          <p:cNvPr id="204" name="Text 31"/>
+          <p:cNvSpPr/>
+          <p:nvPr/>
+        </p:nvSpPr>
+        <p:spPr>
+          <a:xfrm>
+            <a:off x="731520" y="6060643"/>
+            <a:ext cx="1737360" cy="214884"/>
+          </a:xfrm>
+          <a:prstGeom prst="rect">
+            <a:avLst/>
+          </a:prstGeom>
+          <a:noFill/>
+          <a:ln/>
+        </p:spPr>
+        <p:txBody>
+          <a:bodyPr wrap="square" lIns="0" tIns="0" rIns="0" bIns="0" rtlCol="0" anchor="ctr"/>
+          <a:lstStyle/>
+          <a:p>
+            <a:pPr indent="0" marL="0">
+              <a:buNone/>
+            </a:pPr>
+            <a:r>
+              <a:rPr lang="en-US" sz="1000" b="1" dirty="0">
+                <a:solidFill>
+                  <a:srgbClr val="E5E7EB"/>
+                </a:solidFill>
+                <a:latin typeface="Courier New" pitchFamily="34" charset="0"/>
+                <a:ea typeface="Courier New" pitchFamily="34" charset="-122"/>
+                <a:cs typeface="Courier New" pitchFamily="34" charset="-120"/>
+              </a:rPr>
+              <a:t>canary</a:t>
+            </a:r>
+            <a:endParaRPr lang="en-US" sz="1000" dirty="0"/>
+          </a:p>
+        </p:txBody>
+      </p:sp>
+      <p:sp>
+        <p:nvSpPr>
+          <p:cNvPr id="201" name="Text 31"/>
+          <p:cNvSpPr/>
+          <p:nvPr/>
+        </p:nvSpPr>
+        <p:spPr>
+          <a:xfrm>
+            <a:off x="731520" y="5888736"/>
+            <a:ext cx="1737360" cy="214884"/>
+          </a:xfrm>
+          <a:prstGeom prst="rect">
+            <a:avLst/>
+          </a:prstGeom>
+          <a:noFill/>
+          <a:ln/>
+        </p:spPr>
+        <p:txBody>
+          <a:bodyPr wrap="square" lIns="0" tIns="0" rIns="0" bIns="0" rtlCol="0" anchor="ctr"/>
+          <a:lstStyle/>
+          <a:p>
+            <a:pPr indent="0" marL="0">
+              <a:buNone/>
+            </a:pPr>
+            <a:r>
+              <a:rPr lang="en-US" sz="1000" b="1" dirty="0">
+                <a:solidFill>
+                  <a:srgbClr val="E5E7EB"/>
+                </a:solidFill>
+                <a:latin typeface="Courier New" pitchFamily="34" charset="0"/>
+                <a:ea typeface="Courier New" pitchFamily="34" charset="-122"/>
+                <a:cs typeface="Courier New" pitchFamily="34" charset="-120"/>
+              </a:rPr>
+              <a:t>velocity</a:t>
+            </a:r>
+            <a:endParaRPr lang="en-US" sz="1000" dirty="0"/>
+          </a:p>
+        </p:txBody>
+      </p:sp>
+      <p:sp>
+        <p:nvSpPr>
+          <p:cNvPr id="34" name="Text 32"/>
+          <p:cNvSpPr/>
+          <p:nvPr/>
+        </p:nvSpPr>
+        <p:spPr>
+          <a:xfrm>
+            <a:off x="2514600" y="3310128"/>
             <a:ext cx="4526280" cy="214884"/>
           </a:xfrm>
           <a:prstGeom prst="rect">
@@ -28292,7 +28620,7 @@
                 <a:ea typeface="Calibri" pitchFamily="34" charset="-122"/>
                 <a:cs typeface="Calibri" pitchFamily="34" charset="-120"/>
               </a:rPr>
-              <a:t>../, %2e%2e, encoded, double-encoded, absolute</a:t>
+              <a:t>Classical · boolean · time-based · UNION</a:t>
             </a:r>
             <a:endParaRPr lang="en-US" sz="950" dirty="0"/>
           </a:p>
@@ -28300,13 +28628,336 @@
       </p:sp>
       <p:sp>
         <p:nvSpPr>
+          <p:cNvPr id="208" name="Text 32"/>
+          <p:cNvSpPr/>
+          <p:nvPr/>
+        </p:nvSpPr>
+        <p:spPr>
+          <a:xfrm>
+            <a:off x="2514600" y="6232550"/>
+            <a:ext cx="4526280" cy="214884"/>
+          </a:xfrm>
+          <a:prstGeom prst="rect">
+            <a:avLst/>
+          </a:prstGeom>
+          <a:noFill/>
+          <a:ln/>
+        </p:spPr>
+        <p:txBody>
+          <a:bodyPr wrap="square" lIns="0" tIns="0" rIns="0" bIns="0" rtlCol="0" anchor="ctr"/>
+          <a:lstStyle/>
+          <a:p>
+            <a:pPr indent="0" marL="0">
+              <a:buNone/>
+            </a:pPr>
+            <a:r>
+              <a:rPr lang="en-US" sz="950" dirty="0">
+                <a:solidFill>
+                  <a:srgbClr val="9CA3AF"/>
+                </a:solidFill>
+                <a:latin typeface="Calibri" pitchFamily="34" charset="0"/>
+                <a:ea typeface="Calibri" pitchFamily="34" charset="-122"/>
+                <a:cs typeface="Calibri" pitchFamily="34" charset="-120"/>
+              </a:rPr>
+              <a:t>ONNX · per-tier override · hot-reload</a:t>
+            </a:r>
+            <a:endParaRPr lang="en-US" sz="950" dirty="0"/>
+          </a:p>
+        </p:txBody>
+      </p:sp>
+      <p:sp>
+        <p:nvSpPr>
+          <p:cNvPr id="205" name="Text 32"/>
+          <p:cNvSpPr/>
+          <p:nvPr/>
+        </p:nvSpPr>
+        <p:spPr>
+          <a:xfrm>
+            <a:off x="2514600" y="6060643"/>
+            <a:ext cx="4526280" cy="214884"/>
+          </a:xfrm>
+          <a:prstGeom prst="rect">
+            <a:avLst/>
+          </a:prstGeom>
+          <a:noFill/>
+          <a:ln/>
+        </p:spPr>
+        <p:txBody>
+          <a:bodyPr wrap="square" lIns="0" tIns="0" rIns="0" bIns="0" rtlCol="0" anchor="ctr"/>
+          <a:lstStyle/>
+          <a:p>
+            <a:pPr indent="0" marL="0">
+              <a:buNone/>
+            </a:pPr>
+            <a:r>
+              <a:rPr lang="en-US" sz="950" dirty="0">
+                <a:solidFill>
+                  <a:srgbClr val="9CA3AF"/>
+                </a:solidFill>
+                <a:latin typeface="Calibri" pitchFamily="34" charset="0"/>
+                <a:ea typeface="Calibri" pitchFamily="34" charset="-122"/>
+                <a:cs typeface="Calibri" pitchFamily="34" charset="-120"/>
+              </a:rPr>
+              <a:t>Decoy paths (/admin, /.env) — instant block</a:t>
+            </a:r>
+            <a:endParaRPr lang="en-US" sz="950" dirty="0"/>
+          </a:p>
+        </p:txBody>
+      </p:sp>
+      <p:sp>
+        <p:nvSpPr>
+          <p:cNvPr id="202" name="Text 32"/>
+          <p:cNvSpPr/>
+          <p:nvPr/>
+        </p:nvSpPr>
+        <p:spPr>
+          <a:xfrm>
+            <a:off x="2514600" y="5888736"/>
+            <a:ext cx="4526280" cy="214884"/>
+          </a:xfrm>
+          <a:prstGeom prst="rect">
+            <a:avLst/>
+          </a:prstGeom>
+          <a:noFill/>
+          <a:ln/>
+        </p:spPr>
+        <p:txBody>
+          <a:bodyPr wrap="square" lIns="0" tIns="0" rIns="0" bIns="0" rtlCol="0" anchor="ctr"/>
+          <a:lstStyle/>
+          <a:p>
+            <a:pPr indent="0" marL="0">
+              <a:buNone/>
+            </a:pPr>
+            <a:r>
+              <a:rPr lang="en-US" sz="950" dirty="0">
+                <a:solidFill>
+                  <a:srgbClr val="9CA3AF"/>
+                </a:solidFill>
+                <a:latin typeface="Calibri" pitchFamily="34" charset="0"/>
+                <a:ea typeface="Calibri" pitchFamily="34" charset="-122"/>
+                <a:cs typeface="Calibri" pitchFamily="34" charset="-120"/>
+              </a:rPr>
+              <a:t>Cross-endpoint seq — login→deposit &lt;5s</a:t>
+            </a:r>
+            <a:endParaRPr lang="en-US" sz="950" dirty="0"/>
+          </a:p>
+        </p:txBody>
+      </p:sp>
+      <p:sp>
+        <p:nvSpPr>
+          <p:cNvPr id="35" name="Shape 33"/>
+          <p:cNvSpPr/>
+          <p:nvPr/>
+        </p:nvSpPr>
+        <p:spPr>
+          <a:xfrm>
+            <a:off x="548640" y="3527755"/>
+            <a:ext cx="109728" cy="109728"/>
+          </a:xfrm>
+          <a:prstGeom prst="ellipse">
+            <a:avLst/>
+          </a:prstGeom>
+          <a:solidFill>
+            <a:srgbClr val="F87171"/>
+          </a:solidFill>
+          <a:ln w="12700">
+            <a:solidFill>
+              <a:srgbClr val="F87171"/>
+            </a:solidFill>
+            <a:prstDash val="solid"/>
+          </a:ln>
+        </p:spPr>
+      </p:sp>
+      <p:sp>
+        <p:nvSpPr>
+          <p:cNvPr id="36" name="Text 34"/>
+          <p:cNvSpPr/>
+          <p:nvPr/>
+        </p:nvSpPr>
+        <p:spPr>
+          <a:xfrm>
+            <a:off x="731520" y="3482035"/>
+            <a:ext cx="1737360" cy="214884"/>
+          </a:xfrm>
+          <a:prstGeom prst="rect">
+            <a:avLst/>
+          </a:prstGeom>
+          <a:noFill/>
+          <a:ln/>
+        </p:spPr>
+        <p:txBody>
+          <a:bodyPr wrap="square" lIns="0" tIns="0" rIns="0" bIns="0" rtlCol="0" anchor="ctr"/>
+          <a:lstStyle/>
+          <a:p>
+            <a:pPr indent="0" marL="0">
+              <a:buNone/>
+            </a:pPr>
+            <a:r>
+              <a:rPr lang="en-US" sz="1000" b="1" dirty="0">
+                <a:solidFill>
+                  <a:srgbClr val="E5E7EB"/>
+                </a:solidFill>
+                <a:latin typeface="Courier New" pitchFamily="34" charset="0"/>
+                <a:ea typeface="Courier New" pitchFamily="34" charset="-122"/>
+                <a:cs typeface="Courier New" pitchFamily="34" charset="-120"/>
+              </a:rPr>
+              <a:t>xss</a:t>
+            </a:r>
+            <a:endParaRPr lang="en-US" sz="1000" dirty="0"/>
+          </a:p>
+        </p:txBody>
+      </p:sp>
+      <p:sp>
+        <p:nvSpPr>
+          <p:cNvPr id="37" name="Text 35"/>
+          <p:cNvSpPr/>
+          <p:nvPr/>
+        </p:nvSpPr>
+        <p:spPr>
+          <a:xfrm>
+            <a:off x="2514600" y="3482035"/>
+            <a:ext cx="4526280" cy="214884"/>
+          </a:xfrm>
+          <a:prstGeom prst="rect">
+            <a:avLst/>
+          </a:prstGeom>
+          <a:noFill/>
+          <a:ln/>
+        </p:spPr>
+        <p:txBody>
+          <a:bodyPr wrap="square" lIns="0" tIns="0" rIns="0" bIns="0" rtlCol="0" anchor="ctr"/>
+          <a:lstStyle/>
+          <a:p>
+            <a:pPr indent="0" marL="0">
+              <a:buNone/>
+            </a:pPr>
+            <a:r>
+              <a:rPr lang="en-US" sz="950" dirty="0">
+                <a:solidFill>
+                  <a:srgbClr val="9CA3AF"/>
+                </a:solidFill>
+                <a:latin typeface="Calibri" pitchFamily="34" charset="0"/>
+                <a:ea typeface="Calibri" pitchFamily="34" charset="-122"/>
+                <a:cs typeface="Calibri" pitchFamily="34" charset="-120"/>
+              </a:rPr>
+              <a:t>Tag · attr · JS-URI · SVG · mixed-context</a:t>
+            </a:r>
+            <a:endParaRPr lang="en-US" sz="950" dirty="0"/>
+          </a:p>
+        </p:txBody>
+      </p:sp>
+      <p:sp>
+        <p:nvSpPr>
+          <p:cNvPr id="38" name="Shape 36"/>
+          <p:cNvSpPr/>
+          <p:nvPr/>
+        </p:nvSpPr>
+        <p:spPr>
+          <a:xfrm>
+            <a:off x="548640" y="3699662"/>
+            <a:ext cx="109728" cy="109728"/>
+          </a:xfrm>
+          <a:prstGeom prst="ellipse">
+            <a:avLst/>
+          </a:prstGeom>
+          <a:solidFill>
+            <a:srgbClr val="F87171"/>
+          </a:solidFill>
+          <a:ln w="12700">
+            <a:solidFill>
+              <a:srgbClr val="F87171"/>
+            </a:solidFill>
+            <a:prstDash val="solid"/>
+          </a:ln>
+        </p:spPr>
+      </p:sp>
+      <p:sp>
+        <p:nvSpPr>
+          <p:cNvPr id="39" name="Text 37"/>
+          <p:cNvSpPr/>
+          <p:nvPr/>
+        </p:nvSpPr>
+        <p:spPr>
+          <a:xfrm>
+            <a:off x="731520" y="3653942"/>
+            <a:ext cx="1737360" cy="214884"/>
+          </a:xfrm>
+          <a:prstGeom prst="rect">
+            <a:avLst/>
+          </a:prstGeom>
+          <a:noFill/>
+          <a:ln/>
+        </p:spPr>
+        <p:txBody>
+          <a:bodyPr wrap="square" lIns="0" tIns="0" rIns="0" bIns="0" rtlCol="0" anchor="ctr"/>
+          <a:lstStyle/>
+          <a:p>
+            <a:pPr indent="0" marL="0">
+              <a:buNone/>
+            </a:pPr>
+            <a:r>
+              <a:rPr lang="en-US" sz="1000" b="1" dirty="0">
+                <a:solidFill>
+                  <a:srgbClr val="E5E7EB"/>
+                </a:solidFill>
+                <a:latin typeface="Courier New" pitchFamily="34" charset="0"/>
+                <a:ea typeface="Courier New" pitchFamily="34" charset="-122"/>
+                <a:cs typeface="Courier New" pitchFamily="34" charset="-120"/>
+              </a:rPr>
+              <a:t>path_traversal</a:t>
+            </a:r>
+            <a:endParaRPr lang="en-US" sz="1000" dirty="0"/>
+          </a:p>
+        </p:txBody>
+      </p:sp>
+      <p:sp>
+        <p:nvSpPr>
+          <p:cNvPr id="40" name="Text 38"/>
+          <p:cNvSpPr/>
+          <p:nvPr/>
+        </p:nvSpPr>
+        <p:spPr>
+          <a:xfrm>
+            <a:off x="2514600" y="3653942"/>
+            <a:ext cx="4526280" cy="214884"/>
+          </a:xfrm>
+          <a:prstGeom prst="rect">
+            <a:avLst/>
+          </a:prstGeom>
+          <a:noFill/>
+          <a:ln/>
+        </p:spPr>
+        <p:txBody>
+          <a:bodyPr wrap="square" lIns="0" tIns="0" rIns="0" bIns="0" rtlCol="0" anchor="ctr"/>
+          <a:lstStyle/>
+          <a:p>
+            <a:pPr indent="0" marL="0">
+              <a:buNone/>
+            </a:pPr>
+            <a:r>
+              <a:rPr lang="en-US" sz="950" dirty="0">
+                <a:solidFill>
+                  <a:srgbClr val="9CA3AF"/>
+                </a:solidFill>
+                <a:latin typeface="Calibri" pitchFamily="34" charset="0"/>
+                <a:ea typeface="Calibri" pitchFamily="34" charset="-122"/>
+                <a:cs typeface="Calibri" pitchFamily="34" charset="-120"/>
+              </a:rPr>
+              <a:t>../ · %2e%2e · encoded · double-encoded</a:t>
+            </a:r>
+            <a:endParaRPr lang="en-US" sz="950" dirty="0"/>
+          </a:p>
+        </p:txBody>
+      </p:sp>
+      <p:sp>
+        <p:nvSpPr>
           <p:cNvPr id="41" name="Shape 39"/>
           <p:cNvSpPr/>
           <p:nvPr/>
         </p:nvSpPr>
         <p:spPr>
           <a:xfrm>
-            <a:off x="548640" y="4032504"/>
+            <a:off x="548640" y="3871569"/>
             <a:ext cx="109728" cy="109728"/>
           </a:xfrm>
           <a:prstGeom prst="ellipse">
@@ -28331,7 +28982,7 @@
         </p:nvSpPr>
         <p:spPr>
           <a:xfrm>
-            <a:off x="731520" y="3982212"/>
+            <a:off x="731520" y="3825849"/>
             <a:ext cx="1737360" cy="214884"/>
           </a:xfrm>
           <a:prstGeom prst="rect">
@@ -28370,7 +29021,7 @@
         </p:nvSpPr>
         <p:spPr>
           <a:xfrm>
-            <a:off x="2514600" y="3982212"/>
+            <a:off x="2514600" y="3825849"/>
             <a:ext cx="4526280" cy="214884"/>
           </a:xfrm>
           <a:prstGeom prst="rect">
@@ -28395,7 +29046,7 @@
                 <a:ea typeface="Calibri" pitchFamily="34" charset="-122"/>
                 <a:cs typeface="Calibri" pitchFamily="34" charset="-120"/>
               </a:rPr>
-              <a:t>Metadata IPs, file://, gopher://, internal CIDRs</a:t>
+              <a:t>Metadata IPs · file:// · gopher:// · CIDRs</a:t>
             </a:r>
             <a:endParaRPr lang="en-US" sz="950" dirty="0"/>
           </a:p>
@@ -28409,7 +29060,7 @@
         </p:nvSpPr>
         <p:spPr>
           <a:xfrm>
-            <a:off x="548640" y="4247388"/>
+            <a:off x="548640" y="4043476"/>
             <a:ext cx="109728" cy="109728"/>
           </a:xfrm>
           <a:prstGeom prst="ellipse">
@@ -28434,7 +29085,7 @@
         </p:nvSpPr>
         <p:spPr>
           <a:xfrm>
-            <a:off x="731520" y="4197096"/>
+            <a:off x="731520" y="3997756"/>
             <a:ext cx="1737360" cy="214884"/>
           </a:xfrm>
           <a:prstGeom prst="rect">
@@ -28473,7 +29124,7 @@
         </p:nvSpPr>
         <p:spPr>
           <a:xfrm>
-            <a:off x="2514600" y="4197096"/>
+            <a:off x="2514600" y="3997756"/>
             <a:ext cx="4526280" cy="214884"/>
           </a:xfrm>
           <a:prstGeom prst="rect">
@@ -28498,7 +29149,7 @@
                 <a:ea typeface="Calibri" pitchFamily="34" charset="-122"/>
                 <a:cs typeface="Calibri" pitchFamily="34" charset="-120"/>
               </a:rPr>
-              <a:t>CRLF, smuggling, malformed via headers</a:t>
+              <a:t>CRLF · XFH poison · method/URL override</a:t>
             </a:r>
             <a:endParaRPr lang="en-US" sz="950" dirty="0"/>
           </a:p>
@@ -28512,7 +29163,7 @@
         </p:nvSpPr>
         <p:spPr>
           <a:xfrm>
-            <a:off x="548640" y="4462272"/>
+            <a:off x="548640" y="4215384"/>
             <a:ext cx="109728" cy="109728"/>
           </a:xfrm>
           <a:prstGeom prst="ellipse">
@@ -28537,7 +29188,7 @@
         </p:nvSpPr>
         <p:spPr>
           <a:xfrm>
-            <a:off x="731520" y="4411980"/>
+            <a:off x="731520" y="4169664"/>
             <a:ext cx="1737360" cy="214884"/>
           </a:xfrm>
           <a:prstGeom prst="rect">
@@ -28576,7 +29227,7 @@
         </p:nvSpPr>
         <p:spPr>
           <a:xfrm>
-            <a:off x="2514600" y="4411980"/>
+            <a:off x="2514600" y="4169664"/>
             <a:ext cx="4526280" cy="214884"/>
           </a:xfrm>
           <a:prstGeom prst="rect">
@@ -28601,7 +29252,7 @@
                 <a:ea typeface="Calibri" pitchFamily="34" charset="-122"/>
                 <a:cs typeface="Calibri" pitchFamily="34" charset="-120"/>
               </a:rPr>
-              <a:t>Oversize · depth · zip-bomb · proto-pollution</a:t>
+              <a:t>Oversize · depth · proto-pollution · XXE</a:t>
             </a:r>
             <a:endParaRPr lang="en-US" sz="950" dirty="0"/>
           </a:p>
@@ -28615,7 +29266,7 @@
         </p:nvSpPr>
         <p:spPr>
           <a:xfrm>
-            <a:off x="548640" y="4677156"/>
+            <a:off x="548640" y="4387291"/>
             <a:ext cx="109728" cy="109728"/>
           </a:xfrm>
           <a:prstGeom prst="ellipse">
@@ -28640,7 +29291,7 @@
         </p:nvSpPr>
         <p:spPr>
           <a:xfrm>
-            <a:off x="731520" y="4626864"/>
+            <a:off x="731520" y="4341571"/>
             <a:ext cx="1737360" cy="214884"/>
           </a:xfrm>
           <a:prstGeom prst="rect">
@@ -28665,7 +29316,7 @@
                 <a:ea typeface="Courier New" pitchFamily="34" charset="-122"/>
                 <a:cs typeface="Courier New" pitchFamily="34" charset="-120"/>
               </a:rPr>
-              <a:t>command_injection</a:t>
+              <a:t>recon</a:t>
             </a:r>
             <a:endParaRPr lang="en-US" sz="1000" dirty="0"/>
           </a:p>
@@ -28679,7 +29330,7 @@
         </p:nvSpPr>
         <p:spPr>
           <a:xfrm>
-            <a:off x="2514600" y="4626864"/>
+            <a:off x="2514600" y="4341571"/>
             <a:ext cx="4526280" cy="214884"/>
           </a:xfrm>
           <a:prstGeom prst="rect">
@@ -28704,7 +29355,7 @@
                 <a:ea typeface="Calibri" pitchFamily="34" charset="-122"/>
                 <a:cs typeface="Calibri" pitchFamily="34" charset="-120"/>
               </a:rPr>
-              <a:t>$(), |cmd, /bin/sh, Log4Shell ${jndi:...}</a:t>
+              <a:t>/.env, /wp-admin · sqlmap, nikto UAs</a:t>
             </a:r>
             <a:endParaRPr lang="en-US" sz="950" dirty="0"/>
           </a:p>
@@ -28718,7 +29369,7 @@
         </p:nvSpPr>
         <p:spPr>
           <a:xfrm>
-            <a:off x="548640" y="4892040"/>
+            <a:off x="548640" y="4559198"/>
             <a:ext cx="109728" cy="109728"/>
           </a:xfrm>
           <a:prstGeom prst="ellipse">
@@ -28743,7 +29394,7 @@
         </p:nvSpPr>
         <p:spPr>
           <a:xfrm>
-            <a:off x="731520" y="4841748"/>
+            <a:off x="731520" y="4513478"/>
             <a:ext cx="1737360" cy="214884"/>
           </a:xfrm>
           <a:prstGeom prst="rect">
@@ -28768,7 +29419,7 @@
                 <a:ea typeface="Courier New" pitchFamily="34" charset="-122"/>
                 <a:cs typeface="Courier New" pitchFamily="34" charset="-120"/>
               </a:rPr>
-              <a:t>template_injection</a:t>
+              <a:t>brute_force</a:t>
             </a:r>
             <a:endParaRPr lang="en-US" sz="1000" dirty="0"/>
           </a:p>
@@ -28782,7 +29433,7 @@
         </p:nvSpPr>
         <p:spPr>
           <a:xfrm>
-            <a:off x="2514600" y="4841748"/>
+            <a:off x="2514600" y="4513478"/>
             <a:ext cx="4526280" cy="214884"/>
           </a:xfrm>
           <a:prstGeom prst="rect">
@@ -28807,7 +29458,7 @@
                 <a:ea typeface="Calibri" pitchFamily="34" charset="-122"/>
                 <a:cs typeface="Calibri" pitchFamily="34" charset="-120"/>
               </a:rPr>
-              <a:t>Jinja2 / Twig / SpEL / Freemarker / Velocity</a:t>
+              <a:t>Login-failure cap · 10/min per IP</a:t>
             </a:r>
             <a:endParaRPr lang="en-US" sz="950" dirty="0"/>
           </a:p>
@@ -28821,7 +29472,7 @@
         </p:nvSpPr>
         <p:spPr>
           <a:xfrm>
-            <a:off x="548640" y="5106924"/>
+            <a:off x="548640" y="4731105"/>
             <a:ext cx="109728" cy="109728"/>
           </a:xfrm>
           <a:prstGeom prst="ellipse">
@@ -28846,7 +29497,7 @@
         </p:nvSpPr>
         <p:spPr>
           <a:xfrm>
-            <a:off x="731520" y="5056632"/>
+            <a:off x="731520" y="4685385"/>
             <a:ext cx="1737360" cy="214884"/>
           </a:xfrm>
           <a:prstGeom prst="rect">
@@ -28871,7 +29522,7 @@
                 <a:ea typeface="Courier New" pitchFamily="34" charset="-122"/>
                 <a:cs typeface="Courier New" pitchFamily="34" charset="-120"/>
               </a:rPr>
-              <a:t>nosql_injection</a:t>
+              <a:t>command_injection</a:t>
             </a:r>
             <a:endParaRPr lang="en-US" sz="1000" dirty="0"/>
           </a:p>
@@ -28885,7 +29536,7 @@
         </p:nvSpPr>
         <p:spPr>
           <a:xfrm>
-            <a:off x="2514600" y="5056632"/>
+            <a:off x="2514600" y="4685385"/>
             <a:ext cx="4526280" cy="214884"/>
           </a:xfrm>
           <a:prstGeom prst="rect">
@@ -28910,7 +29561,7 @@
                 <a:ea typeface="Calibri" pitchFamily="34" charset="-122"/>
                 <a:cs typeface="Calibri" pitchFamily="34" charset="-120"/>
               </a:rPr>
-              <a:t>[$ne], [$where], {"$gt":...} operators</a:t>
+              <a:t>$(), |cmd, /bin/sh · Log4Shell ${jndi}</a:t>
             </a:r>
             <a:endParaRPr lang="en-US" sz="950" dirty="0"/>
           </a:p>
@@ -28924,7 +29575,7 @@
         </p:nvSpPr>
         <p:spPr>
           <a:xfrm>
-            <a:off x="548640" y="5321808"/>
+            <a:off x="548640" y="4903012"/>
             <a:ext cx="109728" cy="109728"/>
           </a:xfrm>
           <a:prstGeom prst="ellipse">
@@ -28949,7 +29600,7 @@
         </p:nvSpPr>
         <p:spPr>
           <a:xfrm>
-            <a:off x="731520" y="5271516"/>
+            <a:off x="731520" y="4857292"/>
             <a:ext cx="1737360" cy="214884"/>
           </a:xfrm>
           <a:prstGeom prst="rect">
@@ -28974,7 +29625,7 @@
                 <a:ea typeface="Courier New" pitchFamily="34" charset="-122"/>
                 <a:cs typeface="Courier New" pitchFamily="34" charset="-120"/>
               </a:rPr>
-              <a:t>open_redirect</a:t>
+              <a:t>template_injection</a:t>
             </a:r>
             <a:endParaRPr lang="en-US" sz="1000" dirty="0"/>
           </a:p>
@@ -28988,7 +29639,7 @@
         </p:nvSpPr>
         <p:spPr>
           <a:xfrm>
-            <a:off x="2514600" y="5271516"/>
+            <a:off x="2514600" y="4857292"/>
             <a:ext cx="4526280" cy="214884"/>
           </a:xfrm>
           <a:prstGeom prst="rect">
@@ -29013,7 +29664,7 @@
                 <a:ea typeface="Calibri" pitchFamily="34" charset="-122"/>
                 <a:cs typeface="Calibri" pitchFamily="34" charset="-120"/>
               </a:rPr>
-              <a:t>?next=, ?redirect_uri= w/ operator allowlist</a:t>
+              <a:t>Jinja2 · Twig · Freemarker · SpEL</a:t>
             </a:r>
             <a:endParaRPr lang="en-US" sz="950" dirty="0"/>
           </a:p>
@@ -29027,7 +29678,7 @@
         </p:nvSpPr>
         <p:spPr>
           <a:xfrm>
-            <a:off x="548640" y="5536692"/>
+            <a:off x="548640" y="5074920"/>
             <a:ext cx="109728" cy="109728"/>
           </a:xfrm>
           <a:prstGeom prst="ellipse">
@@ -29052,7 +29703,7 @@
         </p:nvSpPr>
         <p:spPr>
           <a:xfrm>
-            <a:off x="731520" y="5486400"/>
+            <a:off x="731520" y="5029200"/>
             <a:ext cx="1737360" cy="214884"/>
           </a:xfrm>
           <a:prstGeom prst="rect">
@@ -29077,7 +29728,7 @@
                 <a:ea typeface="Courier New" pitchFamily="34" charset="-122"/>
                 <a:cs typeface="Courier New" pitchFamily="34" charset="-120"/>
               </a:rPr>
-              <a:t>recon</a:t>
+              <a:t>nosql_injection</a:t>
             </a:r>
             <a:endParaRPr lang="en-US" sz="1000" dirty="0"/>
           </a:p>
@@ -29091,7 +29742,7 @@
         </p:nvSpPr>
         <p:spPr>
           <a:xfrm>
-            <a:off x="2514600" y="5486400"/>
+            <a:off x="2514600" y="5029200"/>
             <a:ext cx="4526280" cy="214884"/>
           </a:xfrm>
           <a:prstGeom prst="rect">
@@ -29116,7 +29767,7 @@
                 <a:ea typeface="Calibri" pitchFamily="34" charset="-122"/>
                 <a:cs typeface="Calibri" pitchFamily="34" charset="-120"/>
               </a:rPr>
-              <a:t>sqlmap, nikto, burp, dirbuster, nuclei signatures</a:t>
+              <a:t>[$ne] · [$where] · {$gt} operators</a:t>
             </a:r>
             <a:endParaRPr lang="en-US" sz="950" dirty="0"/>
           </a:p>
@@ -29130,7 +29781,7 @@
         </p:nvSpPr>
         <p:spPr>
           <a:xfrm>
-            <a:off x="548640" y="5751576"/>
+            <a:off x="548640" y="5246827"/>
             <a:ext cx="109728" cy="109728"/>
           </a:xfrm>
           <a:prstGeom prst="ellipse">
@@ -29155,7 +29806,7 @@
         </p:nvSpPr>
         <p:spPr>
           <a:xfrm>
-            <a:off x="731520" y="5701284"/>
+            <a:off x="731520" y="5201107"/>
             <a:ext cx="1737360" cy="214884"/>
           </a:xfrm>
           <a:prstGeom prst="rect">
@@ -29180,7 +29831,7 @@
                 <a:ea typeface="Courier New" pitchFamily="34" charset="-122"/>
                 <a:cs typeface="Courier New" pitchFamily="34" charset="-120"/>
               </a:rPr>
-              <a:t>velocity</a:t>
+              <a:t>open_redirect</a:t>
             </a:r>
             <a:endParaRPr lang="en-US" sz="1000" dirty="0"/>
           </a:p>
@@ -29194,7 +29845,7 @@
         </p:nvSpPr>
         <p:spPr>
           <a:xfrm>
-            <a:off x="2514600" y="5701284"/>
+            <a:off x="2514600" y="5201107"/>
             <a:ext cx="4526280" cy="214884"/>
           </a:xfrm>
           <a:prstGeom prst="rect">
@@ -29219,7 +29870,7 @@
                 <a:ea typeface="Calibri" pitchFamily="34" charset="-122"/>
                 <a:cs typeface="Calibri" pitchFamily="34" charset="-120"/>
               </a:rPr>
-              <a:t>Velocity-sequence  ·  cadence + path entropy</a:t>
+              <a:t>?next= / ?redirect_uri= w/ allowlist</a:t>
             </a:r>
             <a:endParaRPr lang="en-US" sz="950" dirty="0"/>
           </a:p>
@@ -29233,7 +29884,7 @@
         </p:nvSpPr>
         <p:spPr>
           <a:xfrm>
-            <a:off x="548640" y="5966460"/>
+            <a:off x="548640" y="5418734"/>
             <a:ext cx="109728" cy="109728"/>
           </a:xfrm>
           <a:prstGeom prst="ellipse">
@@ -29258,7 +29909,7 @@
         </p:nvSpPr>
         <p:spPr>
           <a:xfrm>
-            <a:off x="731520" y="5916168"/>
+            <a:off x="731520" y="5373014"/>
             <a:ext cx="1737360" cy="214884"/>
           </a:xfrm>
           <a:prstGeom prst="rect">
@@ -29283,7 +29934,7 @@
                 <a:ea typeface="Courier New" pitchFamily="34" charset="-122"/>
                 <a:cs typeface="Courier New" pitchFamily="34" charset="-120"/>
               </a:rPr>
-              <a:t>brute_force</a:t>
+              <a:t>jwt_inspection</a:t>
             </a:r>
             <a:endParaRPr lang="en-US" sz="1000" dirty="0"/>
           </a:p>
@@ -29297,7 +29948,7 @@
         </p:nvSpPr>
         <p:spPr>
           <a:xfrm>
-            <a:off x="2514600" y="5916168"/>
+            <a:off x="2514600" y="5373014"/>
             <a:ext cx="4526280" cy="214884"/>
           </a:xfrm>
           <a:prstGeom prst="rect">
@@ -29322,7 +29973,7 @@
                 <a:ea typeface="Calibri" pitchFamily="34" charset="-122"/>
                 <a:cs typeface="Calibri" pitchFamily="34" charset="-120"/>
               </a:rPr>
-              <a:t>Per-IP + per-user lockout, distributed bypass</a:t>
+              <a:t>NEW · alg:none · x5c/jwk · kid · jku/x5u</a:t>
             </a:r>
             <a:endParaRPr lang="en-US" sz="950" dirty="0"/>
           </a:p>
@@ -29336,7 +29987,7 @@
         </p:nvSpPr>
         <p:spPr>
           <a:xfrm>
-            <a:off x="548640" y="6181344"/>
+            <a:off x="548640" y="5590641"/>
             <a:ext cx="109728" cy="109728"/>
           </a:xfrm>
           <a:prstGeom prst="ellipse">
@@ -29361,7 +30012,7 @@
         </p:nvSpPr>
         <p:spPr>
           <a:xfrm>
-            <a:off x="731520" y="6131052"/>
+            <a:off x="731520" y="5544921"/>
             <a:ext cx="1737360" cy="214884"/>
           </a:xfrm>
           <a:prstGeom prst="rect">
@@ -29386,7 +30037,7 @@
                 <a:ea typeface="Courier New" pitchFamily="34" charset="-122"/>
                 <a:cs typeface="Courier New" pitchFamily="34" charset="-120"/>
               </a:rPr>
-              <a:t>canary</a:t>
+              <a:t>cookie_injection</a:t>
             </a:r>
             <a:endParaRPr lang="en-US" sz="1000" dirty="0"/>
           </a:p>
@@ -29400,7 +30051,7 @@
         </p:nvSpPr>
         <p:spPr>
           <a:xfrm>
-            <a:off x="2514600" y="6131052"/>
+            <a:off x="2514600" y="5544921"/>
             <a:ext cx="4526280" cy="214884"/>
           </a:xfrm>
           <a:prstGeom prst="rect">
@@ -29425,7 +30076,7 @@
                 <a:ea typeface="Calibri" pitchFamily="34" charset="-122"/>
                 <a:cs typeface="Calibri" pitchFamily="34" charset="-120"/>
               </a:rPr>
-              <a:t>Decoy paths (/admin/, /.env, /.git) — instant block</a:t>
+              <a:t>NEW · SQLi/NoSQLi in session cookies</a:t>
             </a:r>
             <a:endParaRPr lang="en-US" sz="950" dirty="0"/>
           </a:p>
@@ -29439,7 +30090,7 @@
         </p:nvSpPr>
         <p:spPr>
           <a:xfrm>
-            <a:off x="548640" y="6396228"/>
+            <a:off x="548640" y="5762548"/>
             <a:ext cx="109728" cy="109728"/>
           </a:xfrm>
           <a:prstGeom prst="ellipse">
@@ -29464,7 +30115,7 @@
         </p:nvSpPr>
         <p:spPr>
           <a:xfrm>
-            <a:off x="731520" y="6345936"/>
+            <a:off x="731520" y="5716828"/>
             <a:ext cx="1737360" cy="214884"/>
           </a:xfrm>
           <a:prstGeom prst="rect">
@@ -29489,7 +30140,7 @@
                 <a:ea typeface="Courier New" pitchFamily="34" charset="-122"/>
                 <a:cs typeface="Courier New" pitchFamily="34" charset="-120"/>
               </a:rPr>
-              <a:t>ai</a:t>
+              <a:t>behavior_signals</a:t>
             </a:r>
             <a:endParaRPr lang="en-US" sz="1000" dirty="0"/>
           </a:p>
@@ -29503,7 +30154,7 @@
         </p:nvSpPr>
         <p:spPr>
           <a:xfrm>
-            <a:off x="2514600" y="6345936"/>
+            <a:off x="2514600" y="5716828"/>
             <a:ext cx="4526280" cy="214884"/>
           </a:xfrm>
           <a:prstGeom prst="rect">
@@ -29528,7 +30179,7 @@
                 <a:ea typeface="Calibri" pitchFamily="34" charset="-122"/>
                 <a:cs typeface="Calibri" pitchFamily="34" charset="-120"/>
               </a:rPr>
-              <a:t>ONNX classifier  ·  first-class togglable detector</a:t>
+              <a:t>NEW · missing UA/Referer · first-touch</a:t>
             </a:r>
             <a:endParaRPr lang="en-US" sz="950" dirty="0"/>
           </a:p>
@@ -29720,7 +30371,7 @@
                 <a:ea typeface="Courier New" pitchFamily="34" charset="-122"/>
                 <a:cs typeface="Courier New" pitchFamily="34" charset="-120"/>
               </a:rPr>
-              <a:t>block @ 60</a:t>
+              <a:t>block @ 50</a:t>
             </a:r>
             <a:endParaRPr lang="en-US" sz="1100" dirty="0"/>
           </a:p>
@@ -29862,7 +30513,7 @@
                 <a:ea typeface="Courier New" pitchFamily="34" charset="-122"/>
                 <a:cs typeface="Courier New" pitchFamily="34" charset="-120"/>
               </a:rPr>
-              <a:t>block @ 80</a:t>
+              <a:t>block @ 60</a:t>
             </a:r>
             <a:endParaRPr lang="en-US" sz="1100" dirty="0"/>
           </a:p>
@@ -30004,7 +30655,7 @@
                 <a:ea typeface="Courier New" pitchFamily="34" charset="-122"/>
                 <a:cs typeface="Courier New" pitchFamily="34" charset="-120"/>
               </a:rPr>
-              <a:t>block @ 100</a:t>
+              <a:t>block @ 70</a:t>
             </a:r>
             <a:endParaRPr lang="en-US" sz="1100" dirty="0"/>
           </a:p>
@@ -30146,7 +30797,7 @@
                 <a:ea typeface="Courier New" pitchFamily="34" charset="-122"/>
                 <a:cs typeface="Courier New" pitchFamily="34" charset="-120"/>
               </a:rPr>
-              <a:t>block @ 120</a:t>
+              <a:t>block @ 80</a:t>
             </a:r>
             <a:endParaRPr lang="en-US" sz="1100" dirty="0"/>
           </a:p>
@@ -30476,7 +31127,24 @@
                 <a:ea typeface="Calibri" pitchFamily="34" charset="-122"/>
                 <a:cs typeface="Calibri" pitchFamily="34" charset="-120"/>
               </a:rPr>
-              <a:t>Operator-supplied model loaded via ort 2.0.  26-feature extractor.  Hybrid `observe → enforce` rollout. First-class togglable detector.</a:t>
+              <a:t>Operator-supplied ONNX via ort 2.0 · 26-feature extractor · hybrid observe → enforce.</a:t>
+            </a:r>
+            <a:endParaRPr lang="en-US" sz="1300" dirty="0"/>
+          </a:p>
+          <a:p>
+            <a:pPr indent="0" marL="0">
+              <a:buNone/>
+            </a:pPr>
+            <a:r>
+              <a:rPr lang="en-US" sz="1300" i="1" dirty="0">
+                <a:solidFill>
+                  <a:srgbClr val="9CA3AF"/>
+                </a:solidFill>
+                <a:latin typeface="Calibri" pitchFamily="34" charset="0"/>
+                <a:ea typeface="Calibri" pitchFamily="34" charset="-122"/>
+                <a:cs typeface="Calibri" pitchFamily="34" charset="-120"/>
+              </a:rPr>
+              <a:t>Improved: per-tier deployment (Critical on / Low off) · hot model reload · calibrated confidence threshold.</a:t>
             </a:r>
             <a:endParaRPr lang="en-US" sz="1300" dirty="0"/>
           </a:p>

--- a/Aegis-Gate-Presentation.pptx
+++ b/Aegis-Gate-Presentation.pptx
@@ -5,6 +5,7 @@
     <p:sldMasterId id="2147483648" r:id="rId1"/>
   </p:sldMasterIdLst>
   <p:sldIdLst>
+    <p:sldId id="273" r:id="rId24"/>
     <p:sldId id="256" r:id="rId2"/>
     <p:sldId id="257" r:id="rId3"/>
     <p:sldId id="258" r:id="rId4"/>
@@ -2323,6 +2324,10 @@
             <a:prstDash val="solid"/>
           </a:ln>
         </p:spPr>
+        <p:txBody>
+          <a:bodyPr/>
+          <a:p/>
+        </p:txBody>
       </p:sp>
       <p:sp>
         <p:nvSpPr>
@@ -2348,6 +2353,10 @@
             <a:prstDash val="solid"/>
           </a:ln>
         </p:spPr>
+        <p:txBody>
+          <a:bodyPr/>
+          <a:p/>
+        </p:txBody>
       </p:sp>
       <p:sp>
         <p:nvSpPr>
@@ -2414,6 +2423,10 @@
             <a:prstDash val="solid"/>
           </a:ln>
         </p:spPr>
+        <p:txBody>
+          <a:bodyPr/>
+          <a:p/>
+        </p:txBody>
       </p:sp>
       <p:sp>
         <p:nvSpPr>
@@ -2629,6 +2642,10 @@
             <a:prstDash val="solid"/>
           </a:ln>
         </p:spPr>
+        <p:txBody>
+          <a:bodyPr/>
+          <a:p/>
+        </p:txBody>
       </p:sp>
       <p:sp>
         <p:nvSpPr>
@@ -2732,6 +2749,10 @@
             <a:prstDash val="solid"/>
           </a:ln>
         </p:spPr>
+        <p:txBody>
+          <a:bodyPr/>
+          <a:p/>
+        </p:txBody>
       </p:sp>
       <p:sp>
         <p:nvSpPr>
@@ -2835,6 +2856,10 @@
             <a:prstDash val="solid"/>
           </a:ln>
         </p:spPr>
+        <p:txBody>
+          <a:bodyPr/>
+          <a:p/>
+        </p:txBody>
       </p:sp>
       <p:sp>
         <p:nvSpPr>
@@ -2986,7 +3011,7 @@
                 <a:ea typeface="Calibri" pitchFamily="34" charset="-122"/>
                 <a:cs typeface="Calibri" pitchFamily="34" charset="-120"/>
               </a:rPr>
-              <a:t>1 / 17</a:t>
+              <a:t>2 / 18</a:t>
             </a:r>
             <a:endParaRPr lang="en-US" sz="900" dirty="0"/>
           </a:p>
@@ -3048,6 +3073,10 @@
             <a:prstDash val="solid"/>
           </a:ln>
         </p:spPr>
+        <p:txBody>
+          <a:bodyPr/>
+          <a:p/>
+        </p:txBody>
       </p:sp>
       <p:sp>
         <p:nvSpPr>
@@ -3190,6 +3219,10 @@
             <a:prstDash val="solid"/>
           </a:ln>
         </p:spPr>
+        <p:txBody>
+          <a:bodyPr/>
+          <a:p/>
+        </p:txBody>
       </p:sp>
       <p:sp>
         <p:nvSpPr>
@@ -3332,6 +3365,10 @@
             <a:prstDash val="solid"/>
           </a:ln>
         </p:spPr>
+        <p:txBody>
+          <a:bodyPr/>
+          <a:p/>
+        </p:txBody>
       </p:sp>
       <p:sp>
         <p:nvSpPr>
@@ -3435,6 +3472,10 @@
             <a:prstDash val="solid"/>
           </a:ln>
         </p:spPr>
+        <p:txBody>
+          <a:bodyPr/>
+          <a:p/>
+        </p:txBody>
       </p:sp>
       <p:sp>
         <p:nvSpPr>
@@ -3499,6 +3540,10 @@
             <a:prstDash val="solid"/>
           </a:ln>
         </p:spPr>
+        <p:txBody>
+          <a:bodyPr/>
+          <a:p/>
+        </p:txBody>
       </p:sp>
       <p:sp>
         <p:nvSpPr>
@@ -3563,6 +3608,10 @@
             <a:prstDash val="solid"/>
           </a:ln>
         </p:spPr>
+        <p:txBody>
+          <a:bodyPr/>
+          <a:p/>
+        </p:txBody>
       </p:sp>
       <p:sp>
         <p:nvSpPr>
@@ -3627,6 +3676,10 @@
             <a:prstDash val="solid"/>
           </a:ln>
         </p:spPr>
+        <p:txBody>
+          <a:bodyPr/>
+          <a:p/>
+        </p:txBody>
       </p:sp>
       <p:sp>
         <p:nvSpPr>
@@ -3652,6 +3705,10 @@
             <a:prstDash val="solid"/>
           </a:ln>
         </p:spPr>
+        <p:txBody>
+          <a:bodyPr/>
+          <a:p/>
+        </p:txBody>
       </p:sp>
       <p:sp>
         <p:nvSpPr>
@@ -3794,6 +3851,10 @@
             <a:prstDash val="solid"/>
           </a:ln>
         </p:spPr>
+        <p:txBody>
+          <a:bodyPr/>
+          <a:p/>
+        </p:txBody>
       </p:sp>
       <p:sp>
         <p:nvSpPr>
@@ -3858,6 +3919,10 @@
             <a:prstDash val="solid"/>
           </a:ln>
         </p:spPr>
+        <p:txBody>
+          <a:bodyPr/>
+          <a:p/>
+        </p:txBody>
       </p:sp>
       <p:sp>
         <p:nvSpPr>
@@ -3922,6 +3987,10 @@
             <a:prstDash val="solid"/>
           </a:ln>
         </p:spPr>
+        <p:txBody>
+          <a:bodyPr/>
+          <a:p/>
+        </p:txBody>
       </p:sp>
       <p:sp>
         <p:nvSpPr>
@@ -3986,6 +4055,10 @@
             <a:prstDash val="solid"/>
           </a:ln>
         </p:spPr>
+        <p:txBody>
+          <a:bodyPr/>
+          <a:p/>
+        </p:txBody>
       </p:sp>
       <p:sp>
         <p:nvSpPr>
@@ -4050,6 +4123,10 @@
             <a:prstDash val="solid"/>
           </a:ln>
         </p:spPr>
+        <p:txBody>
+          <a:bodyPr/>
+          <a:p/>
+        </p:txBody>
       </p:sp>
       <p:sp>
         <p:nvSpPr>
@@ -4075,6 +4152,10 @@
             <a:prstDash val="solid"/>
           </a:ln>
         </p:spPr>
+        <p:txBody>
+          <a:bodyPr/>
+          <a:p/>
+        </p:txBody>
       </p:sp>
       <p:sp>
         <p:nvSpPr>
@@ -4217,6 +4298,10 @@
             <a:prstDash val="solid"/>
           </a:ln>
         </p:spPr>
+        <p:txBody>
+          <a:bodyPr/>
+          <a:p/>
+        </p:txBody>
       </p:sp>
       <p:sp>
         <p:nvSpPr>
@@ -4281,6 +4366,10 @@
             <a:prstDash val="solid"/>
           </a:ln>
         </p:spPr>
+        <p:txBody>
+          <a:bodyPr/>
+          <a:p/>
+        </p:txBody>
       </p:sp>
       <p:sp>
         <p:nvSpPr>
@@ -4345,6 +4434,10 @@
             <a:prstDash val="solid"/>
           </a:ln>
         </p:spPr>
+        <p:txBody>
+          <a:bodyPr/>
+          <a:p/>
+        </p:txBody>
       </p:sp>
       <p:sp>
         <p:nvSpPr>
@@ -4409,6 +4502,10 @@
             <a:prstDash val="solid"/>
           </a:ln>
         </p:spPr>
+        <p:txBody>
+          <a:bodyPr/>
+          <a:p/>
+        </p:txBody>
       </p:sp>
       <p:sp>
         <p:nvSpPr>
@@ -4512,6 +4609,10 @@
             <a:prstDash val="solid"/>
           </a:ln>
         </p:spPr>
+        <p:txBody>
+          <a:bodyPr/>
+          <a:p/>
+        </p:txBody>
       </p:sp>
       <p:sp>
         <p:nvSpPr>
@@ -4576,6 +4677,10 @@
             <a:prstDash val="solid"/>
           </a:ln>
         </p:spPr>
+        <p:txBody>
+          <a:bodyPr/>
+          <a:p/>
+        </p:txBody>
       </p:sp>
       <p:sp>
         <p:nvSpPr>
@@ -4640,6 +4745,10 @@
             <a:prstDash val="solid"/>
           </a:ln>
         </p:spPr>
+        <p:txBody>
+          <a:bodyPr/>
+          <a:p/>
+        </p:txBody>
       </p:sp>
       <p:sp>
         <p:nvSpPr>
@@ -4704,6 +4813,10 @@
             <a:prstDash val="solid"/>
           </a:ln>
         </p:spPr>
+        <p:txBody>
+          <a:bodyPr/>
+          <a:p/>
+        </p:txBody>
       </p:sp>
       <p:sp>
         <p:nvSpPr>
@@ -4729,6 +4842,10 @@
             <a:prstDash val="solid"/>
           </a:ln>
         </p:spPr>
+        <p:txBody>
+          <a:bodyPr/>
+          <a:p/>
+        </p:txBody>
       </p:sp>
       <p:sp>
         <p:nvSpPr>
@@ -4962,6 +5079,10 @@
             <a:prstDash val="solid"/>
           </a:ln>
         </p:spPr>
+        <p:txBody>
+          <a:bodyPr/>
+          <a:p/>
+        </p:txBody>
       </p:sp>
       <p:sp>
         <p:nvSpPr>
@@ -4987,6 +5108,10 @@
             <a:prstDash val="solid"/>
           </a:ln>
         </p:spPr>
+        <p:txBody>
+          <a:bodyPr/>
+          <a:p/>
+        </p:txBody>
       </p:sp>
       <p:sp>
         <p:nvSpPr>
@@ -5244,7 +5369,7 @@
                 <a:ea typeface="Calibri" pitchFamily="34" charset="-122"/>
                 <a:cs typeface="Calibri" pitchFamily="34" charset="-120"/>
               </a:rPr>
-              <a:t>10 / 17</a:t>
+              <a:t>11 / 18</a:t>
             </a:r>
             <a:endParaRPr lang="en-US" sz="900" dirty="0"/>
           </a:p>
@@ -5306,6 +5431,10 @@
             <a:prstDash val="solid"/>
           </a:ln>
         </p:spPr>
+        <p:txBody>
+          <a:bodyPr/>
+          <a:p/>
+        </p:txBody>
       </p:sp>
       <p:sp>
         <p:nvSpPr>
@@ -5448,6 +5577,10 @@
             <a:prstDash val="solid"/>
           </a:ln>
         </p:spPr>
+        <p:txBody>
+          <a:bodyPr/>
+          <a:p/>
+        </p:txBody>
       </p:sp>
       <p:sp>
         <p:nvSpPr>
@@ -5473,6 +5606,10 @@
             <a:prstDash val="solid"/>
           </a:ln>
         </p:spPr>
+        <p:txBody>
+          <a:bodyPr/>
+          <a:p/>
+        </p:txBody>
       </p:sp>
       <p:sp>
         <p:nvSpPr>
@@ -5703,6 +5840,10 @@
             <a:prstDash val="solid"/>
           </a:ln>
         </p:spPr>
+        <p:txBody>
+          <a:bodyPr/>
+          <a:p/>
+        </p:txBody>
       </p:sp>
       <p:sp>
         <p:nvSpPr>
@@ -5728,6 +5869,10 @@
             <a:prstDash val="solid"/>
           </a:ln>
         </p:spPr>
+        <p:txBody>
+          <a:bodyPr/>
+          <a:p/>
+        </p:txBody>
       </p:sp>
       <p:sp>
         <p:nvSpPr>
@@ -5958,6 +6103,10 @@
             <a:prstDash val="solid"/>
           </a:ln>
         </p:spPr>
+        <p:txBody>
+          <a:bodyPr/>
+          <a:p/>
+        </p:txBody>
       </p:sp>
       <p:sp>
         <p:nvSpPr>
@@ -5983,6 +6132,10 @@
             <a:prstDash val="solid"/>
           </a:ln>
         </p:spPr>
+        <p:txBody>
+          <a:bodyPr/>
+          <a:p/>
+        </p:txBody>
       </p:sp>
       <p:sp>
         <p:nvSpPr>
@@ -6213,6 +6366,10 @@
             <a:prstDash val="solid"/>
           </a:ln>
         </p:spPr>
+        <p:txBody>
+          <a:bodyPr/>
+          <a:p/>
+        </p:txBody>
       </p:sp>
       <p:sp>
         <p:nvSpPr>
@@ -6238,6 +6395,10 @@
             <a:prstDash val="solid"/>
           </a:ln>
         </p:spPr>
+        <p:txBody>
+          <a:bodyPr/>
+          <a:p/>
+        </p:txBody>
       </p:sp>
       <p:sp>
         <p:nvSpPr>
@@ -6341,6 +6502,10 @@
             <a:prstDash val="solid"/>
           </a:ln>
         </p:spPr>
+        <p:txBody>
+          <a:bodyPr/>
+          <a:p/>
+        </p:txBody>
       </p:sp>
       <p:sp>
         <p:nvSpPr>
@@ -6804,7 +6969,7 @@
                 <a:ea typeface="Calibri" pitchFamily="34" charset="-122"/>
                 <a:cs typeface="Calibri" pitchFamily="34" charset="-120"/>
               </a:rPr>
-              <a:t>11 / 17</a:t>
+              <a:t>12 / 18</a:t>
             </a:r>
             <a:endParaRPr lang="en-US" sz="900" dirty="0"/>
           </a:p>
@@ -6866,6 +7031,10 @@
             <a:prstDash val="solid"/>
           </a:ln>
         </p:spPr>
+        <p:txBody>
+          <a:bodyPr/>
+          <a:p/>
+        </p:txBody>
       </p:sp>
       <p:sp>
         <p:nvSpPr>
@@ -7008,6 +7177,10 @@
             <a:prstDash val="solid"/>
           </a:ln>
         </p:spPr>
+        <p:txBody>
+          <a:bodyPr/>
+          <a:p/>
+        </p:txBody>
       </p:sp>
       <p:sp>
         <p:nvSpPr>
@@ -7033,6 +7206,10 @@
             <a:prstDash val="solid"/>
           </a:ln>
         </p:spPr>
+        <p:txBody>
+          <a:bodyPr/>
+          <a:p/>
+        </p:txBody>
       </p:sp>
       <p:sp>
         <p:nvSpPr>
@@ -7058,6 +7235,10 @@
             <a:prstDash val="solid"/>
           </a:ln>
         </p:spPr>
+        <p:txBody>
+          <a:bodyPr/>
+          <a:p/>
+        </p:txBody>
       </p:sp>
       <p:sp>
         <p:nvSpPr>
@@ -7239,6 +7420,10 @@
             <a:prstDash val="solid"/>
           </a:ln>
         </p:spPr>
+        <p:txBody>
+          <a:bodyPr/>
+          <a:p/>
+        </p:txBody>
       </p:sp>
       <p:sp>
         <p:nvSpPr>
@@ -7342,6 +7527,10 @@
             <a:prstDash val="solid"/>
           </a:ln>
         </p:spPr>
+        <p:txBody>
+          <a:bodyPr/>
+          <a:p/>
+        </p:txBody>
       </p:sp>
       <p:sp>
         <p:nvSpPr>
@@ -7367,6 +7556,10 @@
             <a:prstDash val="solid"/>
           </a:ln>
         </p:spPr>
+        <p:txBody>
+          <a:bodyPr/>
+          <a:p/>
+        </p:txBody>
       </p:sp>
       <p:sp>
         <p:nvSpPr>
@@ -7392,6 +7585,10 @@
             <a:prstDash val="solid"/>
           </a:ln>
         </p:spPr>
+        <p:txBody>
+          <a:bodyPr/>
+          <a:p/>
+        </p:txBody>
       </p:sp>
       <p:sp>
         <p:nvSpPr>
@@ -7607,6 +7804,10 @@
             <a:prstDash val="solid"/>
           </a:ln>
         </p:spPr>
+        <p:txBody>
+          <a:bodyPr/>
+          <a:p/>
+        </p:txBody>
       </p:sp>
       <p:sp>
         <p:nvSpPr>
@@ -7710,6 +7911,10 @@
             <a:prstDash val="solid"/>
           </a:ln>
         </p:spPr>
+        <p:txBody>
+          <a:bodyPr/>
+          <a:p/>
+        </p:txBody>
       </p:sp>
       <p:sp>
         <p:nvSpPr>
@@ -7735,6 +7940,10 @@
             <a:prstDash val="solid"/>
           </a:ln>
         </p:spPr>
+        <p:txBody>
+          <a:bodyPr/>
+          <a:p/>
+        </p:txBody>
       </p:sp>
       <p:sp>
         <p:nvSpPr>
@@ -7760,6 +7969,10 @@
             <a:prstDash val="solid"/>
           </a:ln>
         </p:spPr>
+        <p:txBody>
+          <a:bodyPr/>
+          <a:p/>
+        </p:txBody>
       </p:sp>
       <p:sp>
         <p:nvSpPr>
@@ -7941,6 +8154,10 @@
             <a:prstDash val="solid"/>
           </a:ln>
         </p:spPr>
+        <p:txBody>
+          <a:bodyPr/>
+          <a:p/>
+        </p:txBody>
       </p:sp>
       <p:sp>
         <p:nvSpPr>
@@ -8092,7 +8309,7 @@
                 <a:ea typeface="Calibri" pitchFamily="34" charset="-122"/>
                 <a:cs typeface="Calibri" pitchFamily="34" charset="-120"/>
               </a:rPr>
-              <a:t>12 / 17</a:t>
+              <a:t>13 / 18</a:t>
             </a:r>
             <a:endParaRPr lang="en-US" sz="900" dirty="0"/>
           </a:p>
@@ -8154,6 +8371,10 @@
             <a:prstDash val="solid"/>
           </a:ln>
         </p:spPr>
+        <p:txBody>
+          <a:bodyPr/>
+          <a:p/>
+        </p:txBody>
       </p:sp>
       <p:sp>
         <p:nvSpPr>
@@ -8296,6 +8517,10 @@
             <a:prstDash val="solid"/>
           </a:ln>
         </p:spPr>
+        <p:txBody>
+          <a:bodyPr/>
+          <a:p/>
+        </p:txBody>
       </p:sp>
       <p:sp>
         <p:nvSpPr>
@@ -8321,6 +8546,10 @@
             <a:prstDash val="solid"/>
           </a:ln>
         </p:spPr>
+        <p:txBody>
+          <a:bodyPr/>
+          <a:p/>
+        </p:txBody>
       </p:sp>
       <p:sp>
         <p:nvSpPr>
@@ -8463,6 +8692,10 @@
             <a:prstDash val="solid"/>
           </a:ln>
         </p:spPr>
+        <p:txBody>
+          <a:bodyPr/>
+          <a:p/>
+        </p:txBody>
       </p:sp>
       <p:sp>
         <p:nvSpPr>
@@ -8488,6 +8721,10 @@
             <a:prstDash val="solid"/>
           </a:ln>
         </p:spPr>
+        <p:txBody>
+          <a:bodyPr/>
+          <a:p/>
+        </p:txBody>
       </p:sp>
       <p:sp>
         <p:nvSpPr>
@@ -8630,6 +8867,10 @@
             <a:prstDash val="solid"/>
           </a:ln>
         </p:spPr>
+        <p:txBody>
+          <a:bodyPr/>
+          <a:p/>
+        </p:txBody>
       </p:sp>
       <p:sp>
         <p:nvSpPr>
@@ -8655,6 +8896,10 @@
             <a:prstDash val="solid"/>
           </a:ln>
         </p:spPr>
+        <p:txBody>
+          <a:bodyPr/>
+          <a:p/>
+        </p:txBody>
       </p:sp>
       <p:sp>
         <p:nvSpPr>
@@ -8797,6 +9042,10 @@
             <a:prstDash val="solid"/>
           </a:ln>
         </p:spPr>
+        <p:txBody>
+          <a:bodyPr/>
+          <a:p/>
+        </p:txBody>
       </p:sp>
       <p:sp>
         <p:nvSpPr>
@@ -8822,6 +9071,10 @@
             <a:prstDash val="solid"/>
           </a:ln>
         </p:spPr>
+        <p:txBody>
+          <a:bodyPr/>
+          <a:p/>
+        </p:txBody>
       </p:sp>
       <p:sp>
         <p:nvSpPr>
@@ -8993,6 +9246,10 @@
             <a:prstDash val="solid"/>
           </a:ln>
         </p:spPr>
+        <p:txBody>
+          <a:bodyPr/>
+          <a:p/>
+        </p:txBody>
       </p:sp>
       <p:sp>
         <p:nvSpPr>
@@ -9018,6 +9275,10 @@
             <a:prstDash val="solid"/>
           </a:ln>
         </p:spPr>
+        <p:txBody>
+          <a:bodyPr/>
+          <a:p/>
+        </p:txBody>
       </p:sp>
       <p:sp>
         <p:nvSpPr>
@@ -9292,7 +9553,7 @@
                 <a:ea typeface="Calibri" pitchFamily="34" charset="-122"/>
                 <a:cs typeface="Calibri" pitchFamily="34" charset="-120"/>
               </a:rPr>
-              <a:t>13 / 17</a:t>
+              <a:t>14 / 18</a:t>
             </a:r>
             <a:endParaRPr lang="en-US" sz="900" dirty="0"/>
           </a:p>
@@ -9354,6 +9615,10 @@
             <a:prstDash val="solid"/>
           </a:ln>
         </p:spPr>
+        <p:txBody>
+          <a:bodyPr/>
+          <a:p/>
+        </p:txBody>
       </p:sp>
       <p:sp>
         <p:nvSpPr>
@@ -9496,6 +9761,10 @@
             <a:prstDash val="solid"/>
           </a:ln>
         </p:spPr>
+        <p:txBody>
+          <a:bodyPr/>
+          <a:p/>
+        </p:txBody>
       </p:sp>
       <p:sp>
         <p:nvSpPr>
@@ -9599,6 +9868,10 @@
             <a:prstDash val="solid"/>
           </a:ln>
         </p:spPr>
+        <p:txBody>
+          <a:bodyPr/>
+          <a:p/>
+        </p:txBody>
       </p:sp>
       <p:sp>
         <p:nvSpPr>
@@ -9702,6 +9975,10 @@
             <a:prstDash val="solid"/>
           </a:ln>
         </p:spPr>
+        <p:txBody>
+          <a:bodyPr/>
+          <a:p/>
+        </p:txBody>
       </p:sp>
       <p:sp>
         <p:nvSpPr>
@@ -9805,6 +10082,10 @@
             <a:prstDash val="solid"/>
           </a:ln>
         </p:spPr>
+        <p:txBody>
+          <a:bodyPr/>
+          <a:p/>
+        </p:txBody>
       </p:sp>
       <p:sp>
         <p:nvSpPr>
@@ -9908,6 +10189,10 @@
             <a:prstDash val="solid"/>
           </a:ln>
         </p:spPr>
+        <p:txBody>
+          <a:bodyPr/>
+          <a:p/>
+        </p:txBody>
       </p:sp>
       <p:sp>
         <p:nvSpPr>
@@ -10011,6 +10296,10 @@
             <a:prstDash val="solid"/>
           </a:ln>
         </p:spPr>
+        <p:txBody>
+          <a:bodyPr/>
+          <a:p/>
+        </p:txBody>
       </p:sp>
       <p:sp>
         <p:nvSpPr>
@@ -10116,6 +10405,10 @@
             <a:prstDash val="solid"/>
           </a:ln>
         </p:spPr>
+        <p:txBody>
+          <a:bodyPr/>
+          <a:p/>
+        </p:txBody>
       </p:sp>
       <p:sp>
         <p:nvSpPr>
@@ -10143,6 +10436,10 @@
             <a:prstDash val="solid"/>
           </a:ln>
         </p:spPr>
+        <p:txBody>
+          <a:bodyPr/>
+          <a:p/>
+        </p:txBody>
       </p:sp>
       <p:sp>
         <p:nvSpPr>
@@ -10170,6 +10467,10 @@
             <a:prstDash val="solid"/>
           </a:ln>
         </p:spPr>
+        <p:txBody>
+          <a:bodyPr/>
+          <a:p/>
+        </p:txBody>
       </p:sp>
       <p:sp>
         <p:nvSpPr>
@@ -10197,6 +10498,10 @@
             <a:prstDash val="solid"/>
           </a:ln>
         </p:spPr>
+        <p:txBody>
+          <a:bodyPr/>
+          <a:p/>
+        </p:txBody>
       </p:sp>
       <p:sp>
         <p:nvSpPr>
@@ -10224,6 +10529,10 @@
             <a:prstDash val="solid"/>
           </a:ln>
         </p:spPr>
+        <p:txBody>
+          <a:bodyPr/>
+          <a:p/>
+        </p:txBody>
       </p:sp>
       <p:sp>
         <p:nvSpPr>
@@ -10251,6 +10560,10 @@
             <a:prstDash val="solid"/>
           </a:ln>
         </p:spPr>
+        <p:txBody>
+          <a:bodyPr/>
+          <a:p/>
+        </p:txBody>
       </p:sp>
       <p:sp>
         <p:nvSpPr>
@@ -10278,6 +10591,10 @@
             <a:prstDash val="solid"/>
           </a:ln>
         </p:spPr>
+        <p:txBody>
+          <a:bodyPr/>
+          <a:p/>
+        </p:txBody>
       </p:sp>
       <p:sp>
         <p:nvSpPr>
@@ -10305,6 +10622,10 @@
             <a:prstDash val="solid"/>
           </a:ln>
         </p:spPr>
+        <p:txBody>
+          <a:bodyPr/>
+          <a:p/>
+        </p:txBody>
       </p:sp>
       <p:sp>
         <p:nvSpPr>
@@ -10332,6 +10653,10 @@
             <a:prstDash val="solid"/>
           </a:ln>
         </p:spPr>
+        <p:txBody>
+          <a:bodyPr/>
+          <a:p/>
+        </p:txBody>
       </p:sp>
       <p:sp>
         <p:nvSpPr>
@@ -10359,6 +10684,10 @@
             <a:prstDash val="solid"/>
           </a:ln>
         </p:spPr>
+        <p:txBody>
+          <a:bodyPr/>
+          <a:p/>
+        </p:txBody>
       </p:sp>
       <p:sp>
         <p:nvSpPr>
@@ -10384,6 +10713,10 @@
             <a:prstDash val="solid"/>
           </a:ln>
         </p:spPr>
+        <p:txBody>
+          <a:bodyPr/>
+          <a:p/>
+        </p:txBody>
       </p:sp>
       <p:sp>
         <p:nvSpPr>
@@ -10448,6 +10781,10 @@
             <a:prstDash val="solid"/>
           </a:ln>
         </p:spPr>
+        <p:txBody>
+          <a:bodyPr/>
+          <a:p/>
+        </p:txBody>
       </p:sp>
       <p:sp>
         <p:nvSpPr>
@@ -10551,6 +10888,10 @@
             <a:prstDash val="solid"/>
           </a:ln>
         </p:spPr>
+        <p:txBody>
+          <a:bodyPr/>
+          <a:p/>
+        </p:txBody>
       </p:sp>
       <p:sp>
         <p:nvSpPr>
@@ -11124,6 +11465,10 @@
             <a:prstDash val="solid"/>
           </a:ln>
         </p:spPr>
+        <p:txBody>
+          <a:bodyPr/>
+          <a:p/>
+        </p:txBody>
       </p:sp>
       <p:sp>
         <p:nvSpPr>
@@ -11697,6 +12042,10 @@
             <a:prstDash val="solid"/>
           </a:ln>
         </p:spPr>
+        <p:txBody>
+          <a:bodyPr/>
+          <a:p/>
+        </p:txBody>
       </p:sp>
       <p:sp>
         <p:nvSpPr>
@@ -12270,6 +12619,10 @@
             <a:prstDash val="solid"/>
           </a:ln>
         </p:spPr>
+        <p:txBody>
+          <a:bodyPr/>
+          <a:p/>
+        </p:txBody>
       </p:sp>
       <p:sp>
         <p:nvSpPr>
@@ -12843,6 +13196,10 @@
             <a:prstDash val="solid"/>
           </a:ln>
         </p:spPr>
+        <p:txBody>
+          <a:bodyPr/>
+          <a:p/>
+        </p:txBody>
       </p:sp>
       <p:sp>
         <p:nvSpPr>
@@ -13416,6 +13773,10 @@
             <a:prstDash val="solid"/>
           </a:ln>
         </p:spPr>
+        <p:txBody>
+          <a:bodyPr/>
+          <a:p/>
+        </p:txBody>
       </p:sp>
       <p:sp>
         <p:nvSpPr>
@@ -13762,7 +14123,7 @@
                 <a:ea typeface="Calibri" pitchFamily="34" charset="-122"/>
                 <a:cs typeface="Calibri" pitchFamily="34" charset="-120"/>
               </a:rPr>
-              <a:t>14 / 17</a:t>
+              <a:t>15 / 18</a:t>
             </a:r>
             <a:endParaRPr lang="en-US" sz="900" dirty="0"/>
           </a:p>
@@ -13824,6 +14185,10 @@
             <a:prstDash val="solid"/>
           </a:ln>
         </p:spPr>
+        <p:txBody>
+          <a:bodyPr/>
+          <a:p/>
+        </p:txBody>
       </p:sp>
       <p:sp>
         <p:nvSpPr>
@@ -13966,6 +14331,10 @@
             <a:prstDash val="solid"/>
           </a:ln>
         </p:spPr>
+        <p:txBody>
+          <a:bodyPr/>
+          <a:p/>
+        </p:txBody>
       </p:sp>
       <p:sp>
         <p:nvSpPr>
@@ -14030,6 +14399,10 @@
             <a:prstDash val="solid"/>
           </a:ln>
         </p:spPr>
+        <p:txBody>
+          <a:bodyPr/>
+          <a:p/>
+        </p:txBody>
       </p:sp>
       <p:sp>
         <p:nvSpPr>
@@ -14445,6 +14818,10 @@
             <a:prstDash val="solid"/>
           </a:ln>
         </p:spPr>
+        <p:txBody>
+          <a:bodyPr/>
+          <a:p/>
+        </p:txBody>
       </p:sp>
       <p:sp>
         <p:nvSpPr>
@@ -14509,6 +14886,10 @@
             <a:prstDash val="solid"/>
           </a:ln>
         </p:spPr>
+        <p:txBody>
+          <a:bodyPr/>
+          <a:p/>
+        </p:txBody>
       </p:sp>
       <p:sp>
         <p:nvSpPr>
@@ -14573,6 +14954,10 @@
             <a:prstDash val="solid"/>
           </a:ln>
         </p:spPr>
+        <p:txBody>
+          <a:bodyPr/>
+          <a:p/>
+        </p:txBody>
       </p:sp>
       <p:sp>
         <p:nvSpPr>
@@ -14637,6 +15022,10 @@
             <a:prstDash val="solid"/>
           </a:ln>
         </p:spPr>
+        <p:txBody>
+          <a:bodyPr/>
+          <a:p/>
+        </p:txBody>
       </p:sp>
       <p:sp>
         <p:nvSpPr>
@@ -14701,6 +15090,10 @@
             <a:prstDash val="solid"/>
           </a:ln>
         </p:spPr>
+        <p:txBody>
+          <a:bodyPr/>
+          <a:p/>
+        </p:txBody>
       </p:sp>
       <p:sp>
         <p:nvSpPr>
@@ -14765,6 +15158,10 @@
             <a:prstDash val="solid"/>
           </a:ln>
         </p:spPr>
+        <p:txBody>
+          <a:bodyPr/>
+          <a:p/>
+        </p:txBody>
       </p:sp>
       <p:sp>
         <p:nvSpPr>
@@ -14829,6 +15226,10 @@
             <a:prstDash val="solid"/>
           </a:ln>
         </p:spPr>
+        <p:txBody>
+          <a:bodyPr/>
+          <a:p/>
+        </p:txBody>
       </p:sp>
       <p:sp>
         <p:nvSpPr>
@@ -14893,6 +15294,10 @@
             <a:prstDash val="solid"/>
           </a:ln>
         </p:spPr>
+        <p:txBody>
+          <a:bodyPr/>
+          <a:p/>
+        </p:txBody>
       </p:sp>
       <p:sp>
         <p:nvSpPr>
@@ -14957,6 +15362,10 @@
             <a:prstDash val="solid"/>
           </a:ln>
         </p:spPr>
+        <p:txBody>
+          <a:bodyPr/>
+          <a:p/>
+        </p:txBody>
       </p:sp>
       <p:sp>
         <p:nvSpPr>
@@ -15021,6 +15430,10 @@
             <a:prstDash val="solid"/>
           </a:ln>
         </p:spPr>
+        <p:txBody>
+          <a:bodyPr/>
+          <a:p/>
+        </p:txBody>
       </p:sp>
       <p:sp>
         <p:nvSpPr>
@@ -15085,6 +15498,10 @@
             <a:prstDash val="solid"/>
           </a:ln>
         </p:spPr>
+        <p:txBody>
+          <a:bodyPr/>
+          <a:p/>
+        </p:txBody>
       </p:sp>
       <p:sp>
         <p:nvSpPr>
@@ -15149,6 +15566,10 @@
             <a:prstDash val="solid"/>
           </a:ln>
         </p:spPr>
+        <p:txBody>
+          <a:bodyPr/>
+          <a:p/>
+        </p:txBody>
       </p:sp>
       <p:sp>
         <p:nvSpPr>
@@ -15213,6 +15634,10 @@
             <a:prstDash val="solid"/>
           </a:ln>
         </p:spPr>
+        <p:txBody>
+          <a:bodyPr/>
+          <a:p/>
+        </p:txBody>
       </p:sp>
       <p:sp>
         <p:nvSpPr>
@@ -15236,6 +15661,10 @@
             <a:prstDash val="solid"/>
           </a:ln>
         </p:spPr>
+        <p:txBody>
+          <a:bodyPr/>
+          <a:p/>
+        </p:txBody>
       </p:sp>
       <p:sp>
         <p:nvSpPr>
@@ -15300,6 +15729,10 @@
             <a:prstDash val="solid"/>
           </a:ln>
         </p:spPr>
+        <p:txBody>
+          <a:bodyPr/>
+          <a:p/>
+        </p:txBody>
       </p:sp>
       <p:sp>
         <p:nvSpPr>
@@ -15323,6 +15756,10 @@
             <a:prstDash val="solid"/>
           </a:ln>
         </p:spPr>
+        <p:txBody>
+          <a:bodyPr/>
+          <a:p/>
+        </p:txBody>
       </p:sp>
       <p:sp>
         <p:nvSpPr>
@@ -15387,6 +15824,10 @@
             <a:prstDash val="solid"/>
           </a:ln>
         </p:spPr>
+        <p:txBody>
+          <a:bodyPr/>
+          <a:p/>
+        </p:txBody>
       </p:sp>
       <p:sp>
         <p:nvSpPr>
@@ -15451,6 +15892,10 @@
             <a:prstDash val="solid"/>
           </a:ln>
         </p:spPr>
+        <p:txBody>
+          <a:bodyPr/>
+          <a:p/>
+        </p:txBody>
       </p:sp>
       <p:sp>
         <p:nvSpPr>
@@ -15554,6 +15999,10 @@
             <a:prstDash val="solid"/>
           </a:ln>
         </p:spPr>
+        <p:txBody>
+          <a:bodyPr/>
+          <a:p/>
+        </p:txBody>
       </p:sp>
       <p:sp>
         <p:nvSpPr>
@@ -15657,6 +16106,10 @@
             <a:prstDash val="solid"/>
           </a:ln>
         </p:spPr>
+        <p:txBody>
+          <a:bodyPr/>
+          <a:p/>
+        </p:txBody>
       </p:sp>
       <p:sp>
         <p:nvSpPr>
@@ -15760,6 +16213,10 @@
             <a:prstDash val="solid"/>
           </a:ln>
         </p:spPr>
+        <p:txBody>
+          <a:bodyPr/>
+          <a:p/>
+        </p:txBody>
       </p:sp>
       <p:sp>
         <p:nvSpPr>
@@ -15863,6 +16320,10 @@
             <a:prstDash val="solid"/>
           </a:ln>
         </p:spPr>
+        <p:txBody>
+          <a:bodyPr/>
+          <a:p/>
+        </p:txBody>
       </p:sp>
       <p:sp>
         <p:nvSpPr>
@@ -15927,6 +16388,10 @@
             <a:prstDash val="solid"/>
           </a:ln>
         </p:spPr>
+        <p:txBody>
+          <a:bodyPr/>
+          <a:p/>
+        </p:txBody>
       </p:sp>
       <p:sp>
         <p:nvSpPr>
@@ -15991,6 +16456,10 @@
             <a:prstDash val="solid"/>
           </a:ln>
         </p:spPr>
+        <p:txBody>
+          <a:bodyPr/>
+          <a:p/>
+        </p:txBody>
       </p:sp>
       <p:sp>
         <p:nvSpPr>
@@ -16094,6 +16563,10 @@
             <a:prstDash val="solid"/>
           </a:ln>
         </p:spPr>
+        <p:txBody>
+          <a:bodyPr/>
+          <a:p/>
+        </p:txBody>
       </p:sp>
       <p:sp>
         <p:nvSpPr>
@@ -16511,6 +16984,10 @@
             <a:prstDash val="solid"/>
           </a:ln>
         </p:spPr>
+        <p:txBody>
+          <a:bodyPr/>
+          <a:p/>
+        </p:txBody>
       </p:sp>
       <p:sp>
         <p:nvSpPr>
@@ -16928,6 +17405,10 @@
             <a:prstDash val="solid"/>
           </a:ln>
         </p:spPr>
+        <p:txBody>
+          <a:bodyPr/>
+          <a:p/>
+        </p:txBody>
       </p:sp>
       <p:sp>
         <p:nvSpPr>
@@ -17187,6 +17668,10 @@
             <a:prstDash val="solid"/>
           </a:ln>
         </p:spPr>
+        <p:txBody>
+          <a:bodyPr/>
+          <a:p/>
+        </p:txBody>
       </p:sp>
       <p:sp>
         <p:nvSpPr>
@@ -17212,6 +17697,10 @@
             <a:prstDash val="solid"/>
           </a:ln>
         </p:spPr>
+        <p:txBody>
+          <a:bodyPr/>
+          <a:p/>
+        </p:txBody>
       </p:sp>
       <p:sp>
         <p:nvSpPr>
@@ -17354,6 +17843,10 @@
             <a:prstDash val="solid"/>
           </a:ln>
         </p:spPr>
+        <p:txBody>
+          <a:bodyPr/>
+          <a:p/>
+        </p:txBody>
       </p:sp>
       <p:sp>
         <p:nvSpPr>
@@ -17379,6 +17872,10 @@
             <a:prstDash val="solid"/>
           </a:ln>
         </p:spPr>
+        <p:txBody>
+          <a:bodyPr/>
+          <a:p/>
+        </p:txBody>
       </p:sp>
       <p:sp>
         <p:nvSpPr>
@@ -17521,6 +18018,10 @@
             <a:prstDash val="solid"/>
           </a:ln>
         </p:spPr>
+        <p:txBody>
+          <a:bodyPr/>
+          <a:p/>
+        </p:txBody>
       </p:sp>
       <p:sp>
         <p:nvSpPr>
@@ -17546,6 +18047,10 @@
             <a:prstDash val="solid"/>
           </a:ln>
         </p:spPr>
+        <p:txBody>
+          <a:bodyPr/>
+          <a:p/>
+        </p:txBody>
       </p:sp>
       <p:sp>
         <p:nvSpPr>
@@ -17736,7 +18241,7 @@
                 <a:ea typeface="Calibri" pitchFamily="34" charset="-122"/>
                 <a:cs typeface="Calibri" pitchFamily="34" charset="-120"/>
               </a:rPr>
-              <a:t>15 / 17</a:t>
+              <a:t>16 / 18</a:t>
             </a:r>
             <a:endParaRPr lang="en-US" sz="900" dirty="0"/>
           </a:p>
@@ -17798,6 +18303,10 @@
             <a:prstDash val="solid"/>
           </a:ln>
         </p:spPr>
+        <p:txBody>
+          <a:bodyPr/>
+          <a:p/>
+        </p:txBody>
       </p:sp>
       <p:sp>
         <p:nvSpPr>
@@ -17940,6 +18449,10 @@
             <a:prstDash val="solid"/>
           </a:ln>
         </p:spPr>
+        <p:txBody>
+          <a:bodyPr/>
+          <a:p/>
+        </p:txBody>
       </p:sp>
       <p:sp>
         <p:nvSpPr>
@@ -17965,6 +18478,10 @@
             <a:prstDash val="solid"/>
           </a:ln>
         </p:spPr>
+        <p:txBody>
+          <a:bodyPr/>
+          <a:p/>
+        </p:txBody>
       </p:sp>
       <p:sp>
         <p:nvSpPr>
@@ -18331,6 +18848,10 @@
             <a:prstDash val="solid"/>
           </a:ln>
         </p:spPr>
+        <p:txBody>
+          <a:bodyPr/>
+          <a:p/>
+        </p:txBody>
       </p:sp>
       <p:sp>
         <p:nvSpPr>
@@ -18356,6 +18877,10 @@
             <a:prstDash val="solid"/>
           </a:ln>
         </p:spPr>
+        <p:txBody>
+          <a:bodyPr/>
+          <a:p/>
+        </p:txBody>
       </p:sp>
       <p:sp>
         <p:nvSpPr>
@@ -18718,6 +19243,10 @@
             <a:prstDash val="solid"/>
           </a:ln>
         </p:spPr>
+        <p:txBody>
+          <a:bodyPr/>
+          <a:p/>
+        </p:txBody>
       </p:sp>
       <p:sp>
         <p:nvSpPr>
@@ -18743,6 +19272,10 @@
             <a:prstDash val="solid"/>
           </a:ln>
         </p:spPr>
+        <p:txBody>
+          <a:bodyPr/>
+          <a:p/>
+        </p:txBody>
       </p:sp>
       <p:sp>
         <p:nvSpPr>
@@ -19076,6 +19609,10 @@
             <a:prstDash val="solid"/>
           </a:ln>
         </p:spPr>
+        <p:txBody>
+          <a:bodyPr/>
+          <a:p/>
+        </p:txBody>
       </p:sp>
       <p:sp>
         <p:nvSpPr>
@@ -19101,6 +19638,10 @@
             <a:prstDash val="solid"/>
           </a:ln>
         </p:spPr>
+        <p:txBody>
+          <a:bodyPr/>
+          <a:p/>
+        </p:txBody>
       </p:sp>
       <p:sp>
         <p:nvSpPr>
@@ -19252,7 +19793,7 @@
                 <a:ea typeface="Calibri" pitchFamily="34" charset="-122"/>
                 <a:cs typeface="Calibri" pitchFamily="34" charset="-120"/>
               </a:rPr>
-              <a:t>16 / 17</a:t>
+              <a:t>17 / 18</a:t>
             </a:r>
             <a:endParaRPr lang="en-US" sz="900" dirty="0"/>
           </a:p>
@@ -19314,6 +19855,10 @@
             <a:prstDash val="solid"/>
           </a:ln>
         </p:spPr>
+        <p:txBody>
+          <a:bodyPr/>
+          <a:p/>
+        </p:txBody>
       </p:sp>
       <p:sp>
         <p:nvSpPr>
@@ -19456,6 +20001,10 @@
             <a:prstDash val="solid"/>
           </a:ln>
         </p:spPr>
+        <p:txBody>
+          <a:bodyPr/>
+          <a:p/>
+        </p:txBody>
       </p:sp>
       <p:sp>
         <p:nvSpPr>
@@ -19481,6 +20030,10 @@
             <a:prstDash val="solid"/>
           </a:ln>
         </p:spPr>
+        <p:txBody>
+          <a:bodyPr/>
+          <a:p/>
+        </p:txBody>
       </p:sp>
       <p:sp>
         <p:nvSpPr>
@@ -19545,6 +20098,10 @@
             <a:prstDash val="solid"/>
           </a:ln>
         </p:spPr>
+        <p:txBody>
+          <a:bodyPr/>
+          <a:p/>
+        </p:txBody>
       </p:sp>
       <p:sp>
         <p:nvSpPr>
@@ -19570,6 +20127,10 @@
             <a:prstDash val="solid"/>
           </a:ln>
         </p:spPr>
+        <p:txBody>
+          <a:bodyPr/>
+          <a:p/>
+        </p:txBody>
       </p:sp>
       <p:sp>
         <p:nvSpPr>
@@ -19712,6 +20273,10 @@
             <a:prstDash val="solid"/>
           </a:ln>
         </p:spPr>
+        <p:txBody>
+          <a:bodyPr/>
+          <a:p/>
+        </p:txBody>
       </p:sp>
       <p:sp>
         <p:nvSpPr>
@@ -19737,6 +20302,10 @@
             <a:prstDash val="solid"/>
           </a:ln>
         </p:spPr>
+        <p:txBody>
+          <a:bodyPr/>
+          <a:p/>
+        </p:txBody>
       </p:sp>
       <p:sp>
         <p:nvSpPr>
@@ -19879,6 +20448,10 @@
             <a:prstDash val="solid"/>
           </a:ln>
         </p:spPr>
+        <p:txBody>
+          <a:bodyPr/>
+          <a:p/>
+        </p:txBody>
       </p:sp>
       <p:sp>
         <p:nvSpPr>
@@ -19904,6 +20477,10 @@
             <a:prstDash val="solid"/>
           </a:ln>
         </p:spPr>
+        <p:txBody>
+          <a:bodyPr/>
+          <a:p/>
+        </p:txBody>
       </p:sp>
       <p:sp>
         <p:nvSpPr>
@@ -20046,6 +20623,10 @@
             <a:prstDash val="solid"/>
           </a:ln>
         </p:spPr>
+        <p:txBody>
+          <a:bodyPr/>
+          <a:p/>
+        </p:txBody>
       </p:sp>
       <p:sp>
         <p:nvSpPr>
@@ -20071,6 +20652,10 @@
             <a:prstDash val="solid"/>
           </a:ln>
         </p:spPr>
+        <p:txBody>
+          <a:bodyPr/>
+          <a:p/>
+        </p:txBody>
       </p:sp>
       <p:sp>
         <p:nvSpPr>
@@ -20213,6 +20798,10 @@
             <a:prstDash val="solid"/>
           </a:ln>
         </p:spPr>
+        <p:txBody>
+          <a:bodyPr/>
+          <a:p/>
+        </p:txBody>
       </p:sp>
       <p:sp>
         <p:nvSpPr>
@@ -20238,6 +20827,10 @@
             <a:prstDash val="solid"/>
           </a:ln>
         </p:spPr>
+        <p:txBody>
+          <a:bodyPr/>
+          <a:p/>
+        </p:txBody>
       </p:sp>
       <p:sp>
         <p:nvSpPr>
@@ -20375,6 +20968,10 @@
             <a:prstDash val="solid"/>
           </a:ln>
         </p:spPr>
+        <p:txBody>
+          <a:bodyPr/>
+          <a:p/>
+        </p:txBody>
       </p:sp>
       <p:sp>
         <p:nvSpPr>
@@ -20400,6 +20997,10 @@
             <a:prstDash val="solid"/>
           </a:ln>
         </p:spPr>
+        <p:txBody>
+          <a:bodyPr/>
+          <a:p/>
+        </p:txBody>
       </p:sp>
       <p:sp>
         <p:nvSpPr>
@@ -20980,9 +21581,936 @@
                 <a:ea typeface="Calibri" pitchFamily="34" charset="-122"/>
                 <a:cs typeface="Calibri" pitchFamily="34" charset="-120"/>
               </a:rPr>
-              <a:t>17 / 17</a:t>
+              <a:t>18 / 18</a:t>
             </a:r>
             <a:endParaRPr lang="en-US" sz="900" dirty="0"/>
+          </a:p>
+        </p:txBody>
+      </p:sp>
+    </p:spTree>
+  </p:cSld>
+  <p:clrMapOvr>
+    <a:masterClrMapping/>
+  </p:clrMapOvr>
+</p:sld>
+</file>
+
+<file path=ppt/slides/slide18.xml><?xml version="1.0" encoding="utf-8"?>
+<p:sld xmlns:a="http://schemas.openxmlformats.org/drawingml/2006/main" xmlns:p="http://schemas.openxmlformats.org/presentationml/2006/main" xmlns:r="http://schemas.openxmlformats.org/officeDocument/2006/relationships">
+  <p:cSld>
+    <p:bg>
+      <p:bgPr>
+        <a:solidFill>
+          <a:srgbClr val="0B0F1A"/>
+        </a:solidFill>
+        <a:effectLst/>
+      </p:bgPr>
+    </p:bg>
+    <p:spTree>
+      <p:nvGrpSpPr>
+        <p:cNvPr id="1" name=""/>
+        <p:cNvGrpSpPr/>
+        <p:nvPr/>
+      </p:nvGrpSpPr>
+      <p:grpSpPr/>
+      <p:sp>
+        <p:nvSpPr>
+          <p:cNvPr id="2" name="Rectangle 1"/>
+          <p:cNvSpPr/>
+          <p:nvPr/>
+        </p:nvSpPr>
+        <p:spPr>
+          <a:xfrm>
+            <a:off x="0" y="0"/>
+            <a:ext cx="73152" cy="6858000"/>
+          </a:xfrm>
+          <a:prstGeom prst="rect">
+            <a:avLst/>
+          </a:prstGeom>
+          <a:solidFill>
+            <a:srgbClr val="FFD541"/>
+          </a:solidFill>
+          <a:ln>
+            <a:noFill/>
+          </a:ln>
+          <a:effectLst/>
+        </p:spPr>
+        <p:style>
+          <a:lnRef idx="1">
+            <a:schemeClr val="accent1"/>
+          </a:lnRef>
+          <a:fillRef idx="3">
+            <a:schemeClr val="accent1"/>
+          </a:fillRef>
+          <a:effectRef idx="2">
+            <a:schemeClr val="accent1"/>
+          </a:effectRef>
+          <a:fontRef idx="minor">
+            <a:schemeClr val="lt1"/>
+          </a:fontRef>
+        </p:style>
+        <p:txBody>
+          <a:bodyPr rtlCol="0" anchor="ctr"/>
+          <a:lstStyle/>
+          <a:p>
+            <a:pPr algn="ctr"/>
+          </a:p>
+        </p:txBody>
+      </p:sp>
+      <p:sp>
+        <p:nvSpPr>
+          <p:cNvPr id="3" name="TextBox 2"/>
+          <p:cNvSpPr txBox="1"/>
+          <p:nvPr/>
+        </p:nvSpPr>
+        <p:spPr>
+          <a:xfrm>
+            <a:off x="365760" y="274320"/>
+            <a:ext cx="10972800" cy="256032"/>
+          </a:xfrm>
+          <a:prstGeom prst="rect">
+            <a:avLst/>
+          </a:prstGeom>
+          <a:noFill/>
+        </p:spPr>
+        <p:txBody>
+          <a:bodyPr wrap="square" anchor="t" lIns="0" rIns="0" tIns="0" bIns="0">
+            <a:spAutoFit/>
+          </a:bodyPr>
+          <a:lstStyle/>
+          <a:p>
+            <a:r>
+              <a:rPr sz="1100" b="1">
+                <a:solidFill>
+                  <a:srgbClr val="FFD541"/>
+                </a:solidFill>
+                <a:latin typeface="Courier New"/>
+              </a:rPr>
+              <a:t>PROJECT OBJECTIVES</a:t>
+            </a:r>
+          </a:p>
+        </p:txBody>
+      </p:sp>
+      <p:sp>
+        <p:nvSpPr>
+          <p:cNvPr id="4" name="TextBox 3"/>
+          <p:cNvSpPr txBox="1"/>
+          <p:nvPr/>
+        </p:nvSpPr>
+        <p:spPr>
+          <a:xfrm>
+            <a:off x="365760" y="548640"/>
+            <a:ext cx="11430000" cy="548640"/>
+          </a:xfrm>
+          <a:prstGeom prst="rect">
+            <a:avLst/>
+          </a:prstGeom>
+          <a:noFill/>
+        </p:spPr>
+        <p:txBody>
+          <a:bodyPr wrap="square" anchor="t" lIns="0" rIns="0" tIns="0" bIns="0">
+            <a:spAutoFit/>
+          </a:bodyPr>
+          <a:lstStyle/>
+          <a:p>
+            <a:r>
+              <a:rPr sz="2600" b="1">
+                <a:solidFill>
+                  <a:srgbClr val="E5E7EB"/>
+                </a:solidFill>
+                <a:latin typeface="Arial Black"/>
+              </a:rPr>
+              <a:t>Why we’re building Aegis-Gate</a:t>
+            </a:r>
+          </a:p>
+        </p:txBody>
+      </p:sp>
+      <p:sp>
+        <p:nvSpPr>
+          <p:cNvPr id="5" name="TextBox 4"/>
+          <p:cNvSpPr txBox="1"/>
+          <p:nvPr/>
+        </p:nvSpPr>
+        <p:spPr>
+          <a:xfrm>
+            <a:off x="365760" y="1115568"/>
+            <a:ext cx="11430000" cy="365760"/>
+          </a:xfrm>
+          <a:prstGeom prst="rect">
+            <a:avLst/>
+          </a:prstGeom>
+          <a:noFill/>
+        </p:spPr>
+        <p:txBody>
+          <a:bodyPr wrap="square" anchor="t" lIns="0" rIns="0" tIns="0" bIns="0">
+            <a:spAutoFit/>
+          </a:bodyPr>
+          <a:lstStyle/>
+          <a:p>
+            <a:r>
+              <a:rPr sz="1300" b="0">
+                <a:solidFill>
+                  <a:srgbClr val="9CA3AF"/>
+                </a:solidFill>
+                <a:latin typeface="Calibri"/>
+              </a:rPr>
+              <a:t>A real production WAF — and a vehicle to level up how we build software</a:t>
+            </a:r>
+          </a:p>
+        </p:txBody>
+      </p:sp>
+      <p:sp>
+        <p:nvSpPr>
+          <p:cNvPr id="6" name="Rectangle 5"/>
+          <p:cNvSpPr/>
+          <p:nvPr/>
+        </p:nvSpPr>
+        <p:spPr>
+          <a:xfrm>
+            <a:off x="365760" y="1783080"/>
+            <a:ext cx="3703320" cy="4572000"/>
+          </a:xfrm>
+          <a:prstGeom prst="rect">
+            <a:avLst/>
+          </a:prstGeom>
+          <a:solidFill>
+            <a:srgbClr val="151B27"/>
+          </a:solidFill>
+          <a:ln w="12700">
+            <a:solidFill>
+              <a:srgbClr val="1F2937"/>
+            </a:solidFill>
+          </a:ln>
+          <a:effectLst/>
+        </p:spPr>
+        <p:style>
+          <a:lnRef idx="1">
+            <a:schemeClr val="accent1"/>
+          </a:lnRef>
+          <a:fillRef idx="3">
+            <a:schemeClr val="accent1"/>
+          </a:fillRef>
+          <a:effectRef idx="2">
+            <a:schemeClr val="accent1"/>
+          </a:effectRef>
+          <a:fontRef idx="minor">
+            <a:schemeClr val="lt1"/>
+          </a:fontRef>
+        </p:style>
+        <p:txBody>
+          <a:bodyPr rtlCol="0" anchor="ctr"/>
+          <a:lstStyle/>
+          <a:p>
+            <a:pPr algn="ctr"/>
+          </a:p>
+        </p:txBody>
+      </p:sp>
+      <p:sp>
+        <p:nvSpPr>
+          <p:cNvPr id="7" name="Rectangle 6"/>
+          <p:cNvSpPr/>
+          <p:nvPr/>
+        </p:nvSpPr>
+        <p:spPr>
+          <a:xfrm>
+            <a:off x="365760" y="1783080"/>
+            <a:ext cx="54864" cy="4572000"/>
+          </a:xfrm>
+          <a:prstGeom prst="rect">
+            <a:avLst/>
+          </a:prstGeom>
+          <a:solidFill>
+            <a:srgbClr val="FFD541"/>
+          </a:solidFill>
+          <a:ln>
+            <a:noFill/>
+          </a:ln>
+          <a:effectLst/>
+        </p:spPr>
+        <p:style>
+          <a:lnRef idx="1">
+            <a:schemeClr val="accent1"/>
+          </a:lnRef>
+          <a:fillRef idx="3">
+            <a:schemeClr val="accent1"/>
+          </a:fillRef>
+          <a:effectRef idx="2">
+            <a:schemeClr val="accent1"/>
+          </a:effectRef>
+          <a:fontRef idx="minor">
+            <a:schemeClr val="lt1"/>
+          </a:fontRef>
+        </p:style>
+        <p:txBody>
+          <a:bodyPr rtlCol="0" anchor="ctr"/>
+          <a:lstStyle/>
+          <a:p>
+            <a:pPr algn="ctr"/>
+          </a:p>
+        </p:txBody>
+      </p:sp>
+      <p:sp>
+        <p:nvSpPr>
+          <p:cNvPr id="8" name="TextBox 7"/>
+          <p:cNvSpPr txBox="1"/>
+          <p:nvPr/>
+        </p:nvSpPr>
+        <p:spPr>
+          <a:xfrm>
+            <a:off x="594360" y="1947672"/>
+            <a:ext cx="3337560" cy="274320"/>
+          </a:xfrm>
+          <a:prstGeom prst="rect">
+            <a:avLst/>
+          </a:prstGeom>
+          <a:noFill/>
+        </p:spPr>
+        <p:txBody>
+          <a:bodyPr wrap="square" anchor="t" lIns="0" rIns="0" tIns="0" bIns="0">
+            <a:spAutoFit/>
+          </a:bodyPr>
+          <a:lstStyle/>
+          <a:p>
+            <a:r>
+              <a:rPr sz="1000" b="1">
+                <a:solidFill>
+                  <a:srgbClr val="FFD541"/>
+                </a:solidFill>
+                <a:latin typeface="Courier New"/>
+              </a:rPr>
+              <a:t>ENTERPRISE, NOT A HACKATHON</a:t>
+            </a:r>
+          </a:p>
+        </p:txBody>
+      </p:sp>
+      <p:sp>
+        <p:nvSpPr>
+          <p:cNvPr id="9" name="TextBox 8"/>
+          <p:cNvSpPr txBox="1"/>
+          <p:nvPr/>
+        </p:nvSpPr>
+        <p:spPr>
+          <a:xfrm>
+            <a:off x="594360" y="2258568"/>
+            <a:ext cx="3337560" cy="731520"/>
+          </a:xfrm>
+          <a:prstGeom prst="rect">
+            <a:avLst/>
+          </a:prstGeom>
+          <a:noFill/>
+        </p:spPr>
+        <p:txBody>
+          <a:bodyPr wrap="square" anchor="t" lIns="0" rIns="0" tIns="0" bIns="0">
+            <a:spAutoFit/>
+          </a:bodyPr>
+          <a:lstStyle/>
+          <a:p>
+            <a:r>
+              <a:rPr sz="1400" b="1">
+                <a:solidFill>
+                  <a:srgbClr val="E5E7EB"/>
+                </a:solidFill>
+                <a:latin typeface="Calibri"/>
+              </a:rPr>
+              <a:t>Real production-grade WAF</a:t>
+            </a:r>
+          </a:p>
+        </p:txBody>
+      </p:sp>
+      <p:sp>
+        <p:nvSpPr>
+          <p:cNvPr id="10" name="TextBox 9"/>
+          <p:cNvSpPr txBox="1"/>
+          <p:nvPr/>
+        </p:nvSpPr>
+        <p:spPr>
+          <a:xfrm>
+            <a:off x="594360" y="3108960"/>
+            <a:ext cx="3337560" cy="3108960"/>
+          </a:xfrm>
+          <a:prstGeom prst="rect">
+            <a:avLst/>
+          </a:prstGeom>
+          <a:noFill/>
+        </p:spPr>
+        <p:txBody>
+          <a:bodyPr wrap="square" anchor="t" lIns="0" rIns="0" tIns="0" bIns="0">
+            <a:spAutoFit/>
+          </a:bodyPr>
+          <a:lstStyle/>
+          <a:p>
+            <a:pPr>
+              <a:spcAft>
+                <a:spcPts val="800"/>
+              </a:spcAft>
+            </a:pPr>
+            <a:r>
+              <a:rPr sz="1200" b="0">
+                <a:solidFill>
+                  <a:srgbClr val="9CA3AF"/>
+                </a:solidFill>
+                <a:latin typeface="Calibri"/>
+              </a:rPr>
+              <a:t>Build an enterprise, production-level WAF for our company.</a:t>
+            </a:r>
+          </a:p>
+          <a:p>
+            <a:pPr>
+              <a:spcAft>
+                <a:spcPts val="800"/>
+              </a:spcAft>
+            </a:pPr>
+            <a:r>
+              <a:rPr sz="1200" b="0">
+                <a:solidFill>
+                  <a:srgbClr val="9CA3AF"/>
+                </a:solidFill>
+                <a:latin typeface="Calibri"/>
+              </a:rPr>
+              <a:t>Something we would actually run in prod — not a one-off demo.</a:t>
+            </a:r>
+          </a:p>
+          <a:p>
+            <a:pPr>
+              <a:spcAft>
+                <a:spcPts val="800"/>
+              </a:spcAft>
+            </a:pPr>
+            <a:r>
+              <a:rPr sz="1200" b="0">
+                <a:solidFill>
+                  <a:srgbClr val="9CA3AF"/>
+                </a:solidFill>
+                <a:latin typeface="Calibri"/>
+              </a:rPr>
+              <a:t>Held to the same bar as F5 · Imperva · Akamai.</a:t>
+            </a:r>
+          </a:p>
+        </p:txBody>
+      </p:sp>
+      <p:sp>
+        <p:nvSpPr>
+          <p:cNvPr id="11" name="Rectangle 10"/>
+          <p:cNvSpPr/>
+          <p:nvPr/>
+        </p:nvSpPr>
+        <p:spPr>
+          <a:xfrm>
+            <a:off x="4206240" y="1783080"/>
+            <a:ext cx="3703320" cy="4572000"/>
+          </a:xfrm>
+          <a:prstGeom prst="rect">
+            <a:avLst/>
+          </a:prstGeom>
+          <a:solidFill>
+            <a:srgbClr val="1A2030"/>
+          </a:solidFill>
+          <a:ln w="12700">
+            <a:solidFill>
+              <a:srgbClr val="1F2937"/>
+            </a:solidFill>
+          </a:ln>
+          <a:effectLst/>
+        </p:spPr>
+        <p:style>
+          <a:lnRef idx="1">
+            <a:schemeClr val="accent1"/>
+          </a:lnRef>
+          <a:fillRef idx="3">
+            <a:schemeClr val="accent1"/>
+          </a:fillRef>
+          <a:effectRef idx="2">
+            <a:schemeClr val="accent1"/>
+          </a:effectRef>
+          <a:fontRef idx="minor">
+            <a:schemeClr val="lt1"/>
+          </a:fontRef>
+        </p:style>
+        <p:txBody>
+          <a:bodyPr rtlCol="0" anchor="ctr"/>
+          <a:lstStyle/>
+          <a:p>
+            <a:pPr algn="ctr"/>
+          </a:p>
+        </p:txBody>
+      </p:sp>
+      <p:sp>
+        <p:nvSpPr>
+          <p:cNvPr id="12" name="Rectangle 11"/>
+          <p:cNvSpPr/>
+          <p:nvPr/>
+        </p:nvSpPr>
+        <p:spPr>
+          <a:xfrm>
+            <a:off x="4206240" y="1783080"/>
+            <a:ext cx="54864" cy="4572000"/>
+          </a:xfrm>
+          <a:prstGeom prst="rect">
+            <a:avLst/>
+          </a:prstGeom>
+          <a:solidFill>
+            <a:srgbClr val="34D399"/>
+          </a:solidFill>
+          <a:ln>
+            <a:noFill/>
+          </a:ln>
+          <a:effectLst/>
+        </p:spPr>
+        <p:style>
+          <a:lnRef idx="1">
+            <a:schemeClr val="accent1"/>
+          </a:lnRef>
+          <a:fillRef idx="3">
+            <a:schemeClr val="accent1"/>
+          </a:fillRef>
+          <a:effectRef idx="2">
+            <a:schemeClr val="accent1"/>
+          </a:effectRef>
+          <a:fontRef idx="minor">
+            <a:schemeClr val="lt1"/>
+          </a:fontRef>
+        </p:style>
+        <p:txBody>
+          <a:bodyPr rtlCol="0" anchor="ctr"/>
+          <a:lstStyle/>
+          <a:p>
+            <a:pPr algn="ctr"/>
+          </a:p>
+        </p:txBody>
+      </p:sp>
+      <p:sp>
+        <p:nvSpPr>
+          <p:cNvPr id="13" name="TextBox 12"/>
+          <p:cNvSpPr txBox="1"/>
+          <p:nvPr/>
+        </p:nvSpPr>
+        <p:spPr>
+          <a:xfrm>
+            <a:off x="4434840" y="1947672"/>
+            <a:ext cx="3337560" cy="274320"/>
+          </a:xfrm>
+          <a:prstGeom prst="rect">
+            <a:avLst/>
+          </a:prstGeom>
+          <a:noFill/>
+        </p:spPr>
+        <p:txBody>
+          <a:bodyPr wrap="square" anchor="t" lIns="0" rIns="0" tIns="0" bIns="0">
+            <a:spAutoFit/>
+          </a:bodyPr>
+          <a:lstStyle/>
+          <a:p>
+            <a:r>
+              <a:rPr sz="1000" b="1">
+                <a:solidFill>
+                  <a:srgbClr val="34D399"/>
+                </a:solidFill>
+                <a:latin typeface="Courier New"/>
+              </a:rPr>
+              <a:t>SHARPEN THE CRAFT</a:t>
+            </a:r>
+          </a:p>
+        </p:txBody>
+      </p:sp>
+      <p:sp>
+        <p:nvSpPr>
+          <p:cNvPr id="14" name="TextBox 13"/>
+          <p:cNvSpPr txBox="1"/>
+          <p:nvPr/>
+        </p:nvSpPr>
+        <p:spPr>
+          <a:xfrm>
+            <a:off x="4434840" y="2258568"/>
+            <a:ext cx="3337560" cy="731520"/>
+          </a:xfrm>
+          <a:prstGeom prst="rect">
+            <a:avLst/>
+          </a:prstGeom>
+          <a:noFill/>
+        </p:spPr>
+        <p:txBody>
+          <a:bodyPr wrap="square" anchor="t" lIns="0" rIns="0" tIns="0" bIns="0">
+            <a:spAutoFit/>
+          </a:bodyPr>
+          <a:lstStyle/>
+          <a:p>
+            <a:r>
+              <a:rPr sz="1400" b="1">
+                <a:solidFill>
+                  <a:srgbClr val="E5E7EB"/>
+                </a:solidFill>
+                <a:latin typeface="Calibri"/>
+              </a:rPr>
+              <a:t>Practice &amp; improve our skills</a:t>
+            </a:r>
+          </a:p>
+        </p:txBody>
+      </p:sp>
+      <p:sp>
+        <p:nvSpPr>
+          <p:cNvPr id="15" name="TextBox 14"/>
+          <p:cNvSpPr txBox="1"/>
+          <p:nvPr/>
+        </p:nvSpPr>
+        <p:spPr>
+          <a:xfrm>
+            <a:off x="4434840" y="3108960"/>
+            <a:ext cx="3337560" cy="3108960"/>
+          </a:xfrm>
+          <a:prstGeom prst="rect">
+            <a:avLst/>
+          </a:prstGeom>
+          <a:noFill/>
+        </p:spPr>
+        <p:txBody>
+          <a:bodyPr wrap="square" anchor="t" lIns="0" rIns="0" tIns="0" bIns="0">
+            <a:spAutoFit/>
+          </a:bodyPr>
+          <a:lstStyle/>
+          <a:p>
+            <a:pPr>
+              <a:spcAft>
+                <a:spcPts val="800"/>
+              </a:spcAft>
+            </a:pPr>
+            <a:r>
+              <a:rPr sz="1200" b="0">
+                <a:solidFill>
+                  <a:srgbClr val="9CA3AF"/>
+                </a:solidFill>
+                <a:latin typeface="Calibri"/>
+              </a:rPr>
+              <a:t>Stretch across AI / ML, system design, and security.</a:t>
+            </a:r>
+          </a:p>
+          <a:p>
+            <a:pPr>
+              <a:spcAft>
+                <a:spcPts val="800"/>
+              </a:spcAft>
+            </a:pPr>
+            <a:r>
+              <a:rPr sz="1200" b="0">
+                <a:solidFill>
+                  <a:srgbClr val="9CA3AF"/>
+                </a:solidFill>
+                <a:latin typeface="Calibri"/>
+              </a:rPr>
+              <a:t>Performance, distributed systems, and product thinking.</a:t>
+            </a:r>
+          </a:p>
+          <a:p>
+            <a:pPr>
+              <a:spcAft>
+                <a:spcPts val="800"/>
+              </a:spcAft>
+            </a:pPr>
+            <a:r>
+              <a:rPr sz="1200" b="0">
+                <a:solidFill>
+                  <a:srgbClr val="9CA3AF"/>
+                </a:solidFill>
+                <a:latin typeface="Calibri"/>
+              </a:rPr>
+              <a:t>Deliberate reps on hard, real-world engineering.</a:t>
+            </a:r>
+          </a:p>
+        </p:txBody>
+      </p:sp>
+      <p:sp>
+        <p:nvSpPr>
+          <p:cNvPr id="16" name="Rectangle 15"/>
+          <p:cNvSpPr/>
+          <p:nvPr/>
+        </p:nvSpPr>
+        <p:spPr>
+          <a:xfrm>
+            <a:off x="8046720" y="1783080"/>
+            <a:ext cx="3703320" cy="4572000"/>
+          </a:xfrm>
+          <a:prstGeom prst="rect">
+            <a:avLst/>
+          </a:prstGeom>
+          <a:solidFill>
+            <a:srgbClr val="151B27"/>
+          </a:solidFill>
+          <a:ln w="12700">
+            <a:solidFill>
+              <a:srgbClr val="1F2937"/>
+            </a:solidFill>
+          </a:ln>
+          <a:effectLst/>
+        </p:spPr>
+        <p:style>
+          <a:lnRef idx="1">
+            <a:schemeClr val="accent1"/>
+          </a:lnRef>
+          <a:fillRef idx="3">
+            <a:schemeClr val="accent1"/>
+          </a:fillRef>
+          <a:effectRef idx="2">
+            <a:schemeClr val="accent1"/>
+          </a:effectRef>
+          <a:fontRef idx="minor">
+            <a:schemeClr val="lt1"/>
+          </a:fontRef>
+        </p:style>
+        <p:txBody>
+          <a:bodyPr rtlCol="0" anchor="ctr"/>
+          <a:lstStyle/>
+          <a:p>
+            <a:pPr algn="ctr"/>
+          </a:p>
+        </p:txBody>
+      </p:sp>
+      <p:sp>
+        <p:nvSpPr>
+          <p:cNvPr id="17" name="Rectangle 16"/>
+          <p:cNvSpPr/>
+          <p:nvPr/>
+        </p:nvSpPr>
+        <p:spPr>
+          <a:xfrm>
+            <a:off x="8046720" y="1783080"/>
+            <a:ext cx="54864" cy="4572000"/>
+          </a:xfrm>
+          <a:prstGeom prst="rect">
+            <a:avLst/>
+          </a:prstGeom>
+          <a:solidFill>
+            <a:srgbClr val="60A5FA"/>
+          </a:solidFill>
+          <a:ln>
+            <a:noFill/>
+          </a:ln>
+          <a:effectLst/>
+        </p:spPr>
+        <p:style>
+          <a:lnRef idx="1">
+            <a:schemeClr val="accent1"/>
+          </a:lnRef>
+          <a:fillRef idx="3">
+            <a:schemeClr val="accent1"/>
+          </a:fillRef>
+          <a:effectRef idx="2">
+            <a:schemeClr val="accent1"/>
+          </a:effectRef>
+          <a:fontRef idx="minor">
+            <a:schemeClr val="lt1"/>
+          </a:fontRef>
+        </p:style>
+        <p:txBody>
+          <a:bodyPr rtlCol="0" anchor="ctr"/>
+          <a:lstStyle/>
+          <a:p>
+            <a:pPr algn="ctr"/>
+          </a:p>
+        </p:txBody>
+      </p:sp>
+      <p:sp>
+        <p:nvSpPr>
+          <p:cNvPr id="18" name="TextBox 17"/>
+          <p:cNvSpPr txBox="1"/>
+          <p:nvPr/>
+        </p:nvSpPr>
+        <p:spPr>
+          <a:xfrm>
+            <a:off x="8275320" y="1947672"/>
+            <a:ext cx="3337560" cy="274320"/>
+          </a:xfrm>
+          <a:prstGeom prst="rect">
+            <a:avLst/>
+          </a:prstGeom>
+          <a:noFill/>
+        </p:spPr>
+        <p:txBody>
+          <a:bodyPr wrap="square" anchor="t" lIns="0" rIns="0" tIns="0" bIns="0">
+            <a:spAutoFit/>
+          </a:bodyPr>
+          <a:lstStyle/>
+          <a:p>
+            <a:r>
+              <a:rPr sz="1000" b="1">
+                <a:solidFill>
+                  <a:srgbClr val="60A5FA"/>
+                </a:solidFill>
+                <a:latin typeface="Courier New"/>
+              </a:rPr>
+              <a:t>AI-NATIVE SDLC</a:t>
+            </a:r>
+          </a:p>
+        </p:txBody>
+      </p:sp>
+      <p:sp>
+        <p:nvSpPr>
+          <p:cNvPr id="19" name="TextBox 18"/>
+          <p:cNvSpPr txBox="1"/>
+          <p:nvPr/>
+        </p:nvSpPr>
+        <p:spPr>
+          <a:xfrm>
+            <a:off x="8275320" y="2258568"/>
+            <a:ext cx="3337560" cy="731520"/>
+          </a:xfrm>
+          <a:prstGeom prst="rect">
+            <a:avLst/>
+          </a:prstGeom>
+          <a:noFill/>
+        </p:spPr>
+        <p:txBody>
+          <a:bodyPr wrap="square" anchor="t" lIns="0" rIns="0" tIns="0" bIns="0">
+            <a:spAutoFit/>
+          </a:bodyPr>
+          <a:lstStyle/>
+          <a:p>
+            <a:r>
+              <a:rPr sz="1400" b="1">
+                <a:solidFill>
+                  <a:srgbClr val="E5E7EB"/>
+                </a:solidFill>
+                <a:latin typeface="Calibri"/>
+              </a:rPr>
+              <a:t>Software development with AI</a:t>
+            </a:r>
+          </a:p>
+        </p:txBody>
+      </p:sp>
+      <p:sp>
+        <p:nvSpPr>
+          <p:cNvPr id="20" name="TextBox 19"/>
+          <p:cNvSpPr txBox="1"/>
+          <p:nvPr/>
+        </p:nvSpPr>
+        <p:spPr>
+          <a:xfrm>
+            <a:off x="8275320" y="3108960"/>
+            <a:ext cx="3337560" cy="3108960"/>
+          </a:xfrm>
+          <a:prstGeom prst="rect">
+            <a:avLst/>
+          </a:prstGeom>
+          <a:noFill/>
+        </p:spPr>
+        <p:txBody>
+          <a:bodyPr wrap="square" anchor="t" lIns="0" rIns="0" tIns="0" bIns="0">
+            <a:spAutoFit/>
+          </a:bodyPr>
+          <a:lstStyle/>
+          <a:p>
+            <a:pPr>
+              <a:spcAft>
+                <a:spcPts val="800"/>
+              </a:spcAft>
+            </a:pPr>
+            <a:r>
+              <a:rPr sz="1200" b="0">
+                <a:solidFill>
+                  <a:srgbClr val="9CA3AF"/>
+                </a:solidFill>
+                <a:latin typeface="Calibri"/>
+              </a:rPr>
+              <a:t>Explore how we build software with AI in the loop.</a:t>
+            </a:r>
+          </a:p>
+          <a:p>
+            <a:pPr>
+              <a:spcAft>
+                <a:spcPts val="800"/>
+              </a:spcAft>
+            </a:pPr>
+            <a:r>
+              <a:rPr sz="1200" b="0">
+                <a:solidFill>
+                  <a:srgbClr val="9CA3AF"/>
+                </a:solidFill>
+                <a:latin typeface="Calibri"/>
+              </a:rPr>
+              <a:t>Across the lifecycle: design → code → review → QA.</a:t>
+            </a:r>
+          </a:p>
+          <a:p>
+            <a:pPr>
+              <a:spcAft>
+                <a:spcPts val="800"/>
+              </a:spcAft>
+            </a:pPr>
+            <a:r>
+              <a:rPr sz="1200" b="0">
+                <a:solidFill>
+                  <a:srgbClr val="9CA3AF"/>
+                </a:solidFill>
+                <a:latin typeface="Calibri"/>
+              </a:rPr>
+              <a:t>Establish a repeatable process we can reuse.</a:t>
+            </a:r>
+          </a:p>
+        </p:txBody>
+      </p:sp>
+      <p:sp>
+        <p:nvSpPr>
+          <p:cNvPr id="21" name="TextBox 20"/>
+          <p:cNvSpPr txBox="1"/>
+          <p:nvPr/>
+        </p:nvSpPr>
+        <p:spPr>
+          <a:xfrm>
+            <a:off x="365760" y="6528816"/>
+            <a:ext cx="5486400" cy="274320"/>
+          </a:xfrm>
+          <a:prstGeom prst="rect">
+            <a:avLst/>
+          </a:prstGeom>
+          <a:noFill/>
+        </p:spPr>
+        <p:txBody>
+          <a:bodyPr wrap="square" anchor="t" lIns="0" rIns="0" tIns="0" bIns="0">
+            <a:spAutoFit/>
+          </a:bodyPr>
+          <a:lstStyle/>
+          <a:p>
+            <a:r>
+              <a:rPr sz="900" b="0">
+                <a:solidFill>
+                  <a:srgbClr val="6B7280"/>
+                </a:solidFill>
+                <a:latin typeface="Calibri"/>
+              </a:rPr>
+              <a:t>Aegis-Gate v0.1.0  ·  WAF &amp; Security Gateway</a:t>
+            </a:r>
+          </a:p>
+        </p:txBody>
+      </p:sp>
+      <p:sp>
+        <p:nvSpPr>
+          <p:cNvPr id="22" name="TextBox 21"/>
+          <p:cNvSpPr txBox="1"/>
+          <p:nvPr/>
+        </p:nvSpPr>
+        <p:spPr>
+          <a:xfrm>
+            <a:off x="11247120" y="6528816"/>
+            <a:ext cx="548640" cy="274320"/>
+          </a:xfrm>
+          <a:prstGeom prst="rect">
+            <a:avLst/>
+          </a:prstGeom>
+          <a:noFill/>
+        </p:spPr>
+        <p:txBody>
+          <a:bodyPr wrap="square" anchor="t" lIns="0" rIns="0" tIns="0" bIns="0">
+            <a:spAutoFit/>
+          </a:bodyPr>
+          <a:lstStyle/>
+          <a:p>
+            <a:r>
+              <a:rPr sz="900" b="0">
+                <a:solidFill>
+                  <a:srgbClr val="6B7280"/>
+                </a:solidFill>
+                <a:latin typeface="Calibri"/>
+              </a:rPr>
+              <a:t>1 / 18</a:t>
+            </a:r>
           </a:p>
         </p:txBody>
       </p:sp>
@@ -21042,6 +22570,10 @@
             <a:prstDash val="solid"/>
           </a:ln>
         </p:spPr>
+        <p:txBody>
+          <a:bodyPr/>
+          <a:p/>
+        </p:txBody>
       </p:sp>
       <p:sp>
         <p:nvSpPr>
@@ -21184,6 +22716,10 @@
             <a:prstDash val="solid"/>
           </a:ln>
         </p:spPr>
+        <p:txBody>
+          <a:bodyPr/>
+          <a:p/>
+        </p:txBody>
       </p:sp>
       <p:sp>
         <p:nvSpPr>
@@ -21209,6 +22745,10 @@
             <a:prstDash val="solid"/>
           </a:ln>
         </p:spPr>
+        <p:txBody>
+          <a:bodyPr/>
+          <a:p/>
+        </p:txBody>
       </p:sp>
       <p:sp>
         <p:nvSpPr>
@@ -21418,6 +22958,10 @@
             <a:prstDash val="solid"/>
           </a:ln>
         </p:spPr>
+        <p:txBody>
+          <a:bodyPr/>
+          <a:p/>
+        </p:txBody>
       </p:sp>
       <p:sp>
         <p:nvSpPr>
@@ -21443,6 +22987,10 @@
             <a:prstDash val="solid"/>
           </a:ln>
         </p:spPr>
+        <p:txBody>
+          <a:bodyPr/>
+          <a:p/>
+        </p:txBody>
       </p:sp>
       <p:sp>
         <p:nvSpPr>
@@ -21652,6 +23200,10 @@
             <a:prstDash val="solid"/>
           </a:ln>
         </p:spPr>
+        <p:txBody>
+          <a:bodyPr/>
+          <a:p/>
+        </p:txBody>
       </p:sp>
       <p:sp>
         <p:nvSpPr>
@@ -21677,6 +23229,10 @@
             <a:prstDash val="solid"/>
           </a:ln>
         </p:spPr>
+        <p:txBody>
+          <a:bodyPr/>
+          <a:p/>
+        </p:txBody>
       </p:sp>
       <p:sp>
         <p:nvSpPr>
@@ -21934,7 +23490,7 @@
                 <a:ea typeface="Calibri" pitchFamily="34" charset="-122"/>
                 <a:cs typeface="Calibri" pitchFamily="34" charset="-120"/>
               </a:rPr>
-              <a:t>2 / 17</a:t>
+              <a:t>3 / 18</a:t>
             </a:r>
             <a:endParaRPr lang="en-US" sz="900" dirty="0"/>
           </a:p>
@@ -21996,6 +23552,10 @@
             <a:prstDash val="solid"/>
           </a:ln>
         </p:spPr>
+        <p:txBody>
+          <a:bodyPr/>
+          <a:p/>
+        </p:txBody>
       </p:sp>
       <p:sp>
         <p:nvSpPr>
@@ -22138,6 +23698,10 @@
             <a:prstDash val="solid"/>
           </a:ln>
         </p:spPr>
+        <p:txBody>
+          <a:bodyPr/>
+          <a:p/>
+        </p:txBody>
       </p:sp>
       <p:sp>
         <p:nvSpPr>
@@ -22241,6 +23805,10 @@
             <a:prstDash val="solid"/>
           </a:ln>
         </p:spPr>
+        <p:txBody>
+          <a:bodyPr/>
+          <a:p/>
+        </p:txBody>
       </p:sp>
       <p:sp>
         <p:nvSpPr>
@@ -22344,6 +23912,10 @@
             <a:prstDash val="solid"/>
           </a:ln>
         </p:spPr>
+        <p:txBody>
+          <a:bodyPr/>
+          <a:p/>
+        </p:txBody>
       </p:sp>
       <p:sp>
         <p:nvSpPr>
@@ -22447,6 +24019,10 @@
             <a:prstDash val="solid"/>
           </a:ln>
         </p:spPr>
+        <p:txBody>
+          <a:bodyPr/>
+          <a:p/>
+        </p:txBody>
       </p:sp>
       <p:sp>
         <p:nvSpPr>
@@ -22550,6 +24126,10 @@
             <a:prstDash val="solid"/>
           </a:ln>
         </p:spPr>
+        <p:txBody>
+          <a:bodyPr/>
+          <a:p/>
+        </p:txBody>
       </p:sp>
       <p:sp>
         <p:nvSpPr>
@@ -22653,6 +24233,10 @@
             <a:prstDash val="solid"/>
           </a:ln>
         </p:spPr>
+        <p:txBody>
+          <a:bodyPr/>
+          <a:p/>
+        </p:txBody>
       </p:sp>
       <p:sp>
         <p:nvSpPr>
@@ -22756,6 +24340,10 @@
             <a:prstDash val="solid"/>
           </a:ln>
         </p:spPr>
+        <p:txBody>
+          <a:bodyPr/>
+          <a:p/>
+        </p:txBody>
       </p:sp>
       <p:sp>
         <p:nvSpPr>
@@ -22859,6 +24447,10 @@
             <a:prstDash val="solid"/>
           </a:ln>
         </p:spPr>
+        <p:txBody>
+          <a:bodyPr/>
+          <a:p/>
+        </p:txBody>
       </p:sp>
       <p:sp>
         <p:nvSpPr>
@@ -22962,6 +24554,10 @@
             <a:prstDash val="solid"/>
           </a:ln>
         </p:spPr>
+        <p:txBody>
+          <a:bodyPr/>
+          <a:p/>
+        </p:txBody>
       </p:sp>
       <p:sp>
         <p:nvSpPr>
@@ -22987,6 +24583,10 @@
             <a:prstDash val="solid"/>
           </a:ln>
         </p:spPr>
+        <p:txBody>
+          <a:bodyPr/>
+          <a:p/>
+        </p:txBody>
       </p:sp>
       <p:sp>
         <p:nvSpPr>
@@ -23090,6 +24690,10 @@
             <a:prstDash val="solid"/>
           </a:ln>
         </p:spPr>
+        <p:txBody>
+          <a:bodyPr/>
+          <a:p/>
+        </p:txBody>
       </p:sp>
       <p:sp>
         <p:nvSpPr>
@@ -23154,6 +24758,10 @@
             <a:prstDash val="solid"/>
           </a:ln>
         </p:spPr>
+        <p:txBody>
+          <a:bodyPr/>
+          <a:p/>
+        </p:txBody>
       </p:sp>
       <p:sp>
         <p:nvSpPr>
@@ -23218,6 +24826,10 @@
             <a:prstDash val="solid"/>
           </a:ln>
         </p:spPr>
+        <p:txBody>
+          <a:bodyPr/>
+          <a:p/>
+        </p:txBody>
       </p:sp>
       <p:sp>
         <p:nvSpPr>
@@ -23282,6 +24894,10 @@
             <a:prstDash val="solid"/>
           </a:ln>
         </p:spPr>
+        <p:txBody>
+          <a:bodyPr/>
+          <a:p/>
+        </p:txBody>
       </p:sp>
       <p:sp>
         <p:nvSpPr>
@@ -23346,6 +24962,10 @@
             <a:prstDash val="solid"/>
           </a:ln>
         </p:spPr>
+        <p:txBody>
+          <a:bodyPr/>
+          <a:p/>
+        </p:txBody>
       </p:sp>
       <p:sp>
         <p:nvSpPr>
@@ -23410,6 +25030,10 @@
             <a:prstDash val="solid"/>
           </a:ln>
         </p:spPr>
+        <p:txBody>
+          <a:bodyPr/>
+          <a:p/>
+        </p:txBody>
       </p:sp>
       <p:sp>
         <p:nvSpPr>
@@ -23474,6 +25098,10 @@
             <a:prstDash val="solid"/>
           </a:ln>
         </p:spPr>
+        <p:txBody>
+          <a:bodyPr/>
+          <a:p/>
+        </p:txBody>
       </p:sp>
       <p:sp>
         <p:nvSpPr>
@@ -23538,6 +25166,10 @@
             <a:prstDash val="solid"/>
           </a:ln>
         </p:spPr>
+        <p:txBody>
+          <a:bodyPr/>
+          <a:p/>
+        </p:txBody>
       </p:sp>
       <p:sp>
         <p:nvSpPr>
@@ -23602,6 +25234,10 @@
             <a:prstDash val="solid"/>
           </a:ln>
         </p:spPr>
+        <p:txBody>
+          <a:bodyPr/>
+          <a:p/>
+        </p:txBody>
       </p:sp>
       <p:sp>
         <p:nvSpPr>
@@ -23666,6 +25302,10 @@
             <a:prstDash val="solid"/>
           </a:ln>
         </p:spPr>
+        <p:txBody>
+          <a:bodyPr/>
+          <a:p/>
+        </p:txBody>
       </p:sp>
       <p:sp>
         <p:nvSpPr>
@@ -23730,6 +25370,10 @@
             <a:prstDash val="solid"/>
           </a:ln>
         </p:spPr>
+        <p:txBody>
+          <a:bodyPr/>
+          <a:p/>
+        </p:txBody>
       </p:sp>
       <p:sp>
         <p:nvSpPr>
@@ -23842,7 +25486,7 @@
                 <a:ea typeface="Calibri" pitchFamily="34" charset="-122"/>
                 <a:cs typeface="Calibri" pitchFamily="34" charset="-120"/>
               </a:rPr>
-              <a:t>3 / 17</a:t>
+              <a:t>4 / 18</a:t>
             </a:r>
             <a:endParaRPr lang="en-US" sz="900" dirty="0"/>
           </a:p>
@@ -23904,6 +25548,10 @@
             <a:prstDash val="solid"/>
           </a:ln>
         </p:spPr>
+        <p:txBody>
+          <a:bodyPr/>
+          <a:p/>
+        </p:txBody>
       </p:sp>
       <p:sp>
         <p:nvSpPr>
@@ -24048,6 +25696,10 @@
             <a:prstDash val="solid"/>
           </a:ln>
         </p:spPr>
+        <p:txBody>
+          <a:bodyPr/>
+          <a:p/>
+        </p:txBody>
       </p:sp>
       <p:sp>
         <p:nvSpPr>
@@ -24073,6 +25725,10 @@
             <a:prstDash val="solid"/>
           </a:ln>
         </p:spPr>
+        <p:txBody>
+          <a:bodyPr/>
+          <a:p/>
+        </p:txBody>
       </p:sp>
       <p:sp>
         <p:nvSpPr>
@@ -24175,6 +25831,10 @@
             <a:tailEnd type="triangle"/>
           </a:ln>
         </p:spPr>
+        <p:txBody>
+          <a:bodyPr/>
+          <a:p/>
+        </p:txBody>
       </p:sp>
       <p:sp>
         <p:nvSpPr>
@@ -24202,6 +25862,10 @@
             <a:prstDash val="solid"/>
           </a:ln>
         </p:spPr>
+        <p:txBody>
+          <a:bodyPr/>
+          <a:p/>
+        </p:txBody>
       </p:sp>
       <p:sp>
         <p:nvSpPr>
@@ -24227,6 +25891,10 @@
             <a:prstDash val="solid"/>
           </a:ln>
         </p:spPr>
+        <p:txBody>
+          <a:bodyPr/>
+          <a:p/>
+        </p:txBody>
       </p:sp>
       <p:sp>
         <p:nvSpPr>
@@ -24329,6 +25997,10 @@
             <a:tailEnd type="triangle"/>
           </a:ln>
         </p:spPr>
+        <p:txBody>
+          <a:bodyPr/>
+          <a:p/>
+        </p:txBody>
       </p:sp>
       <p:sp>
         <p:nvSpPr>
@@ -24356,6 +26028,10 @@
             <a:prstDash val="solid"/>
           </a:ln>
         </p:spPr>
+        <p:txBody>
+          <a:bodyPr/>
+          <a:p/>
+        </p:txBody>
       </p:sp>
       <p:sp>
         <p:nvSpPr>
@@ -24381,6 +26057,10 @@
             <a:prstDash val="solid"/>
           </a:ln>
         </p:spPr>
+        <p:txBody>
+          <a:bodyPr/>
+          <a:p/>
+        </p:txBody>
       </p:sp>
       <p:sp>
         <p:nvSpPr>
@@ -24483,6 +26163,10 @@
             <a:tailEnd type="triangle"/>
           </a:ln>
         </p:spPr>
+        <p:txBody>
+          <a:bodyPr/>
+          <a:p/>
+        </p:txBody>
       </p:sp>
       <p:sp>
         <p:nvSpPr>
@@ -24510,6 +26194,10 @@
             <a:prstDash val="solid"/>
           </a:ln>
         </p:spPr>
+        <p:txBody>
+          <a:bodyPr/>
+          <a:p/>
+        </p:txBody>
       </p:sp>
       <p:sp>
         <p:nvSpPr>
@@ -24535,6 +26223,10 @@
             <a:prstDash val="solid"/>
           </a:ln>
         </p:spPr>
+        <p:txBody>
+          <a:bodyPr/>
+          <a:p/>
+        </p:txBody>
       </p:sp>
       <p:sp>
         <p:nvSpPr>
@@ -24637,6 +26329,10 @@
             <a:tailEnd type="triangle"/>
           </a:ln>
         </p:spPr>
+        <p:txBody>
+          <a:bodyPr/>
+          <a:p/>
+        </p:txBody>
       </p:sp>
       <p:sp>
         <p:nvSpPr>
@@ -24664,6 +26360,10 @@
             <a:prstDash val="solid"/>
           </a:ln>
         </p:spPr>
+        <p:txBody>
+          <a:bodyPr/>
+          <a:p/>
+        </p:txBody>
       </p:sp>
       <p:sp>
         <p:nvSpPr>
@@ -24689,6 +26389,10 @@
             <a:prstDash val="solid"/>
           </a:ln>
         </p:spPr>
+        <p:txBody>
+          <a:bodyPr/>
+          <a:p/>
+        </p:txBody>
       </p:sp>
       <p:sp>
         <p:nvSpPr>
@@ -24791,6 +26495,10 @@
             <a:tailEnd type="triangle"/>
           </a:ln>
         </p:spPr>
+        <p:txBody>
+          <a:bodyPr/>
+          <a:p/>
+        </p:txBody>
       </p:sp>
       <p:sp>
         <p:nvSpPr>
@@ -24818,6 +26526,10 @@
             <a:prstDash val="solid"/>
           </a:ln>
         </p:spPr>
+        <p:txBody>
+          <a:bodyPr/>
+          <a:p/>
+        </p:txBody>
       </p:sp>
       <p:sp>
         <p:nvSpPr>
@@ -24843,6 +26555,10 @@
             <a:prstDash val="solid"/>
           </a:ln>
         </p:spPr>
+        <p:txBody>
+          <a:bodyPr/>
+          <a:p/>
+        </p:txBody>
       </p:sp>
       <p:sp>
         <p:nvSpPr>
@@ -24945,6 +26661,10 @@
             <a:tailEnd type="triangle"/>
           </a:ln>
         </p:spPr>
+        <p:txBody>
+          <a:bodyPr/>
+          <a:p/>
+        </p:txBody>
       </p:sp>
       <p:sp>
         <p:nvSpPr>
@@ -24972,6 +26692,10 @@
             <a:prstDash val="solid"/>
           </a:ln>
         </p:spPr>
+        <p:txBody>
+          <a:bodyPr/>
+          <a:p/>
+        </p:txBody>
       </p:sp>
       <p:sp>
         <p:nvSpPr>
@@ -24997,6 +26721,10 @@
             <a:prstDash val="solid"/>
           </a:ln>
         </p:spPr>
+        <p:txBody>
+          <a:bodyPr/>
+          <a:p/>
+        </p:txBody>
       </p:sp>
       <p:sp>
         <p:nvSpPr>
@@ -25099,6 +26827,10 @@
             <a:tailEnd type="triangle"/>
           </a:ln>
         </p:spPr>
+        <p:txBody>
+          <a:bodyPr/>
+          <a:p/>
+        </p:txBody>
       </p:sp>
       <p:sp>
         <p:nvSpPr>
@@ -25126,6 +26858,10 @@
             <a:prstDash val="solid"/>
           </a:ln>
         </p:spPr>
+        <p:txBody>
+          <a:bodyPr/>
+          <a:p/>
+        </p:txBody>
       </p:sp>
       <p:sp>
         <p:nvSpPr>
@@ -25151,6 +26887,10 @@
             <a:prstDash val="solid"/>
           </a:ln>
         </p:spPr>
+        <p:txBody>
+          <a:bodyPr/>
+          <a:p/>
+        </p:txBody>
       </p:sp>
       <p:sp>
         <p:nvSpPr>
@@ -25332,6 +27072,10 @@
             <a:prstDash val="solid"/>
           </a:ln>
         </p:spPr>
+        <p:txBody>
+          <a:bodyPr/>
+          <a:p/>
+        </p:txBody>
       </p:sp>
       <p:sp>
         <p:nvSpPr>
@@ -25357,6 +27101,10 @@
             <a:prstDash val="solid"/>
           </a:ln>
         </p:spPr>
+        <p:txBody>
+          <a:bodyPr/>
+          <a:p/>
+        </p:txBody>
       </p:sp>
       <p:sp>
         <p:nvSpPr>
@@ -25545,6 +27293,10 @@
             <a:prstDash val="solid"/>
           </a:ln>
         </p:spPr>
+        <p:txBody>
+          <a:bodyPr/>
+          <a:p/>
+        </p:txBody>
       </p:sp>
       <p:sp>
         <p:nvSpPr>
@@ -25570,6 +27322,10 @@
             <a:prstDash val="solid"/>
           </a:ln>
         </p:spPr>
+        <p:txBody>
+          <a:bodyPr/>
+          <a:p/>
+        </p:txBody>
       </p:sp>
       <p:sp>
         <p:nvSpPr>
@@ -25673,6 +27429,10 @@
             <a:prstDash val="solid"/>
           </a:ln>
         </p:spPr>
+        <p:txBody>
+          <a:bodyPr/>
+          <a:p/>
+        </p:txBody>
       </p:sp>
       <p:sp>
         <p:nvSpPr>
@@ -25698,6 +27458,10 @@
             <a:prstDash val="solid"/>
           </a:ln>
         </p:spPr>
+        <p:txBody>
+          <a:bodyPr/>
+          <a:p/>
+        </p:txBody>
       </p:sp>
       <p:sp>
         <p:nvSpPr>
@@ -25801,6 +27565,10 @@
             <a:prstDash val="solid"/>
           </a:ln>
         </p:spPr>
+        <p:txBody>
+          <a:bodyPr/>
+          <a:p/>
+        </p:txBody>
       </p:sp>
       <p:sp>
         <p:nvSpPr>
@@ -25826,6 +27594,10 @@
             <a:prstDash val="solid"/>
           </a:ln>
         </p:spPr>
+        <p:txBody>
+          <a:bodyPr/>
+          <a:p/>
+        </p:txBody>
       </p:sp>
       <p:sp>
         <p:nvSpPr>
@@ -25929,6 +27701,10 @@
             <a:prstDash val="solid"/>
           </a:ln>
         </p:spPr>
+        <p:txBody>
+          <a:bodyPr/>
+          <a:p/>
+        </p:txBody>
       </p:sp>
       <p:sp>
         <p:nvSpPr>
@@ -25954,6 +27730,10 @@
             <a:prstDash val="solid"/>
           </a:ln>
         </p:spPr>
+        <p:txBody>
+          <a:bodyPr/>
+          <a:p/>
+        </p:txBody>
       </p:sp>
       <p:sp>
         <p:nvSpPr>
@@ -26057,6 +27837,10 @@
             <a:prstDash val="solid"/>
           </a:ln>
         </p:spPr>
+        <p:txBody>
+          <a:bodyPr/>
+          <a:p/>
+        </p:txBody>
       </p:sp>
       <p:sp>
         <p:nvSpPr>
@@ -26082,6 +27866,10 @@
             <a:prstDash val="solid"/>
           </a:ln>
         </p:spPr>
+        <p:txBody>
+          <a:bodyPr/>
+          <a:p/>
+        </p:txBody>
       </p:sp>
       <p:sp>
         <p:nvSpPr>
@@ -26185,6 +27973,10 @@
             <a:prstDash val="solid"/>
           </a:ln>
         </p:spPr>
+        <p:txBody>
+          <a:bodyPr/>
+          <a:p/>
+        </p:txBody>
       </p:sp>
       <p:sp>
         <p:nvSpPr>
@@ -26210,6 +28002,10 @@
             <a:prstDash val="solid"/>
           </a:ln>
         </p:spPr>
+        <p:txBody>
+          <a:bodyPr/>
+          <a:p/>
+        </p:txBody>
       </p:sp>
       <p:sp>
         <p:nvSpPr>
@@ -26361,7 +28157,7 @@
                 <a:ea typeface="Calibri" pitchFamily="34" charset="-122"/>
                 <a:cs typeface="Calibri" pitchFamily="34" charset="-120"/>
               </a:rPr>
-              <a:t>4 / 17</a:t>
+              <a:t>5 / 18</a:t>
             </a:r>
             <a:endParaRPr lang="en-US" sz="900" dirty="0"/>
           </a:p>
@@ -26423,6 +28219,10 @@
             <a:prstDash val="solid"/>
           </a:ln>
         </p:spPr>
+        <p:txBody>
+          <a:bodyPr/>
+          <a:p/>
+        </p:txBody>
       </p:sp>
       <p:sp>
         <p:nvSpPr>
@@ -26565,6 +28365,10 @@
             <a:prstDash val="solid"/>
           </a:ln>
         </p:spPr>
+        <p:txBody>
+          <a:bodyPr/>
+          <a:p/>
+        </p:txBody>
       </p:sp>
       <p:sp>
         <p:nvSpPr>
@@ -26590,6 +28394,10 @@
             <a:prstDash val="solid"/>
           </a:ln>
         </p:spPr>
+        <p:txBody>
+          <a:bodyPr/>
+          <a:p/>
+        </p:txBody>
       </p:sp>
       <p:sp>
         <p:nvSpPr>
@@ -26732,6 +28540,10 @@
             <a:prstDash val="solid"/>
           </a:ln>
         </p:spPr>
+        <p:txBody>
+          <a:bodyPr/>
+          <a:p/>
+        </p:txBody>
       </p:sp>
       <p:sp>
         <p:nvSpPr>
@@ -26757,6 +28569,10 @@
             <a:prstDash val="solid"/>
           </a:ln>
         </p:spPr>
+        <p:txBody>
+          <a:bodyPr/>
+          <a:p/>
+        </p:txBody>
       </p:sp>
       <p:sp>
         <p:nvSpPr>
@@ -26933,6 +28749,10 @@
             <a:prstDash val="solid"/>
           </a:ln>
         </p:spPr>
+        <p:txBody>
+          <a:bodyPr/>
+          <a:p/>
+        </p:txBody>
       </p:sp>
       <p:sp>
         <p:nvSpPr>
@@ -26958,6 +28778,10 @@
             <a:prstDash val="solid"/>
           </a:ln>
         </p:spPr>
+        <p:txBody>
+          <a:bodyPr/>
+          <a:p/>
+        </p:txBody>
       </p:sp>
       <p:sp>
         <p:nvSpPr>
@@ -27151,6 +28975,10 @@
             <a:prstDash val="solid"/>
           </a:ln>
         </p:spPr>
+        <p:txBody>
+          <a:bodyPr/>
+          <a:p/>
+        </p:txBody>
       </p:sp>
       <p:sp>
         <p:nvSpPr>
@@ -27176,6 +29004,10 @@
             <a:prstDash val="solid"/>
           </a:ln>
         </p:spPr>
+        <p:txBody>
+          <a:bodyPr/>
+          <a:p/>
+        </p:txBody>
       </p:sp>
       <p:sp>
         <p:nvSpPr>
@@ -27366,7 +29198,7 @@
                 <a:ea typeface="Calibri" pitchFamily="34" charset="-122"/>
                 <a:cs typeface="Calibri" pitchFamily="34" charset="-120"/>
               </a:rPr>
-              <a:t>5 / 17</a:t>
+              <a:t>6 / 18</a:t>
             </a:r>
             <a:endParaRPr lang="en-US" sz="900" dirty="0"/>
           </a:p>
@@ -27428,6 +29260,10 @@
             <a:prstDash val="solid"/>
           </a:ln>
         </p:spPr>
+        <p:txBody>
+          <a:bodyPr/>
+          <a:p/>
+        </p:txBody>
       </p:sp>
       <p:sp>
         <p:nvSpPr>
@@ -27572,6 +29408,10 @@
             <a:prstDash val="solid"/>
           </a:ln>
         </p:spPr>
+        <p:txBody>
+          <a:bodyPr/>
+          <a:p/>
+        </p:txBody>
       </p:sp>
       <p:sp>
         <p:nvSpPr>
@@ -27635,6 +29475,10 @@
             <a:tailEnd type="triangle"/>
           </a:ln>
         </p:spPr>
+        <p:txBody>
+          <a:bodyPr/>
+          <a:p/>
+        </p:txBody>
       </p:sp>
       <p:sp>
         <p:nvSpPr>
@@ -27662,6 +29506,10 @@
             <a:prstDash val="solid"/>
           </a:ln>
         </p:spPr>
+        <p:txBody>
+          <a:bodyPr/>
+          <a:p/>
+        </p:txBody>
       </p:sp>
       <p:sp>
         <p:nvSpPr>
@@ -27725,6 +29573,10 @@
             <a:tailEnd type="triangle"/>
           </a:ln>
         </p:spPr>
+        <p:txBody>
+          <a:bodyPr/>
+          <a:p/>
+        </p:txBody>
       </p:sp>
       <p:sp>
         <p:nvSpPr>
@@ -27752,6 +29604,10 @@
             <a:prstDash val="solid"/>
           </a:ln>
         </p:spPr>
+        <p:txBody>
+          <a:bodyPr/>
+          <a:p/>
+        </p:txBody>
       </p:sp>
       <p:sp>
         <p:nvSpPr>
@@ -27815,6 +29671,10 @@
             <a:tailEnd type="triangle"/>
           </a:ln>
         </p:spPr>
+        <p:txBody>
+          <a:bodyPr/>
+          <a:p/>
+        </p:txBody>
       </p:sp>
       <p:sp>
         <p:nvSpPr>
@@ -27842,6 +29702,10 @@
             <a:prstDash val="solid"/>
           </a:ln>
         </p:spPr>
+        <p:txBody>
+          <a:bodyPr/>
+          <a:p/>
+        </p:txBody>
       </p:sp>
       <p:sp>
         <p:nvSpPr>
@@ -27905,6 +29769,10 @@
             <a:tailEnd type="triangle"/>
           </a:ln>
         </p:spPr>
+        <p:txBody>
+          <a:bodyPr/>
+          <a:p/>
+        </p:txBody>
       </p:sp>
       <p:sp>
         <p:nvSpPr>
@@ -27932,6 +29800,10 @@
             <a:prstDash val="solid"/>
           </a:ln>
         </p:spPr>
+        <p:txBody>
+          <a:bodyPr/>
+          <a:p/>
+        </p:txBody>
       </p:sp>
       <p:sp>
         <p:nvSpPr>
@@ -27995,6 +29867,10 @@
             <a:tailEnd type="triangle"/>
           </a:ln>
         </p:spPr>
+        <p:txBody>
+          <a:bodyPr/>
+          <a:p/>
+        </p:txBody>
       </p:sp>
       <p:sp>
         <p:nvSpPr>
@@ -28022,6 +29898,10 @@
             <a:prstDash val="solid"/>
           </a:ln>
         </p:spPr>
+        <p:txBody>
+          <a:bodyPr/>
+          <a:p/>
+        </p:txBody>
       </p:sp>
       <p:sp>
         <p:nvSpPr>
@@ -28085,6 +29965,10 @@
             <a:tailEnd type="triangle"/>
           </a:ln>
         </p:spPr>
+        <p:txBody>
+          <a:bodyPr/>
+          <a:p/>
+        </p:txBody>
       </p:sp>
       <p:sp>
         <p:nvSpPr>
@@ -28112,6 +29996,10 @@
             <a:prstDash val="solid"/>
           </a:ln>
         </p:spPr>
+        <p:txBody>
+          <a:bodyPr/>
+          <a:p/>
+        </p:txBody>
       </p:sp>
       <p:sp>
         <p:nvSpPr>
@@ -28175,6 +30063,10 @@
             <a:tailEnd type="triangle"/>
           </a:ln>
         </p:spPr>
+        <p:txBody>
+          <a:bodyPr/>
+          <a:p/>
+        </p:txBody>
       </p:sp>
       <p:sp>
         <p:nvSpPr>
@@ -28202,6 +30094,10 @@
             <a:prstDash val="solid"/>
           </a:ln>
         </p:spPr>
+        <p:txBody>
+          <a:bodyPr/>
+          <a:p/>
+        </p:txBody>
       </p:sp>
       <p:sp>
         <p:nvSpPr>
@@ -28266,6 +30162,10 @@
             <a:prstDash val="solid"/>
           </a:ln>
         </p:spPr>
+        <p:txBody>
+          <a:bodyPr/>
+          <a:p/>
+        </p:txBody>
       </p:sp>
       <p:sp>
         <p:nvSpPr>
@@ -28291,6 +30191,10 @@
             <a:prstDash val="solid"/>
           </a:ln>
         </p:spPr>
+        <p:txBody>
+          <a:bodyPr/>
+          <a:p/>
+        </p:txBody>
       </p:sp>
       <p:sp>
         <p:nvSpPr>
@@ -28355,6 +30259,10 @@
             <a:prstDash val="solid"/>
           </a:ln>
         </p:spPr>
+        <p:txBody>
+          <a:bodyPr/>
+          <a:p/>
+        </p:txBody>
       </p:sp>
       <p:sp>
         <p:nvSpPr>
@@ -28380,6 +30288,10 @@
             <a:prstDash val="solid"/>
           </a:ln>
         </p:spPr>
+        <p:txBody>
+          <a:bodyPr/>
+          <a:p/>
+        </p:txBody>
       </p:sp>
       <p:sp>
         <p:nvSpPr>
@@ -28405,6 +30317,10 @@
             <a:prstDash val="solid"/>
           </a:ln>
         </p:spPr>
+        <p:txBody>
+          <a:bodyPr/>
+          <a:p/>
+        </p:txBody>
       </p:sp>
       <p:sp>
         <p:nvSpPr>
@@ -28430,6 +30346,10 @@
             <a:prstDash val="solid"/>
           </a:ln>
         </p:spPr>
+        <p:txBody>
+          <a:bodyPr/>
+          <a:p/>
+        </p:txBody>
       </p:sp>
       <p:sp>
         <p:nvSpPr>
@@ -28767,6 +30687,10 @@
             <a:prstDash val="solid"/>
           </a:ln>
         </p:spPr>
+        <p:txBody>
+          <a:bodyPr/>
+          <a:p/>
+        </p:txBody>
       </p:sp>
       <p:sp>
         <p:nvSpPr>
@@ -28870,6 +30794,10 @@
             <a:prstDash val="solid"/>
           </a:ln>
         </p:spPr>
+        <p:txBody>
+          <a:bodyPr/>
+          <a:p/>
+        </p:txBody>
       </p:sp>
       <p:sp>
         <p:nvSpPr>
@@ -28973,6 +30901,10 @@
             <a:prstDash val="solid"/>
           </a:ln>
         </p:spPr>
+        <p:txBody>
+          <a:bodyPr/>
+          <a:p/>
+        </p:txBody>
       </p:sp>
       <p:sp>
         <p:nvSpPr>
@@ -29076,6 +31008,10 @@
             <a:prstDash val="solid"/>
           </a:ln>
         </p:spPr>
+        <p:txBody>
+          <a:bodyPr/>
+          <a:p/>
+        </p:txBody>
       </p:sp>
       <p:sp>
         <p:nvSpPr>
@@ -29179,6 +31115,10 @@
             <a:prstDash val="solid"/>
           </a:ln>
         </p:spPr>
+        <p:txBody>
+          <a:bodyPr/>
+          <a:p/>
+        </p:txBody>
       </p:sp>
       <p:sp>
         <p:nvSpPr>
@@ -29282,6 +31222,10 @@
             <a:prstDash val="solid"/>
           </a:ln>
         </p:spPr>
+        <p:txBody>
+          <a:bodyPr/>
+          <a:p/>
+        </p:txBody>
       </p:sp>
       <p:sp>
         <p:nvSpPr>
@@ -29385,6 +31329,10 @@
             <a:prstDash val="solid"/>
           </a:ln>
         </p:spPr>
+        <p:txBody>
+          <a:bodyPr/>
+          <a:p/>
+        </p:txBody>
       </p:sp>
       <p:sp>
         <p:nvSpPr>
@@ -29488,6 +31436,10 @@
             <a:prstDash val="solid"/>
           </a:ln>
         </p:spPr>
+        <p:txBody>
+          <a:bodyPr/>
+          <a:p/>
+        </p:txBody>
       </p:sp>
       <p:sp>
         <p:nvSpPr>
@@ -29591,6 +31543,10 @@
             <a:prstDash val="solid"/>
           </a:ln>
         </p:spPr>
+        <p:txBody>
+          <a:bodyPr/>
+          <a:p/>
+        </p:txBody>
       </p:sp>
       <p:sp>
         <p:nvSpPr>
@@ -29694,6 +31650,10 @@
             <a:prstDash val="solid"/>
           </a:ln>
         </p:spPr>
+        <p:txBody>
+          <a:bodyPr/>
+          <a:p/>
+        </p:txBody>
       </p:sp>
       <p:sp>
         <p:nvSpPr>
@@ -29797,6 +31757,10 @@
             <a:prstDash val="solid"/>
           </a:ln>
         </p:spPr>
+        <p:txBody>
+          <a:bodyPr/>
+          <a:p/>
+        </p:txBody>
       </p:sp>
       <p:sp>
         <p:nvSpPr>
@@ -29900,6 +31864,10 @@
             <a:prstDash val="solid"/>
           </a:ln>
         </p:spPr>
+        <p:txBody>
+          <a:bodyPr/>
+          <a:p/>
+        </p:txBody>
       </p:sp>
       <p:sp>
         <p:nvSpPr>
@@ -30003,6 +31971,10 @@
             <a:prstDash val="solid"/>
           </a:ln>
         </p:spPr>
+        <p:txBody>
+          <a:bodyPr/>
+          <a:p/>
+        </p:txBody>
       </p:sp>
       <p:sp>
         <p:nvSpPr>
@@ -30106,6 +32078,10 @@
             <a:prstDash val="solid"/>
           </a:ln>
         </p:spPr>
+        <p:txBody>
+          <a:bodyPr/>
+          <a:p/>
+        </p:txBody>
       </p:sp>
       <p:sp>
         <p:nvSpPr>
@@ -30209,6 +32185,10 @@
             <a:prstDash val="solid"/>
           </a:ln>
         </p:spPr>
+        <p:txBody>
+          <a:bodyPr/>
+          <a:p/>
+        </p:txBody>
       </p:sp>
       <p:sp>
         <p:nvSpPr>
@@ -30234,6 +32214,10 @@
             <a:prstDash val="solid"/>
           </a:ln>
         </p:spPr>
+        <p:txBody>
+          <a:bodyPr/>
+          <a:p/>
+        </p:txBody>
       </p:sp>
       <p:sp>
         <p:nvSpPr>
@@ -30298,6 +32282,10 @@
             <a:prstDash val="solid"/>
           </a:ln>
         </p:spPr>
+        <p:txBody>
+          <a:bodyPr/>
+          <a:p/>
+        </p:txBody>
       </p:sp>
       <p:sp>
         <p:nvSpPr>
@@ -30440,6 +32428,10 @@
             <a:prstDash val="solid"/>
           </a:ln>
         </p:spPr>
+        <p:txBody>
+          <a:bodyPr/>
+          <a:p/>
+        </p:txBody>
       </p:sp>
       <p:sp>
         <p:nvSpPr>
@@ -30582,6 +32574,10 @@
             <a:prstDash val="solid"/>
           </a:ln>
         </p:spPr>
+        <p:txBody>
+          <a:bodyPr/>
+          <a:p/>
+        </p:txBody>
       </p:sp>
       <p:sp>
         <p:nvSpPr>
@@ -30724,6 +32720,10 @@
             <a:prstDash val="solid"/>
           </a:ln>
         </p:spPr>
+        <p:txBody>
+          <a:bodyPr/>
+          <a:p/>
+        </p:txBody>
       </p:sp>
       <p:sp>
         <p:nvSpPr>
@@ -30953,7 +32953,7 @@
                 <a:ea typeface="Calibri" pitchFamily="34" charset="-122"/>
                 <a:cs typeface="Calibri" pitchFamily="34" charset="-120"/>
               </a:rPr>
-              <a:t>6 / 17</a:t>
+              <a:t>7 / 18</a:t>
             </a:r>
             <a:endParaRPr lang="en-US" sz="900" dirty="0"/>
           </a:p>
@@ -31015,6 +33015,10 @@
             <a:prstDash val="solid"/>
           </a:ln>
         </p:spPr>
+        <p:txBody>
+          <a:bodyPr/>
+          <a:p/>
+        </p:txBody>
       </p:sp>
       <p:sp>
         <p:nvSpPr>
@@ -31174,6 +33178,10 @@
             <a:prstDash val="solid"/>
           </a:ln>
         </p:spPr>
+        <p:txBody>
+          <a:bodyPr/>
+          <a:p/>
+        </p:txBody>
       </p:sp>
       <p:sp>
         <p:nvSpPr>
@@ -31277,6 +33285,10 @@
             <a:prstDash val="solid"/>
           </a:ln>
         </p:spPr>
+        <p:txBody>
+          <a:bodyPr/>
+          <a:p/>
+        </p:txBody>
       </p:sp>
       <p:sp>
         <p:nvSpPr>
@@ -31380,6 +33392,10 @@
             <a:prstDash val="solid"/>
           </a:ln>
         </p:spPr>
+        <p:txBody>
+          <a:bodyPr/>
+          <a:p/>
+        </p:txBody>
       </p:sp>
       <p:sp>
         <p:nvSpPr>
@@ -31483,6 +33499,10 @@
             <a:prstDash val="solid"/>
           </a:ln>
         </p:spPr>
+        <p:txBody>
+          <a:bodyPr/>
+          <a:p/>
+        </p:txBody>
       </p:sp>
       <p:sp>
         <p:nvSpPr>
@@ -31508,6 +33528,10 @@
             <a:prstDash val="solid"/>
           </a:ln>
         </p:spPr>
+        <p:txBody>
+          <a:bodyPr/>
+          <a:p/>
+        </p:txBody>
       </p:sp>
       <p:sp>
         <p:nvSpPr>
@@ -32326,6 +34350,10 @@
             <a:prstDash val="solid"/>
           </a:ln>
         </p:spPr>
+        <p:txBody>
+          <a:bodyPr/>
+          <a:p/>
+        </p:txBody>
       </p:sp>
       <p:sp>
         <p:nvSpPr>
@@ -32351,6 +34379,10 @@
             <a:prstDash val="solid"/>
           </a:ln>
         </p:spPr>
+        <p:txBody>
+          <a:bodyPr/>
+          <a:p/>
+        </p:txBody>
       </p:sp>
       <p:sp>
         <p:nvSpPr>
@@ -32454,6 +34486,10 @@
             <a:prstDash val="solid"/>
           </a:ln>
         </p:spPr>
+        <p:txBody>
+          <a:bodyPr/>
+          <a:p/>
+        </p:txBody>
       </p:sp>
       <p:sp>
         <p:nvSpPr>
@@ -32518,6 +34554,10 @@
             <a:prstDash val="solid"/>
           </a:ln>
         </p:spPr>
+        <p:txBody>
+          <a:bodyPr/>
+          <a:p/>
+        </p:txBody>
       </p:sp>
       <p:sp>
         <p:nvSpPr>
@@ -32582,6 +34622,10 @@
             <a:prstDash val="solid"/>
           </a:ln>
         </p:spPr>
+        <p:txBody>
+          <a:bodyPr/>
+          <a:p/>
+        </p:txBody>
       </p:sp>
       <p:sp>
         <p:nvSpPr>
@@ -32646,6 +34690,10 @@
             <a:prstDash val="solid"/>
           </a:ln>
         </p:spPr>
+        <p:txBody>
+          <a:bodyPr/>
+          <a:p/>
+        </p:txBody>
       </p:sp>
       <p:sp>
         <p:nvSpPr>
@@ -32710,6 +34758,10 @@
             <a:prstDash val="solid"/>
           </a:ln>
         </p:spPr>
+        <p:txBody>
+          <a:bodyPr/>
+          <a:p/>
+        </p:txBody>
       </p:sp>
       <p:sp>
         <p:nvSpPr>
@@ -32774,6 +34826,10 @@
             <a:prstDash val="solid"/>
           </a:ln>
         </p:spPr>
+        <p:txBody>
+          <a:bodyPr/>
+          <a:p/>
+        </p:txBody>
       </p:sp>
       <p:sp>
         <p:nvSpPr>
@@ -32838,6 +34894,10 @@
             <a:prstDash val="solid"/>
           </a:ln>
         </p:spPr>
+        <p:txBody>
+          <a:bodyPr/>
+          <a:p/>
+        </p:txBody>
       </p:sp>
       <p:sp>
         <p:nvSpPr>
@@ -32902,6 +34962,10 @@
             <a:prstDash val="solid"/>
           </a:ln>
         </p:spPr>
+        <p:txBody>
+          <a:bodyPr/>
+          <a:p/>
+        </p:txBody>
       </p:sp>
       <p:sp>
         <p:nvSpPr>
@@ -32966,6 +35030,10 @@
             <a:prstDash val="solid"/>
           </a:ln>
         </p:spPr>
+        <p:txBody>
+          <a:bodyPr/>
+          <a:p/>
+        </p:txBody>
       </p:sp>
       <p:sp>
         <p:nvSpPr>
@@ -33030,6 +35098,10 @@
             <a:prstDash val="solid"/>
           </a:ln>
         </p:spPr>
+        <p:txBody>
+          <a:bodyPr/>
+          <a:p/>
+        </p:txBody>
       </p:sp>
       <p:sp>
         <p:nvSpPr>
@@ -33094,6 +35166,10 @@
             <a:prstDash val="solid"/>
           </a:ln>
         </p:spPr>
+        <p:txBody>
+          <a:bodyPr/>
+          <a:p/>
+        </p:txBody>
       </p:sp>
       <p:sp>
         <p:nvSpPr>
@@ -33158,6 +35234,10 @@
             <a:prstDash val="solid"/>
           </a:ln>
         </p:spPr>
+        <p:txBody>
+          <a:bodyPr/>
+          <a:p/>
+        </p:txBody>
       </p:sp>
       <p:sp>
         <p:nvSpPr>
@@ -33222,6 +35302,10 @@
             <a:prstDash val="solid"/>
           </a:ln>
         </p:spPr>
+        <p:txBody>
+          <a:bodyPr/>
+          <a:p/>
+        </p:txBody>
       </p:sp>
       <p:sp>
         <p:nvSpPr>
@@ -33247,6 +35331,10 @@
             <a:prstDash val="solid"/>
           </a:ln>
         </p:spPr>
+        <p:txBody>
+          <a:bodyPr/>
+          <a:p/>
+        </p:txBody>
       </p:sp>
       <p:sp>
         <p:nvSpPr>
@@ -33350,6 +35438,10 @@
             <a:prstDash val="solid"/>
           </a:ln>
         </p:spPr>
+        <p:txBody>
+          <a:bodyPr/>
+          <a:p/>
+        </p:txBody>
       </p:sp>
       <p:sp>
         <p:nvSpPr>
@@ -33414,6 +35506,10 @@
             <a:prstDash val="solid"/>
           </a:ln>
         </p:spPr>
+        <p:txBody>
+          <a:bodyPr/>
+          <a:p/>
+        </p:txBody>
       </p:sp>
       <p:sp>
         <p:nvSpPr>
@@ -33478,6 +35574,10 @@
             <a:prstDash val="solid"/>
           </a:ln>
         </p:spPr>
+        <p:txBody>
+          <a:bodyPr/>
+          <a:p/>
+        </p:txBody>
       </p:sp>
       <p:sp>
         <p:nvSpPr>
@@ -33542,6 +35642,10 @@
             <a:prstDash val="solid"/>
           </a:ln>
         </p:spPr>
+        <p:txBody>
+          <a:bodyPr/>
+          <a:p/>
+        </p:txBody>
       </p:sp>
       <p:sp>
         <p:nvSpPr>
@@ -33606,6 +35710,10 @@
             <a:prstDash val="solid"/>
           </a:ln>
         </p:spPr>
+        <p:txBody>
+          <a:bodyPr/>
+          <a:p/>
+        </p:txBody>
       </p:sp>
       <p:sp>
         <p:nvSpPr>
@@ -33670,6 +35778,10 @@
             <a:prstDash val="solid"/>
           </a:ln>
         </p:spPr>
+        <p:txBody>
+          <a:bodyPr/>
+          <a:p/>
+        </p:txBody>
       </p:sp>
       <p:sp>
         <p:nvSpPr>
@@ -33734,6 +35846,10 @@
             <a:prstDash val="solid"/>
           </a:ln>
         </p:spPr>
+        <p:txBody>
+          <a:bodyPr/>
+          <a:p/>
+        </p:txBody>
       </p:sp>
       <p:sp>
         <p:nvSpPr>
@@ -33798,6 +35914,10 @@
             <a:prstDash val="solid"/>
           </a:ln>
         </p:spPr>
+        <p:txBody>
+          <a:bodyPr/>
+          <a:p/>
+        </p:txBody>
       </p:sp>
       <p:sp>
         <p:nvSpPr>
@@ -33862,6 +35982,10 @@
             <a:prstDash val="solid"/>
           </a:ln>
         </p:spPr>
+        <p:txBody>
+          <a:bodyPr/>
+          <a:p/>
+        </p:txBody>
       </p:sp>
       <p:sp>
         <p:nvSpPr>
@@ -33926,6 +36050,10 @@
             <a:prstDash val="solid"/>
           </a:ln>
         </p:spPr>
+        <p:txBody>
+          <a:bodyPr/>
+          <a:p/>
+        </p:txBody>
       </p:sp>
       <p:sp>
         <p:nvSpPr>
@@ -33990,6 +36118,10 @@
             <a:prstDash val="solid"/>
           </a:ln>
         </p:spPr>
+        <p:txBody>
+          <a:bodyPr/>
+          <a:p/>
+        </p:txBody>
       </p:sp>
       <p:sp>
         <p:nvSpPr>
@@ -34054,6 +36186,10 @@
             <a:prstDash val="solid"/>
           </a:ln>
         </p:spPr>
+        <p:txBody>
+          <a:bodyPr/>
+          <a:p/>
+        </p:txBody>
       </p:sp>
       <p:sp>
         <p:nvSpPr>
@@ -34118,6 +36254,10 @@
             <a:prstDash val="solid"/>
           </a:ln>
         </p:spPr>
+        <p:txBody>
+          <a:bodyPr/>
+          <a:p/>
+        </p:txBody>
       </p:sp>
       <p:sp>
         <p:nvSpPr>
@@ -34230,7 +36370,7 @@
                 <a:ea typeface="Calibri" pitchFamily="34" charset="-122"/>
                 <a:cs typeface="Calibri" pitchFamily="34" charset="-120"/>
               </a:rPr>
-              <a:t>7 / 17</a:t>
+              <a:t>8 / 18</a:t>
             </a:r>
             <a:endParaRPr lang="en-US" sz="900" dirty="0"/>
           </a:p>
@@ -34292,6 +36432,10 @@
             <a:prstDash val="solid"/>
           </a:ln>
         </p:spPr>
+        <p:txBody>
+          <a:bodyPr/>
+          <a:p/>
+        </p:txBody>
       </p:sp>
       <p:sp>
         <p:nvSpPr>
@@ -34434,6 +36578,10 @@
             <a:prstDash val="solid"/>
           </a:ln>
         </p:spPr>
+        <p:txBody>
+          <a:bodyPr/>
+          <a:p/>
+        </p:txBody>
       </p:sp>
       <p:sp>
         <p:nvSpPr>
@@ -34459,6 +36607,10 @@
             <a:prstDash val="solid"/>
           </a:ln>
         </p:spPr>
+        <p:txBody>
+          <a:bodyPr/>
+          <a:p/>
+        </p:txBody>
       </p:sp>
       <p:sp>
         <p:nvSpPr>
@@ -34710,6 +36862,10 @@
             <a:prstDash val="solid"/>
           </a:ln>
         </p:spPr>
+        <p:txBody>
+          <a:bodyPr/>
+          <a:p/>
+        </p:txBody>
       </p:sp>
       <p:sp>
         <p:nvSpPr>
@@ -34735,6 +36891,10 @@
             <a:prstDash val="solid"/>
           </a:ln>
         </p:spPr>
+        <p:txBody>
+          <a:bodyPr/>
+          <a:p/>
+        </p:txBody>
       </p:sp>
       <p:sp>
         <p:nvSpPr>
@@ -35034,7 +37194,7 @@
                 <a:ea typeface="Calibri" pitchFamily="34" charset="-122"/>
                 <a:cs typeface="Calibri" pitchFamily="34" charset="-120"/>
               </a:rPr>
-              <a:t>8 / 17</a:t>
+              <a:t>9 / 18</a:t>
             </a:r>
             <a:endParaRPr lang="en-US" sz="900" dirty="0"/>
           </a:p>
@@ -35096,6 +37256,10 @@
             <a:prstDash val="solid"/>
           </a:ln>
         </p:spPr>
+        <p:txBody>
+          <a:bodyPr/>
+          <a:p/>
+        </p:txBody>
       </p:sp>
       <p:sp>
         <p:nvSpPr>
@@ -35240,6 +37404,10 @@
             <a:prstDash val="solid"/>
           </a:ln>
         </p:spPr>
+        <p:txBody>
+          <a:bodyPr/>
+          <a:p/>
+        </p:txBody>
       </p:sp>
       <p:sp>
         <p:nvSpPr>
@@ -35265,6 +37433,10 @@
             <a:prstDash val="solid"/>
           </a:ln>
         </p:spPr>
+        <p:txBody>
+          <a:bodyPr/>
+          <a:p/>
+        </p:txBody>
       </p:sp>
       <p:sp>
         <p:nvSpPr>
@@ -35406,6 +37578,10 @@
             <a:tailEnd type="triangle"/>
           </a:ln>
         </p:spPr>
+        <p:txBody>
+          <a:bodyPr/>
+          <a:p/>
+        </p:txBody>
       </p:sp>
       <p:sp>
         <p:nvSpPr>
@@ -35433,6 +37609,10 @@
             <a:prstDash val="solid"/>
           </a:ln>
         </p:spPr>
+        <p:txBody>
+          <a:bodyPr/>
+          <a:p/>
+        </p:txBody>
       </p:sp>
       <p:sp>
         <p:nvSpPr>
@@ -35458,6 +37638,10 @@
             <a:prstDash val="solid"/>
           </a:ln>
         </p:spPr>
+        <p:txBody>
+          <a:bodyPr/>
+          <a:p/>
+        </p:txBody>
       </p:sp>
       <p:sp>
         <p:nvSpPr>
@@ -35599,6 +37783,10 @@
             <a:tailEnd type="triangle"/>
           </a:ln>
         </p:spPr>
+        <p:txBody>
+          <a:bodyPr/>
+          <a:p/>
+        </p:txBody>
       </p:sp>
       <p:sp>
         <p:nvSpPr>
@@ -35626,6 +37814,10 @@
             <a:prstDash val="solid"/>
           </a:ln>
         </p:spPr>
+        <p:txBody>
+          <a:bodyPr/>
+          <a:p/>
+        </p:txBody>
       </p:sp>
       <p:sp>
         <p:nvSpPr>
@@ -35651,6 +37843,10 @@
             <a:prstDash val="solid"/>
           </a:ln>
         </p:spPr>
+        <p:txBody>
+          <a:bodyPr/>
+          <a:p/>
+        </p:txBody>
       </p:sp>
       <p:sp>
         <p:nvSpPr>
@@ -35792,6 +37988,10 @@
             <a:tailEnd type="triangle"/>
           </a:ln>
         </p:spPr>
+        <p:txBody>
+          <a:bodyPr/>
+          <a:p/>
+        </p:txBody>
       </p:sp>
       <p:sp>
         <p:nvSpPr>
@@ -35819,6 +38019,10 @@
             <a:prstDash val="solid"/>
           </a:ln>
         </p:spPr>
+        <p:txBody>
+          <a:bodyPr/>
+          <a:p/>
+        </p:txBody>
       </p:sp>
       <p:sp>
         <p:nvSpPr>
@@ -35844,6 +38048,10 @@
             <a:prstDash val="solid"/>
           </a:ln>
         </p:spPr>
+        <p:txBody>
+          <a:bodyPr/>
+          <a:p/>
+        </p:txBody>
       </p:sp>
       <p:sp>
         <p:nvSpPr>
@@ -35985,6 +38193,10 @@
             <a:tailEnd type="triangle"/>
           </a:ln>
         </p:spPr>
+        <p:txBody>
+          <a:bodyPr/>
+          <a:p/>
+        </p:txBody>
       </p:sp>
       <p:sp>
         <p:nvSpPr>
@@ -36012,6 +38224,10 @@
             <a:prstDash val="solid"/>
           </a:ln>
         </p:spPr>
+        <p:txBody>
+          <a:bodyPr/>
+          <a:p/>
+        </p:txBody>
       </p:sp>
       <p:sp>
         <p:nvSpPr>
@@ -36037,6 +38253,10 @@
             <a:prstDash val="solid"/>
           </a:ln>
         </p:spPr>
+        <p:txBody>
+          <a:bodyPr/>
+          <a:p/>
+        </p:txBody>
       </p:sp>
       <p:sp>
         <p:nvSpPr>
@@ -36218,6 +38438,10 @@
             <a:prstDash val="solid"/>
           </a:ln>
         </p:spPr>
+        <p:txBody>
+          <a:bodyPr/>
+          <a:p/>
+        </p:txBody>
       </p:sp>
       <p:sp>
         <p:nvSpPr>
@@ -36243,6 +38467,10 @@
             <a:prstDash val="solid"/>
           </a:ln>
         </p:spPr>
+        <p:txBody>
+          <a:bodyPr/>
+          <a:p/>
+        </p:txBody>
       </p:sp>
       <p:sp>
         <p:nvSpPr>
@@ -36473,6 +38701,10 @@
             <a:prstDash val="solid"/>
           </a:ln>
         </p:spPr>
+        <p:txBody>
+          <a:bodyPr/>
+          <a:p/>
+        </p:txBody>
       </p:sp>
       <p:sp>
         <p:nvSpPr>
@@ -36498,6 +38730,10 @@
             <a:prstDash val="solid"/>
           </a:ln>
         </p:spPr>
+        <p:txBody>
+          <a:bodyPr/>
+          <a:p/>
+        </p:txBody>
       </p:sp>
       <p:sp>
         <p:nvSpPr>
@@ -36669,6 +38905,10 @@
             <a:prstDash val="solid"/>
           </a:ln>
         </p:spPr>
+        <p:txBody>
+          <a:bodyPr/>
+          <a:p/>
+        </p:txBody>
       </p:sp>
       <p:sp>
         <p:nvSpPr>
@@ -36694,6 +38934,10 @@
             <a:prstDash val="solid"/>
           </a:ln>
         </p:spPr>
+        <p:txBody>
+          <a:bodyPr/>
+          <a:p/>
+        </p:txBody>
       </p:sp>
       <p:sp>
         <p:nvSpPr>
@@ -36952,7 +39196,7 @@
                 <a:ea typeface="Calibri" pitchFamily="34" charset="-122"/>
                 <a:cs typeface="Calibri" pitchFamily="34" charset="-120"/>
               </a:rPr>
-              <a:t>9 / 17</a:t>
+              <a:t>10 / 18</a:t>
             </a:r>
             <a:endParaRPr lang="en-US" sz="900" dirty="0"/>
           </a:p>

--- a/Aegis-Gate-Presentation.pptx
+++ b/Aegis-Gate-Presentation.pptx
@@ -23949,7 +23949,7 @@
         <p:spPr>
           <a:xfrm>
             <a:off x="365760" y="1783080"/>
-            <a:ext cx="2706624" cy="1783080"/>
+            <a:ext cx="3678935" cy="1783080"/>
           </a:xfrm>
           <a:prstGeom prst="rect">
             <a:avLst/>
@@ -24001,7 +24001,7 @@
             <a:avLst/>
           </a:prstGeom>
           <a:solidFill>
-            <a:srgbClr val="6B7280"/>
+            <a:srgbClr val="60A5FA"/>
           </a:solidFill>
           <a:ln>
             <a:noFill/>
@@ -24038,8 +24038,8 @@
         </p:nvSpPr>
         <p:spPr>
           <a:xfrm>
-            <a:off x="566928" y="1911095"/>
-            <a:ext cx="2340864" cy="237744"/>
+            <a:off x="585216" y="1929384"/>
+            <a:ext cx="3267455" cy="237744"/>
           </a:xfrm>
           <a:prstGeom prst="rect">
             <a:avLst/>
@@ -24053,13 +24053,13 @@
           <a:lstStyle/>
           <a:p>
             <a:r>
-              <a:rPr sz="900" b="1">
-                <a:solidFill>
-                  <a:srgbClr val="6B7280"/>
+              <a:rPr sz="950" b="1">
+                <a:solidFill>
+                  <a:srgbClr val="60A5FA"/>
                 </a:solidFill>
                 <a:latin typeface="Courier New"/>
               </a:rPr>
-              <a:t>TIER 0  ·  S</a:t>
+              <a:t>TIER 2  ·  M</a:t>
             </a:r>
           </a:p>
         </p:txBody>
@@ -24072,8 +24072,8 @@
         </p:nvSpPr>
         <p:spPr>
           <a:xfrm>
-            <a:off x="566928" y="2203704"/>
-            <a:ext cx="2340864" cy="548640"/>
+            <a:off x="585216" y="2240280"/>
+            <a:ext cx="3267455" cy="548640"/>
           </a:xfrm>
           <a:prstGeom prst="rect">
             <a:avLst/>
@@ -24087,13 +24087,13 @@
           <a:lstStyle/>
           <a:p>
             <a:r>
-              <a:rPr sz="1250" b="1">
+              <a:rPr sz="1350" b="1">
                 <a:solidFill>
                   <a:srgbClr val="E5E7EB"/>
                 </a:solidFill>
                 <a:latin typeface="Calibri"/>
               </a:rPr>
-              <a:t>Hygiene</a:t>
+              <a:t>AI / LLM firewall</a:t>
             </a:r>
           </a:p>
         </p:txBody>
@@ -24106,8 +24106,8 @@
         </p:nvSpPr>
         <p:spPr>
           <a:xfrm>
-            <a:off x="566928" y="2606040"/>
-            <a:ext cx="2340864" cy="868680"/>
+            <a:off x="585216" y="2679191"/>
+            <a:ext cx="3267455" cy="822960"/>
           </a:xfrm>
           <a:prstGeom prst="rect">
             <a:avLst/>
@@ -24126,13 +24126,13 @@
               </a:spcAft>
             </a:pPr>
             <a:r>
-              <a:rPr sz="1000" b="0">
+              <a:rPr sz="1100" b="0">
                 <a:solidFill>
                   <a:srgbClr val="9CA3AF"/>
                 </a:solidFill>
                 <a:latin typeface="Calibri"/>
               </a:rPr>
-              <a:t>Fix the 2 red tests; keep HTTP/3 gated until wired.</a:t>
+              <a:t>Net-new differentiator. Prompt-injection &amp; jailbreak, LLM response inspection, token-aware limits.</a:t>
             </a:r>
           </a:p>
         </p:txBody>
@@ -24145,8 +24145,8 @@
         </p:nvSpPr>
         <p:spPr>
           <a:xfrm>
-            <a:off x="3282696" y="1783080"/>
-            <a:ext cx="2706624" cy="1783080"/>
+            <a:off x="4255008" y="1783080"/>
+            <a:ext cx="3678935" cy="1783080"/>
           </a:xfrm>
           <a:prstGeom prst="rect">
             <a:avLst/>
@@ -24191,14 +24191,14 @@
         </p:nvSpPr>
         <p:spPr>
           <a:xfrm>
-            <a:off x="3282696" y="1783080"/>
+            <a:off x="4255008" y="1783080"/>
             <a:ext cx="54864" cy="1783080"/>
           </a:xfrm>
           <a:prstGeom prst="rect">
             <a:avLst/>
           </a:prstGeom>
           <a:solidFill>
-            <a:srgbClr val="FFD541"/>
+            <a:srgbClr val="F87171"/>
           </a:solidFill>
           <a:ln>
             <a:noFill/>
@@ -24235,8 +24235,8 @@
         </p:nvSpPr>
         <p:spPr>
           <a:xfrm>
-            <a:off x="3483864" y="1911095"/>
-            <a:ext cx="2340864" cy="237744"/>
+            <a:off x="4474464" y="1929384"/>
+            <a:ext cx="3267455" cy="237744"/>
           </a:xfrm>
           <a:prstGeom prst="rect">
             <a:avLst/>
@@ -24250,13 +24250,13 @@
           <a:lstStyle/>
           <a:p>
             <a:r>
-              <a:rPr sz="900" b="1">
-                <a:solidFill>
-                  <a:srgbClr val="FFD541"/>
+              <a:rPr sz="950" b="1">
+                <a:solidFill>
+                  <a:srgbClr val="F87171"/>
                 </a:solidFill>
                 <a:latin typeface="Courier New"/>
               </a:rPr>
-              <a:t>TIER 1  ·  S→L</a:t>
+              <a:t>TIER 3  ·  M-L</a:t>
             </a:r>
           </a:p>
         </p:txBody>
@@ -24269,8 +24269,8 @@
         </p:nvSpPr>
         <p:spPr>
           <a:xfrm>
-            <a:off x="3483864" y="2203704"/>
-            <a:ext cx="2340864" cy="548640"/>
+            <a:off x="4474464" y="2240280"/>
+            <a:ext cx="3267455" cy="548640"/>
           </a:xfrm>
           <a:prstGeom prst="rect">
             <a:avLst/>
@@ -24284,13 +24284,13 @@
           <a:lstStyle/>
           <a:p>
             <a:r>
-              <a:rPr sz="1250" b="1">
+              <a:rPr sz="1350" b="1">
                 <a:solidFill>
                   <a:srgbClr val="E5E7EB"/>
                 </a:solidFill>
                 <a:latin typeface="Calibri"/>
               </a:rPr>
-              <a:t>API security</a:t>
+              <a:t>Client-side protection</a:t>
             </a:r>
           </a:p>
         </p:txBody>
@@ -24303,8 +24303,8 @@
         </p:nvSpPr>
         <p:spPr>
           <a:xfrm>
-            <a:off x="3483864" y="2606040"/>
-            <a:ext cx="2340864" cy="868680"/>
+            <a:off x="4474464" y="2679191"/>
+            <a:ext cx="3267455" cy="822960"/>
           </a:xfrm>
           <a:prstGeom prst="rect">
             <a:avLst/>
@@ -24323,13 +24323,13 @@
               </a:spcAft>
             </a:pPr>
             <a:r>
-              <a:rPr sz="1000" b="0">
+              <a:rPr sz="1100" b="0">
                 <a:solidFill>
                   <a:srgbClr val="9CA3AF"/>
                 </a:solidFill>
                 <a:latin typeface="Calibri"/>
               </a:rPr>
-              <a:t>Gartner #1. Guards → OpenAPI enforcement → discovery → BOLA/BFLA.</a:t>
+              <a:t>PCI DSS 4.0.1, compliance-forced. Page Shield: CSP collection, script integrity, PCI mode.</a:t>
             </a:r>
           </a:p>
         </p:txBody>
@@ -24342,8 +24342,8 @@
         </p:nvSpPr>
         <p:spPr>
           <a:xfrm>
-            <a:off x="6199632" y="1783080"/>
-            <a:ext cx="2706624" cy="1783080"/>
+            <a:off x="8144256" y="1783080"/>
+            <a:ext cx="3678935" cy="1783080"/>
           </a:xfrm>
           <a:prstGeom prst="rect">
             <a:avLst/>
@@ -24388,14 +24388,14 @@
         </p:nvSpPr>
         <p:spPr>
           <a:xfrm>
-            <a:off x="6199632" y="1783080"/>
+            <a:off x="8144256" y="1783080"/>
             <a:ext cx="54864" cy="1783080"/>
           </a:xfrm>
           <a:prstGeom prst="rect">
             <a:avLst/>
           </a:prstGeom>
           <a:solidFill>
-            <a:srgbClr val="60A5FA"/>
+            <a:srgbClr val="34D399"/>
           </a:solidFill>
           <a:ln>
             <a:noFill/>
@@ -24432,8 +24432,8 @@
         </p:nvSpPr>
         <p:spPr>
           <a:xfrm>
-            <a:off x="6400800" y="1911095"/>
-            <a:ext cx="2340864" cy="237744"/>
+            <a:off x="8363712" y="1929384"/>
+            <a:ext cx="3267455" cy="237744"/>
           </a:xfrm>
           <a:prstGeom prst="rect">
             <a:avLst/>
@@ -24447,13 +24447,13 @@
           <a:lstStyle/>
           <a:p>
             <a:r>
-              <a:rPr sz="900" b="1">
-                <a:solidFill>
-                  <a:srgbClr val="60A5FA"/>
+              <a:rPr sz="950" b="1">
+                <a:solidFill>
+                  <a:srgbClr val="34D399"/>
                 </a:solidFill>
                 <a:latin typeface="Courier New"/>
               </a:rPr>
-              <a:t>TIER 2  ·  M</a:t>
+              <a:t>TIER 4  ·  M</a:t>
             </a:r>
           </a:p>
         </p:txBody>
@@ -24466,8 +24466,8 @@
         </p:nvSpPr>
         <p:spPr>
           <a:xfrm>
-            <a:off x="6400800" y="2203704"/>
-            <a:ext cx="2340864" cy="548640"/>
+            <a:off x="8363712" y="2240280"/>
+            <a:ext cx="3267455" cy="548640"/>
           </a:xfrm>
           <a:prstGeom prst="rect">
             <a:avLst/>
@@ -24481,13 +24481,13 @@
           <a:lstStyle/>
           <a:p>
             <a:r>
-              <a:rPr sz="1250" b="1">
+              <a:rPr sz="1350" b="1">
                 <a:solidFill>
                   <a:srgbClr val="E5E7EB"/>
                 </a:solidFill>
                 <a:latin typeface="Calibri"/>
               </a:rPr>
-              <a:t>AI / LLM firewall</a:t>
+              <a:t>Bot management + ATO</a:t>
             </a:r>
           </a:p>
         </p:txBody>
@@ -24500,8 +24500,8 @@
         </p:nvSpPr>
         <p:spPr>
           <a:xfrm>
-            <a:off x="6400800" y="2606040"/>
-            <a:ext cx="2340864" cy="868680"/>
+            <a:off x="8363712" y="2679191"/>
+            <a:ext cx="3267455" cy="822960"/>
           </a:xfrm>
           <a:prstGeom prst="rect">
             <a:avLst/>
@@ -24520,13 +24520,13 @@
               </a:spcAft>
             </a:pPr>
             <a:r>
-              <a:rPr sz="1000" b="0">
+              <a:rPr sz="1100" b="0">
                 <a:solidFill>
                   <a:srgbClr val="9CA3AF"/>
                 </a:solidFill>
                 <a:latin typeface="Calibri"/>
               </a:rPr>
-              <a:t>Prompt-injection &amp; jailbreak, response inspection, token-aware limits.</a:t>
+              <a:t>Classifier enforcement, ML bot score, credential-stuffing / ATO defense.</a:t>
             </a:r>
           </a:p>
         </p:txBody>
@@ -24539,8 +24539,8 @@
         </p:nvSpPr>
         <p:spPr>
           <a:xfrm>
-            <a:off x="9116568" y="1783080"/>
-            <a:ext cx="2706624" cy="1783080"/>
+            <a:off x="365760" y="3675887"/>
+            <a:ext cx="3678935" cy="1783080"/>
           </a:xfrm>
           <a:prstGeom prst="rect">
             <a:avLst/>
@@ -24585,14 +24585,14 @@
         </p:nvSpPr>
         <p:spPr>
           <a:xfrm>
-            <a:off x="9116568" y="1783080"/>
+            <a:off x="365760" y="3675887"/>
             <a:ext cx="54864" cy="1783080"/>
           </a:xfrm>
           <a:prstGeom prst="rect">
             <a:avLst/>
           </a:prstGeom>
           <a:solidFill>
-            <a:srgbClr val="F87171"/>
+            <a:srgbClr val="A78BFA"/>
           </a:solidFill>
           <a:ln>
             <a:noFill/>
@@ -24629,8 +24629,8 @@
         </p:nvSpPr>
         <p:spPr>
           <a:xfrm>
-            <a:off x="9317736" y="1911095"/>
-            <a:ext cx="2340864" cy="237744"/>
+            <a:off x="585216" y="3822191"/>
+            <a:ext cx="3267455" cy="237744"/>
           </a:xfrm>
           <a:prstGeom prst="rect">
             <a:avLst/>
@@ -24644,13 +24644,13 @@
           <a:lstStyle/>
           <a:p>
             <a:r>
-              <a:rPr sz="900" b="1">
-                <a:solidFill>
-                  <a:srgbClr val="F87171"/>
+              <a:rPr sz="950" b="1">
+                <a:solidFill>
+                  <a:srgbClr val="A78BFA"/>
                 </a:solidFill>
                 <a:latin typeface="Courier New"/>
               </a:rPr>
-              <a:t>TIER 3  ·  M-L</a:t>
+              <a:t>TIER 5  ·  L</a:t>
             </a:r>
           </a:p>
         </p:txBody>
@@ -24663,8 +24663,8 @@
         </p:nvSpPr>
         <p:spPr>
           <a:xfrm>
-            <a:off x="9317736" y="2203704"/>
-            <a:ext cx="2340864" cy="548640"/>
+            <a:off x="585216" y="4133087"/>
+            <a:ext cx="3267455" cy="548640"/>
           </a:xfrm>
           <a:prstGeom prst="rect">
             <a:avLst/>
@@ -24678,13 +24678,13 @@
           <a:lstStyle/>
           <a:p>
             <a:r>
-              <a:rPr sz="1250" b="1">
+              <a:rPr sz="1350" b="1">
                 <a:solidFill>
                   <a:srgbClr val="E5E7EB"/>
                 </a:solidFill>
                 <a:latin typeface="Calibri"/>
               </a:rPr>
-              <a:t>Client-side protection</a:t>
+              <a:t>ML positive security</a:t>
             </a:r>
           </a:p>
         </p:txBody>
@@ -24697,8 +24697,8 @@
         </p:nvSpPr>
         <p:spPr>
           <a:xfrm>
-            <a:off x="9317736" y="2606040"/>
-            <a:ext cx="2340864" cy="868680"/>
+            <a:off x="585216" y="4572000"/>
+            <a:ext cx="3267455" cy="822960"/>
           </a:xfrm>
           <a:prstGeom prst="rect">
             <a:avLst/>
@@ -24717,13 +24717,13 @@
               </a:spcAft>
             </a:pPr>
             <a:r>
-              <a:rPr sz="1000" b="0">
+              <a:rPr sz="1100" b="0">
                 <a:solidFill>
                   <a:srgbClr val="9CA3AF"/>
                 </a:solidFill>
                 <a:latin typeface="Calibri"/>
               </a:rPr>
-              <a:t>PCI DSS 4.0.1. Page Shield: CSP, script integrity, PCI mode.</a:t>
+              <a:t>Auto-baseline normal traffic → zero-day anomaly flags. Adaptive L7 DDoS tuning.</a:t>
             </a:r>
           </a:p>
         </p:txBody>
@@ -24736,8 +24736,8 @@
         </p:nvSpPr>
         <p:spPr>
           <a:xfrm>
-            <a:off x="365760" y="3675887"/>
-            <a:ext cx="2706624" cy="1783080"/>
+            <a:off x="4255008" y="3675887"/>
+            <a:ext cx="3678935" cy="1783080"/>
           </a:xfrm>
           <a:prstGeom prst="rect">
             <a:avLst/>
@@ -24782,14 +24782,14 @@
         </p:nvSpPr>
         <p:spPr>
           <a:xfrm>
-            <a:off x="365760" y="3675887"/>
+            <a:off x="4255008" y="3675887"/>
             <a:ext cx="54864" cy="1783080"/>
           </a:xfrm>
           <a:prstGeom prst="rect">
             <a:avLst/>
           </a:prstGeom>
           <a:solidFill>
-            <a:srgbClr val="34D399"/>
+            <a:srgbClr val="F59E0B"/>
           </a:solidFill>
           <a:ln>
             <a:noFill/>
@@ -24826,8 +24826,8 @@
         </p:nvSpPr>
         <p:spPr>
           <a:xfrm>
-            <a:off x="566928" y="3803903"/>
-            <a:ext cx="2340864" cy="237744"/>
+            <a:off x="4474464" y="3822191"/>
+            <a:ext cx="3267455" cy="237744"/>
           </a:xfrm>
           <a:prstGeom prst="rect">
             <a:avLst/>
@@ -24841,13 +24841,13 @@
           <a:lstStyle/>
           <a:p>
             <a:r>
-              <a:rPr sz="900" b="1">
-                <a:solidFill>
-                  <a:srgbClr val="34D399"/>
+              <a:rPr sz="950" b="1">
+                <a:solidFill>
+                  <a:srgbClr val="F59E0B"/>
                 </a:solidFill>
                 <a:latin typeface="Courier New"/>
               </a:rPr>
-              <a:t>TIER 4  ·  M</a:t>
+              <a:t>TIER 6  ·  M-L</a:t>
             </a:r>
           </a:p>
         </p:txBody>
@@ -24860,8 +24860,8 @@
         </p:nvSpPr>
         <p:spPr>
           <a:xfrm>
-            <a:off x="566928" y="4096511"/>
-            <a:ext cx="2340864" cy="548640"/>
+            <a:off x="4474464" y="4133087"/>
+            <a:ext cx="3267455" cy="548640"/>
           </a:xfrm>
           <a:prstGeom prst="rect">
             <a:avLst/>
@@ -24875,13 +24875,13 @@
           <a:lstStyle/>
           <a:p>
             <a:r>
-              <a:rPr sz="1250" b="1">
+              <a:rPr sz="1350" b="1">
                 <a:solidFill>
                   <a:srgbClr val="E5E7EB"/>
                 </a:solidFill>
                 <a:latin typeface="Calibri"/>
               </a:rPr>
-              <a:t>Bot management + ATO</a:t>
+              <a:t>Managed ruleset</a:t>
             </a:r>
           </a:p>
         </p:txBody>
@@ -24894,8 +24894,8 @@
         </p:nvSpPr>
         <p:spPr>
           <a:xfrm>
-            <a:off x="566928" y="4498848"/>
-            <a:ext cx="2340864" cy="868680"/>
+            <a:off x="4474464" y="4572000"/>
+            <a:ext cx="3267455" cy="822960"/>
           </a:xfrm>
           <a:prstGeom prst="rect">
             <a:avLst/>
@@ -24914,13 +24914,13 @@
               </a:spcAft>
             </a:pPr>
             <a:r>
-              <a:rPr sz="1000" b="0">
+              <a:rPr sz="1100" b="0">
                 <a:solidFill>
                   <a:srgbClr val="9CA3AF"/>
                 </a:solidFill>
                 <a:latin typeface="Calibri"/>
               </a:rPr>
-              <a:t>Classifier enforcement, ML bot score, credential-stuffing defense.</a:t>
+              <a:t>CRS-class managed signatures with signed auto-update + CVE virtual-patch feed.</a:t>
             </a:r>
           </a:p>
         </p:txBody>
@@ -24933,8 +24933,8 @@
         </p:nvSpPr>
         <p:spPr>
           <a:xfrm>
-            <a:off x="3282696" y="3675887"/>
-            <a:ext cx="2706624" cy="1783080"/>
+            <a:off x="8144256" y="3675887"/>
+            <a:ext cx="3678935" cy="1783080"/>
           </a:xfrm>
           <a:prstGeom prst="rect">
             <a:avLst/>
@@ -24979,14 +24979,14 @@
         </p:nvSpPr>
         <p:spPr>
           <a:xfrm>
-            <a:off x="3282696" y="3675887"/>
+            <a:off x="8144256" y="3675887"/>
             <a:ext cx="54864" cy="1783080"/>
           </a:xfrm>
           <a:prstGeom prst="rect">
             <a:avLst/>
           </a:prstGeom>
           <a:solidFill>
-            <a:srgbClr val="A78BFA"/>
+            <a:srgbClr val="22D3EE"/>
           </a:solidFill>
           <a:ln>
             <a:noFill/>
@@ -25023,8 +25023,8 @@
         </p:nvSpPr>
         <p:spPr>
           <a:xfrm>
-            <a:off x="3483864" y="3803903"/>
-            <a:ext cx="2340864" cy="237744"/>
+            <a:off x="8363712" y="3822191"/>
+            <a:ext cx="3267455" cy="237744"/>
           </a:xfrm>
           <a:prstGeom prst="rect">
             <a:avLst/>
@@ -25038,13 +25038,13 @@
           <a:lstStyle/>
           <a:p>
             <a:r>
-              <a:rPr sz="900" b="1">
-                <a:solidFill>
-                  <a:srgbClr val="A78BFA"/>
+              <a:rPr sz="950" b="1">
+                <a:solidFill>
+                  <a:srgbClr val="22D3EE"/>
                 </a:solidFill>
                 <a:latin typeface="Courier New"/>
               </a:rPr>
-              <a:t>TIER 5  ·  L</a:t>
+              <a:t>FOUNDATION  ·  S→L</a:t>
             </a:r>
           </a:p>
         </p:txBody>
@@ -25057,8 +25057,8 @@
         </p:nvSpPr>
         <p:spPr>
           <a:xfrm>
-            <a:off x="3483864" y="4096511"/>
-            <a:ext cx="2340864" cy="548640"/>
+            <a:off x="8363712" y="4133087"/>
+            <a:ext cx="3267455" cy="548640"/>
           </a:xfrm>
           <a:prstGeom prst="rect">
             <a:avLst/>
@@ -25072,13 +25072,13 @@
           <a:lstStyle/>
           <a:p>
             <a:r>
-              <a:rPr sz="1250" b="1">
+              <a:rPr sz="1350" b="1">
                 <a:solidFill>
                   <a:srgbClr val="E5E7EB"/>
                 </a:solidFill>
                 <a:latin typeface="Calibri"/>
               </a:rPr>
-              <a:t>ML positive security</a:t>
+              <a:t>Enterprise identity — RBAC &amp; SSO</a:t>
             </a:r>
           </a:p>
         </p:txBody>
@@ -25091,8 +25091,8 @@
         </p:nvSpPr>
         <p:spPr>
           <a:xfrm>
-            <a:off x="3483864" y="4498848"/>
-            <a:ext cx="2340864" cy="868680"/>
+            <a:off x="8363712" y="4572000"/>
+            <a:ext cx="3267455" cy="822960"/>
           </a:xfrm>
           <a:prstGeom prst="rect">
             <a:avLst/>
@@ -25111,13 +25111,13 @@
               </a:spcAft>
             </a:pPr>
             <a:r>
-              <a:rPr sz="1000" b="0">
+              <a:rPr sz="1100" b="0">
                 <a:solidFill>
                   <a:srgbClr val="9CA3AF"/>
                 </a:solidFill>
                 <a:latin typeface="Calibri"/>
               </a:rPr>
-              <a:t>Auto-baseline traffic → zero-day flags. Adaptive L7 DDoS.</a:t>
+              <a:t>Multi-user accounts, human RBAC, per-user audit, dashboard OIDC SSO. P1 self-service hardening ships standalone.</a:t>
             </a:r>
           </a:p>
         </p:txBody>
@@ -25130,14 +25130,14 @@
         </p:nvSpPr>
         <p:spPr>
           <a:xfrm>
-            <a:off x="6199632" y="3675887"/>
-            <a:ext cx="2706624" cy="1783080"/>
+            <a:off x="365760" y="5596128"/>
+            <a:ext cx="11420856" cy="713232"/>
           </a:xfrm>
           <a:prstGeom prst="rect">
             <a:avLst/>
           </a:prstGeom>
           <a:solidFill>
-            <a:srgbClr val="151B27"/>
+            <a:srgbClr val="1A2030"/>
           </a:solidFill>
           <a:ln w="12700">
             <a:solidFill>
@@ -25176,14 +25176,14 @@
         </p:nvSpPr>
         <p:spPr>
           <a:xfrm>
-            <a:off x="6199632" y="3675887"/>
-            <a:ext cx="54864" cy="1783080"/>
+            <a:off x="365760" y="5596128"/>
+            <a:ext cx="54864" cy="713232"/>
           </a:xfrm>
           <a:prstGeom prst="rect">
             <a:avLst/>
           </a:prstGeom>
           <a:solidFill>
-            <a:srgbClr val="F59E0B"/>
+            <a:srgbClr val="FFD541"/>
           </a:solidFill>
           <a:ln>
             <a:noFill/>
@@ -25220,8 +25220,8 @@
         </p:nvSpPr>
         <p:spPr>
           <a:xfrm>
-            <a:off x="6400800" y="3803903"/>
-            <a:ext cx="2340864" cy="237744"/>
+            <a:off x="594360" y="5715000"/>
+            <a:ext cx="2926080" cy="274320"/>
           </a:xfrm>
           <a:prstGeom prst="rect">
             <a:avLst/>
@@ -25235,13 +25235,13 @@
           <a:lstStyle/>
           <a:p>
             <a:r>
-              <a:rPr sz="900" b="1">
-                <a:solidFill>
-                  <a:srgbClr val="F59E0B"/>
+              <a:rPr sz="1000" b="1">
+                <a:solidFill>
+                  <a:srgbClr val="FFD541"/>
                 </a:solidFill>
                 <a:latin typeface="Courier New"/>
               </a:rPr>
-              <a:t>TIER 6  ·  M-L</a:t>
+              <a:t>▶ RECOMMENDED NEXT</a:t>
             </a:r>
           </a:p>
         </p:txBody>
@@ -25254,8 +25254,8 @@
         </p:nvSpPr>
         <p:spPr>
           <a:xfrm>
-            <a:off x="6400800" y="4096511"/>
-            <a:ext cx="2340864" cy="548640"/>
+            <a:off x="594360" y="5961888"/>
+            <a:ext cx="10972800" cy="274320"/>
           </a:xfrm>
           <a:prstGeom prst="rect">
             <a:avLst/>
@@ -25269,13 +25269,13 @@
           <a:lstStyle/>
           <a:p>
             <a:r>
-              <a:rPr sz="1250" b="1">
-                <a:solidFill>
-                  <a:srgbClr val="E5E7EB"/>
+              <a:rPr sz="1100" b="0">
+                <a:solidFill>
+                  <a:srgbClr val="9CA3AF"/>
                 </a:solidFill>
                 <a:latin typeface="Calibri"/>
               </a:rPr>
-              <a:t>Managed ruleset</a:t>
+              <a:t>Tier 2 (AI/LLM firewall) is the splashier differentiator and reuses the existing AI + DLP modules; Foundation P1 (self-service hardening) is a parallel standalone win.</a:t>
             </a:r>
           </a:p>
         </p:txBody>
@@ -25288,8 +25288,8 @@
         </p:nvSpPr>
         <p:spPr>
           <a:xfrm>
-            <a:off x="6400800" y="4498848"/>
-            <a:ext cx="2340864" cy="868680"/>
+            <a:off x="365760" y="6528816"/>
+            <a:ext cx="7315200" cy="274320"/>
           </a:xfrm>
           <a:prstGeom prst="rect">
             <a:avLst/>
@@ -25302,407 +25302,13 @@
           </a:bodyPr>
           <a:lstStyle/>
           <a:p>
-            <a:pPr>
-              <a:spcAft>
-                <a:spcPts val="300"/>
-              </a:spcAft>
-            </a:pPr>
-            <a:r>
-              <a:rPr sz="1000" b="0">
-                <a:solidFill>
-                  <a:srgbClr val="9CA3AF"/>
+            <a:r>
+              <a:rPr sz="900" b="0">
+                <a:solidFill>
+                  <a:srgbClr val="6B7280"/>
                 </a:solidFill>
                 <a:latin typeface="Calibri"/>
               </a:rPr>
-              <a:t>CRS-class managed signatures + CVE virtual-patch feed.</a:t>
-            </a:r>
-          </a:p>
-        </p:txBody>
-      </p:sp>
-      <p:sp>
-        <p:nvSpPr>
-          <p:cNvPr id="41" name="Rectangle 40"/>
-          <p:cNvSpPr/>
-          <p:nvPr/>
-        </p:nvSpPr>
-        <p:spPr>
-          <a:xfrm>
-            <a:off x="9116568" y="3675887"/>
-            <a:ext cx="2706624" cy="1783080"/>
-          </a:xfrm>
-          <a:prstGeom prst="rect">
-            <a:avLst/>
-          </a:prstGeom>
-          <a:solidFill>
-            <a:srgbClr val="151B27"/>
-          </a:solidFill>
-          <a:ln w="12700">
-            <a:solidFill>
-              <a:srgbClr val="1F2937"/>
-            </a:solidFill>
-          </a:ln>
-          <a:effectLst/>
-        </p:spPr>
-        <p:style>
-          <a:lnRef idx="1">
-            <a:schemeClr val="accent1"/>
-          </a:lnRef>
-          <a:fillRef idx="3">
-            <a:schemeClr val="accent1"/>
-          </a:fillRef>
-          <a:effectRef idx="2">
-            <a:schemeClr val="accent1"/>
-          </a:effectRef>
-          <a:fontRef idx="minor">
-            <a:schemeClr val="lt1"/>
-          </a:fontRef>
-        </p:style>
-        <p:txBody>
-          <a:bodyPr rtlCol="0" anchor="ctr"/>
-          <a:lstStyle/>
-          <a:p>
-            <a:pPr algn="ctr"/>
-          </a:p>
-        </p:txBody>
-      </p:sp>
-      <p:sp>
-        <p:nvSpPr>
-          <p:cNvPr id="42" name="Rectangle 41"/>
-          <p:cNvSpPr/>
-          <p:nvPr/>
-        </p:nvSpPr>
-        <p:spPr>
-          <a:xfrm>
-            <a:off x="9116568" y="3675887"/>
-            <a:ext cx="54864" cy="1783080"/>
-          </a:xfrm>
-          <a:prstGeom prst="rect">
-            <a:avLst/>
-          </a:prstGeom>
-          <a:solidFill>
-            <a:srgbClr val="22D3EE"/>
-          </a:solidFill>
-          <a:ln>
-            <a:noFill/>
-          </a:ln>
-          <a:effectLst/>
-        </p:spPr>
-        <p:style>
-          <a:lnRef idx="1">
-            <a:schemeClr val="accent1"/>
-          </a:lnRef>
-          <a:fillRef idx="3">
-            <a:schemeClr val="accent1"/>
-          </a:fillRef>
-          <a:effectRef idx="2">
-            <a:schemeClr val="accent1"/>
-          </a:effectRef>
-          <a:fontRef idx="minor">
-            <a:schemeClr val="lt1"/>
-          </a:fontRef>
-        </p:style>
-        <p:txBody>
-          <a:bodyPr rtlCol="0" anchor="ctr"/>
-          <a:lstStyle/>
-          <a:p>
-            <a:pPr algn="ctr"/>
-          </a:p>
-        </p:txBody>
-      </p:sp>
-      <p:sp>
-        <p:nvSpPr>
-          <p:cNvPr id="43" name="TextBox 42"/>
-          <p:cNvSpPr txBox="1"/>
-          <p:nvPr/>
-        </p:nvSpPr>
-        <p:spPr>
-          <a:xfrm>
-            <a:off x="9317736" y="3803903"/>
-            <a:ext cx="2340864" cy="237744"/>
-          </a:xfrm>
-          <a:prstGeom prst="rect">
-            <a:avLst/>
-          </a:prstGeom>
-          <a:noFill/>
-        </p:spPr>
-        <p:txBody>
-          <a:bodyPr wrap="square" anchor="t" lIns="0" rIns="0" tIns="0" bIns="0">
-            <a:spAutoFit/>
-          </a:bodyPr>
-          <a:lstStyle/>
-          <a:p>
-            <a:r>
-              <a:rPr sz="900" b="1">
-                <a:solidFill>
-                  <a:srgbClr val="22D3EE"/>
-                </a:solidFill>
-                <a:latin typeface="Courier New"/>
-              </a:rPr>
-              <a:t>FOUNDATION  ·  S→L</a:t>
-            </a:r>
-          </a:p>
-        </p:txBody>
-      </p:sp>
-      <p:sp>
-        <p:nvSpPr>
-          <p:cNvPr id="44" name="TextBox 43"/>
-          <p:cNvSpPr txBox="1"/>
-          <p:nvPr/>
-        </p:nvSpPr>
-        <p:spPr>
-          <a:xfrm>
-            <a:off x="9317736" y="4096511"/>
-            <a:ext cx="2340864" cy="548640"/>
-          </a:xfrm>
-          <a:prstGeom prst="rect">
-            <a:avLst/>
-          </a:prstGeom>
-          <a:noFill/>
-        </p:spPr>
-        <p:txBody>
-          <a:bodyPr wrap="square" anchor="t" lIns="0" rIns="0" tIns="0" bIns="0">
-            <a:spAutoFit/>
-          </a:bodyPr>
-          <a:lstStyle/>
-          <a:p>
-            <a:r>
-              <a:rPr sz="1250" b="1">
-                <a:solidFill>
-                  <a:srgbClr val="E5E7EB"/>
-                </a:solidFill>
-                <a:latin typeface="Calibri"/>
-              </a:rPr>
-              <a:t>Enterprise identity — RBAC &amp; SSO</a:t>
-            </a:r>
-          </a:p>
-        </p:txBody>
-      </p:sp>
-      <p:sp>
-        <p:nvSpPr>
-          <p:cNvPr id="45" name="TextBox 44"/>
-          <p:cNvSpPr txBox="1"/>
-          <p:nvPr/>
-        </p:nvSpPr>
-        <p:spPr>
-          <a:xfrm>
-            <a:off x="9317736" y="4498848"/>
-            <a:ext cx="2340864" cy="868680"/>
-          </a:xfrm>
-          <a:prstGeom prst="rect">
-            <a:avLst/>
-          </a:prstGeom>
-          <a:noFill/>
-        </p:spPr>
-        <p:txBody>
-          <a:bodyPr wrap="square" anchor="t" lIns="0" rIns="0" tIns="0" bIns="0">
-            <a:spAutoFit/>
-          </a:bodyPr>
-          <a:lstStyle/>
-          <a:p>
-            <a:pPr>
-              <a:spcAft>
-                <a:spcPts val="300"/>
-              </a:spcAft>
-            </a:pPr>
-            <a:r>
-              <a:rPr sz="1000" b="0">
-                <a:solidFill>
-                  <a:srgbClr val="9CA3AF"/>
-                </a:solidFill>
-                <a:latin typeface="Calibri"/>
-              </a:rPr>
-              <a:t>Multi-user accounts, human RBAC, per-user audit, dashboard OIDC SSO. P1 self-service hardening ships standalone.</a:t>
-            </a:r>
-          </a:p>
-        </p:txBody>
-      </p:sp>
-      <p:sp>
-        <p:nvSpPr>
-          <p:cNvPr id="46" name="Rectangle 45"/>
-          <p:cNvSpPr/>
-          <p:nvPr/>
-        </p:nvSpPr>
-        <p:spPr>
-          <a:xfrm>
-            <a:off x="365760" y="5596128"/>
-            <a:ext cx="11420856" cy="713232"/>
-          </a:xfrm>
-          <a:prstGeom prst="rect">
-            <a:avLst/>
-          </a:prstGeom>
-          <a:solidFill>
-            <a:srgbClr val="1A2030"/>
-          </a:solidFill>
-          <a:ln w="12700">
-            <a:solidFill>
-              <a:srgbClr val="1F2937"/>
-            </a:solidFill>
-          </a:ln>
-          <a:effectLst/>
-        </p:spPr>
-        <p:style>
-          <a:lnRef idx="1">
-            <a:schemeClr val="accent1"/>
-          </a:lnRef>
-          <a:fillRef idx="3">
-            <a:schemeClr val="accent1"/>
-          </a:fillRef>
-          <a:effectRef idx="2">
-            <a:schemeClr val="accent1"/>
-          </a:effectRef>
-          <a:fontRef idx="minor">
-            <a:schemeClr val="lt1"/>
-          </a:fontRef>
-        </p:style>
-        <p:txBody>
-          <a:bodyPr rtlCol="0" anchor="ctr"/>
-          <a:lstStyle/>
-          <a:p>
-            <a:pPr algn="ctr"/>
-          </a:p>
-        </p:txBody>
-      </p:sp>
-      <p:sp>
-        <p:nvSpPr>
-          <p:cNvPr id="47" name="Rectangle 46"/>
-          <p:cNvSpPr/>
-          <p:nvPr/>
-        </p:nvSpPr>
-        <p:spPr>
-          <a:xfrm>
-            <a:off x="365760" y="5596128"/>
-            <a:ext cx="54864" cy="713232"/>
-          </a:xfrm>
-          <a:prstGeom prst="rect">
-            <a:avLst/>
-          </a:prstGeom>
-          <a:solidFill>
-            <a:srgbClr val="FFD541"/>
-          </a:solidFill>
-          <a:ln>
-            <a:noFill/>
-          </a:ln>
-          <a:effectLst/>
-        </p:spPr>
-        <p:style>
-          <a:lnRef idx="1">
-            <a:schemeClr val="accent1"/>
-          </a:lnRef>
-          <a:fillRef idx="3">
-            <a:schemeClr val="accent1"/>
-          </a:fillRef>
-          <a:effectRef idx="2">
-            <a:schemeClr val="accent1"/>
-          </a:effectRef>
-          <a:fontRef idx="minor">
-            <a:schemeClr val="lt1"/>
-          </a:fontRef>
-        </p:style>
-        <p:txBody>
-          <a:bodyPr rtlCol="0" anchor="ctr"/>
-          <a:lstStyle/>
-          <a:p>
-            <a:pPr algn="ctr"/>
-          </a:p>
-        </p:txBody>
-      </p:sp>
-      <p:sp>
-        <p:nvSpPr>
-          <p:cNvPr id="48" name="TextBox 47"/>
-          <p:cNvSpPr txBox="1"/>
-          <p:nvPr/>
-        </p:nvSpPr>
-        <p:spPr>
-          <a:xfrm>
-            <a:off x="594360" y="5715000"/>
-            <a:ext cx="2926080" cy="274320"/>
-          </a:xfrm>
-          <a:prstGeom prst="rect">
-            <a:avLst/>
-          </a:prstGeom>
-          <a:noFill/>
-        </p:spPr>
-        <p:txBody>
-          <a:bodyPr wrap="square" anchor="t" lIns="0" rIns="0" tIns="0" bIns="0">
-            <a:spAutoFit/>
-          </a:bodyPr>
-          <a:lstStyle/>
-          <a:p>
-            <a:r>
-              <a:rPr sz="1000" b="1">
-                <a:solidFill>
-                  <a:srgbClr val="FFD541"/>
-                </a:solidFill>
-                <a:latin typeface="Courier New"/>
-              </a:rPr>
-              <a:t>▶ RECOMMENDED NEXT</a:t>
-            </a:r>
-          </a:p>
-        </p:txBody>
-      </p:sp>
-      <p:sp>
-        <p:nvSpPr>
-          <p:cNvPr id="49" name="TextBox 48"/>
-          <p:cNvSpPr txBox="1"/>
-          <p:nvPr/>
-        </p:nvSpPr>
-        <p:spPr>
-          <a:xfrm>
-            <a:off x="594360" y="5961888"/>
-            <a:ext cx="10972800" cy="274320"/>
-          </a:xfrm>
-          <a:prstGeom prst="rect">
-            <a:avLst/>
-          </a:prstGeom>
-          <a:noFill/>
-        </p:spPr>
-        <p:txBody>
-          <a:bodyPr wrap="square" anchor="t" lIns="0" rIns="0" tIns="0" bIns="0">
-            <a:spAutoFit/>
-          </a:bodyPr>
-          <a:lstStyle/>
-          <a:p>
-            <a:r>
-              <a:rPr sz="1100" b="0">
-                <a:solidFill>
-                  <a:srgbClr val="9CA3AF"/>
-                </a:solidFill>
-                <a:latin typeface="Calibri"/>
-              </a:rPr>
-              <a:t>Tier 1A — wire the existing API guards (S) on a green branch — ships Gartner’s #1 priority; Foundation P1 (self-service hardening) is a parallel standalone win.</a:t>
-            </a:r>
-          </a:p>
-        </p:txBody>
-      </p:sp>
-      <p:sp>
-        <p:nvSpPr>
-          <p:cNvPr id="50" name="TextBox 49"/>
-          <p:cNvSpPr txBox="1"/>
-          <p:nvPr/>
-        </p:nvSpPr>
-        <p:spPr>
-          <a:xfrm>
-            <a:off x="365760" y="6528816"/>
-            <a:ext cx="7315200" cy="274320"/>
-          </a:xfrm>
-          <a:prstGeom prst="rect">
-            <a:avLst/>
-          </a:prstGeom>
-          <a:noFill/>
-        </p:spPr>
-        <p:txBody>
-          <a:bodyPr wrap="square" anchor="t" lIns="0" rIns="0" tIns="0" bIns="0">
-            <a:spAutoFit/>
-          </a:bodyPr>
-          <a:lstStyle/>
-          <a:p>
-            <a:r>
-              <a:rPr sz="900" b="0">
-                <a:solidFill>
-                  <a:srgbClr val="6B7280"/>
-                </a:solidFill>
-                <a:latin typeface="Calibri"/>
-              </a:rPr>
               <a:t>Aegis-Gate v0.1.0  ·  WAF &amp; Security Gateway  ·  north-star roadmap</a:t>
             </a:r>
           </a:p>
@@ -25710,7 +25316,7 @@
       </p:sp>
       <p:sp>
         <p:nvSpPr>
-          <p:cNvPr id="51" name="TextBox 50"/>
+          <p:cNvPr id="41" name="TextBox 40"/>
           <p:cNvSpPr txBox="1"/>
           <p:nvPr/>
         </p:nvSpPr>
@@ -32448,7 +32054,7 @@
                 <a:ea typeface="Calibri" pitchFamily="34" charset="-122"/>
                 <a:cs typeface="Calibri" pitchFamily="34" charset="-120"/>
               </a:rPr>
-              <a:t>HTTP/1.1 · HTTP/2 · HTTP/3 · WS · gRPC · TCP</a:t>
+              <a:t>HTTP/1.1 · HTTP/2 · WS · gRPC · TCP</a:t>
             </a:r>
             <a:endParaRPr lang="en-US" sz="1400" dirty="0"/>
           </a:p>
@@ -32487,7 +32093,7 @@
                 <a:ea typeface="Calibri" pitchFamily="34" charset="-122"/>
                 <a:cs typeface="Calibri" pitchFamily="34" charset="-120"/>
               </a:rPr>
-              <a:t>ALPN-driven auto upgrade. WebSocket bridge auto-detected on http/https/auto schemes. h3 listener behind the `http3` feature (quinn + h3). Raw TCP tunnel via CONNECT.</a:t>
+              <a:t>ALPN-driven auto upgrade. WebSocket bridge auto-detected on http/https/auto schemes. Raw TCP tunnel via CONNECT.</a:t>
             </a:r>
             <a:endParaRPr lang="en-US" sz="1100" dirty="0"/>
           </a:p>
